--- a/夏ゲーム企画.pptx
+++ b/夏ゲーム企画.pptx
@@ -5,8 +5,12 @@
     <p:sldMasterId id="2147483648" r:id="rId1"/>
   </p:sldMasterIdLst>
   <p:sldIdLst>
-    <p:sldId id="256" r:id="rId2"/>
-    <p:sldId id="257" r:id="rId3"/>
+    <p:sldId id="258" r:id="rId2"/>
+    <p:sldId id="259" r:id="rId3"/>
+    <p:sldId id="257" r:id="rId4"/>
+    <p:sldId id="261" r:id="rId5"/>
+    <p:sldId id="256" r:id="rId6"/>
+    <p:sldId id="260" r:id="rId7"/>
   </p:sldIdLst>
   <p:sldSz cx="12192000" cy="6858000"/>
   <p:notesSz cx="6858000" cy="9144000"/>
@@ -105,6 +109,11 @@
       </a:defRPr>
     </a:lvl9pPr>
   </p:defaultTextStyle>
+  <p:extLst>
+    <p:ext uri="{EFAFB233-063F-42B5-8137-9DF3F51BA10A}">
+      <p15:sldGuideLst xmlns:p15="http://schemas.microsoft.com/office/powerpoint/2012/main"/>
+    </p:ext>
+  </p:extLst>
 </p:presentation>
 </file>
 
@@ -255,7 +264,7 @@
           <a:p>
             <a:fld id="{295F8ADE-B108-46AD-965F-F7327D8A4733}" type="datetimeFigureOut">
               <a:rPr kumimoji="1" lang="ja-JP" altLang="en-US" smtClean="0"/>
-              <a:t>2026/5/7</a:t>
+              <a:t>2026/5/12</a:t>
             </a:fld>
             <a:endParaRPr kumimoji="1" lang="ja-JP" altLang="en-US"/>
           </a:p>
@@ -485,7 +494,7 @@
           <a:p>
             <a:fld id="{295F8ADE-B108-46AD-965F-F7327D8A4733}" type="datetimeFigureOut">
               <a:rPr kumimoji="1" lang="ja-JP" altLang="en-US" smtClean="0"/>
-              <a:t>2026/5/7</a:t>
+              <a:t>2026/5/12</a:t>
             </a:fld>
             <a:endParaRPr kumimoji="1" lang="ja-JP" altLang="en-US"/>
           </a:p>
@@ -725,7 +734,7 @@
           <a:p>
             <a:fld id="{295F8ADE-B108-46AD-965F-F7327D8A4733}" type="datetimeFigureOut">
               <a:rPr kumimoji="1" lang="ja-JP" altLang="en-US" smtClean="0"/>
-              <a:t>2026/5/7</a:t>
+              <a:t>2026/5/12</a:t>
             </a:fld>
             <a:endParaRPr kumimoji="1" lang="ja-JP" altLang="en-US"/>
           </a:p>
@@ -955,7 +964,7 @@
           <a:p>
             <a:fld id="{295F8ADE-B108-46AD-965F-F7327D8A4733}" type="datetimeFigureOut">
               <a:rPr kumimoji="1" lang="ja-JP" altLang="en-US" smtClean="0"/>
-              <a:t>2026/5/7</a:t>
+              <a:t>2026/5/12</a:t>
             </a:fld>
             <a:endParaRPr kumimoji="1" lang="ja-JP" altLang="en-US"/>
           </a:p>
@@ -1230,7 +1239,7 @@
           <a:p>
             <a:fld id="{295F8ADE-B108-46AD-965F-F7327D8A4733}" type="datetimeFigureOut">
               <a:rPr kumimoji="1" lang="ja-JP" altLang="en-US" smtClean="0"/>
-              <a:t>2026/5/7</a:t>
+              <a:t>2026/5/12</a:t>
             </a:fld>
             <a:endParaRPr kumimoji="1" lang="ja-JP" altLang="en-US"/>
           </a:p>
@@ -1559,7 +1568,7 @@
           <a:p>
             <a:fld id="{295F8ADE-B108-46AD-965F-F7327D8A4733}" type="datetimeFigureOut">
               <a:rPr kumimoji="1" lang="ja-JP" altLang="en-US" smtClean="0"/>
-              <a:t>2026/5/7</a:t>
+              <a:t>2026/5/12</a:t>
             </a:fld>
             <a:endParaRPr kumimoji="1" lang="ja-JP" altLang="en-US"/>
           </a:p>
@@ -2035,7 +2044,7 @@
           <a:p>
             <a:fld id="{295F8ADE-B108-46AD-965F-F7327D8A4733}" type="datetimeFigureOut">
               <a:rPr kumimoji="1" lang="ja-JP" altLang="en-US" smtClean="0"/>
-              <a:t>2026/5/7</a:t>
+              <a:t>2026/5/12</a:t>
             </a:fld>
             <a:endParaRPr kumimoji="1" lang="ja-JP" altLang="en-US"/>
           </a:p>
@@ -2176,7 +2185,7 @@
           <a:p>
             <a:fld id="{295F8ADE-B108-46AD-965F-F7327D8A4733}" type="datetimeFigureOut">
               <a:rPr kumimoji="1" lang="ja-JP" altLang="en-US" smtClean="0"/>
-              <a:t>2026/5/7</a:t>
+              <a:t>2026/5/12</a:t>
             </a:fld>
             <a:endParaRPr kumimoji="1" lang="ja-JP" altLang="en-US"/>
           </a:p>
@@ -2289,7 +2298,7 @@
           <a:p>
             <a:fld id="{295F8ADE-B108-46AD-965F-F7327D8A4733}" type="datetimeFigureOut">
               <a:rPr kumimoji="1" lang="ja-JP" altLang="en-US" smtClean="0"/>
-              <a:t>2026/5/7</a:t>
+              <a:t>2026/5/12</a:t>
             </a:fld>
             <a:endParaRPr kumimoji="1" lang="ja-JP" altLang="en-US"/>
           </a:p>
@@ -2632,7 +2641,7 @@
           <a:p>
             <a:fld id="{295F8ADE-B108-46AD-965F-F7327D8A4733}" type="datetimeFigureOut">
               <a:rPr kumimoji="1" lang="ja-JP" altLang="en-US" smtClean="0"/>
-              <a:t>2026/5/7</a:t>
+              <a:t>2026/5/12</a:t>
             </a:fld>
             <a:endParaRPr kumimoji="1" lang="ja-JP" altLang="en-US"/>
           </a:p>
@@ -2920,7 +2929,7 @@
           <a:p>
             <a:fld id="{295F8ADE-B108-46AD-965F-F7327D8A4733}" type="datetimeFigureOut">
               <a:rPr kumimoji="1" lang="ja-JP" altLang="en-US" smtClean="0"/>
-              <a:t>2026/5/7</a:t>
+              <a:t>2026/5/12</a:t>
             </a:fld>
             <a:endParaRPr kumimoji="1" lang="ja-JP" altLang="en-US"/>
           </a:p>
@@ -3193,7 +3202,7 @@
           <a:p>
             <a:fld id="{295F8ADE-B108-46AD-965F-F7327D8A4733}" type="datetimeFigureOut">
               <a:rPr kumimoji="1" lang="ja-JP" altLang="en-US" smtClean="0"/>
-              <a:t>2026/5/7</a:t>
+              <a:t>2026/5/12</a:t>
             </a:fld>
             <a:endParaRPr kumimoji="1" lang="ja-JP" altLang="en-US"/>
           </a:p>
@@ -3612,314 +3621,102 @@
       </p:grpSpPr>
       <p:sp>
         <p:nvSpPr>
-          <p:cNvPr id="4" name="テキスト ボックス 3">
-            <a:extLst>
-              <a:ext uri="{FF2B5EF4-FFF2-40B4-BE49-F238E27FC236}">
-                <a16:creationId xmlns:a16="http://schemas.microsoft.com/office/drawing/2014/main" id="{7A9EEDD8-5C9A-3BD1-AE5E-1B58FC870539}"/>
-              </a:ext>
-            </a:extLst>
-          </p:cNvPr>
-          <p:cNvSpPr txBox="1"/>
-          <p:nvPr/>
-        </p:nvSpPr>
-        <p:spPr>
-          <a:xfrm>
-            <a:off x="794327" y="720436"/>
-            <a:ext cx="877163" cy="369332"/>
-          </a:xfrm>
-          <a:prstGeom prst="rect">
-            <a:avLst/>
-          </a:prstGeom>
-          <a:noFill/>
-        </p:spPr>
-        <p:txBody>
-          <a:bodyPr wrap="none" rtlCol="0">
-            <a:spAutoFit/>
-          </a:bodyPr>
+          <p:cNvPr id="2" name="タイトル 1">
+            <a:extLst>
+              <a:ext uri="{FF2B5EF4-FFF2-40B4-BE49-F238E27FC236}">
+                <a16:creationId xmlns:a16="http://schemas.microsoft.com/office/drawing/2014/main" id="{846F842C-54DD-B570-41E9-C81183F751BF}"/>
+              </a:ext>
+            </a:extLst>
+          </p:cNvPr>
+          <p:cNvSpPr>
+            <a:spLocks noGrp="1"/>
+          </p:cNvSpPr>
+          <p:nvPr>
+            <p:ph type="ctrTitle"/>
+          </p:nvPr>
+        </p:nvSpPr>
+        <p:spPr/>
+        <p:txBody>
+          <a:bodyPr/>
+          <a:lstStyle/>
+          <a:p>
+            <a:r>
+              <a:rPr kumimoji="1" lang="en-US" altLang="ja-JP" dirty="0"/>
+              <a:t>Iron Sword</a:t>
+            </a:r>
+            <a:endParaRPr kumimoji="1" lang="ja-JP" altLang="en-US" dirty="0"/>
+          </a:p>
+        </p:txBody>
+      </p:sp>
+      <p:sp>
+        <p:nvSpPr>
+          <p:cNvPr id="3" name="字幕 2">
+            <a:extLst>
+              <a:ext uri="{FF2B5EF4-FFF2-40B4-BE49-F238E27FC236}">
+                <a16:creationId xmlns:a16="http://schemas.microsoft.com/office/drawing/2014/main" id="{3F631DDE-DD4A-7AE0-491D-6022E9F3071F}"/>
+              </a:ext>
+            </a:extLst>
+          </p:cNvPr>
+          <p:cNvSpPr>
+            <a:spLocks noGrp="1"/>
+          </p:cNvSpPr>
+          <p:nvPr>
+            <p:ph type="subTitle" idx="1"/>
+          </p:nvPr>
+        </p:nvSpPr>
+        <p:spPr/>
+        <p:txBody>
+          <a:bodyPr/>
           <a:lstStyle/>
           <a:p>
             <a:r>
               <a:rPr lang="ja-JP" altLang="en-US" dirty="0"/>
-              <a:t>斬鉄剣</a:t>
-            </a:r>
+              <a:t>ジャンル：</a:t>
+            </a:r>
+            <a:r>
+              <a:rPr lang="en-US" altLang="ja-JP" dirty="0"/>
+              <a:t>3D</a:t>
+            </a:r>
+            <a:r>
+              <a:rPr lang="ja-JP" altLang="en-US" dirty="0"/>
+              <a:t>アクション</a:t>
+            </a:r>
+            <a:endParaRPr lang="en-US" altLang="ja-JP" dirty="0"/>
+          </a:p>
+          <a:p>
+            <a:r>
+              <a:rPr lang="ja-JP" altLang="en-US" dirty="0"/>
+              <a:t>プレイ人数：</a:t>
+            </a:r>
+            <a:r>
+              <a:rPr lang="en-US" altLang="ja-JP" dirty="0"/>
+              <a:t>1</a:t>
+            </a:r>
+            <a:r>
+              <a:rPr lang="ja-JP" altLang="en-US" dirty="0"/>
+              <a:t>人</a:t>
+            </a:r>
+            <a:endParaRPr lang="en-US" altLang="ja-JP" dirty="0"/>
+          </a:p>
+          <a:p>
+            <a:r>
+              <a:rPr kumimoji="1" lang="ja-JP" altLang="en-US" dirty="0"/>
+              <a:t>プラットフォーム：</a:t>
+            </a:r>
+            <a:r>
+              <a:rPr kumimoji="1" lang="en-US" altLang="ja-JP" dirty="0"/>
+              <a:t>Windows</a:t>
+            </a:r>
+          </a:p>
+          <a:p>
             <a:endParaRPr kumimoji="1" lang="ja-JP" altLang="en-US" dirty="0"/>
-          </a:p>
-        </p:txBody>
-      </p:sp>
-      <p:pic>
-        <p:nvPicPr>
-          <p:cNvPr id="6" name="図 5">
-            <a:extLst>
-              <a:ext uri="{FF2B5EF4-FFF2-40B4-BE49-F238E27FC236}">
-                <a16:creationId xmlns:a16="http://schemas.microsoft.com/office/drawing/2014/main" id="{533E33F7-14C9-B1B5-5486-FC585BE355A9}"/>
-              </a:ext>
-            </a:extLst>
-          </p:cNvPr>
-          <p:cNvPicPr>
-            <a:picLocks noChangeAspect="1"/>
-          </p:cNvPicPr>
-          <p:nvPr/>
-        </p:nvPicPr>
-        <p:blipFill>
-          <a:blip r:embed="rId2">
-            <a:extLst>
-              <a:ext uri="{28A0092B-C50C-407E-A947-70E740481C1C}">
-                <a14:useLocalDpi xmlns:a14="http://schemas.microsoft.com/office/drawing/2010/main" val="0"/>
-              </a:ext>
-            </a:extLst>
-          </a:blip>
-          <a:stretch>
-            <a:fillRect/>
-          </a:stretch>
-        </p:blipFill>
-        <p:spPr>
-          <a:xfrm>
-            <a:off x="794327" y="4637982"/>
-            <a:ext cx="3671601" cy="1738116"/>
-          </a:xfrm>
-          <a:prstGeom prst="rect">
-            <a:avLst/>
-          </a:prstGeom>
-        </p:spPr>
-      </p:pic>
-      <p:pic>
-        <p:nvPicPr>
-          <p:cNvPr id="8" name="図 7">
-            <a:extLst>
-              <a:ext uri="{FF2B5EF4-FFF2-40B4-BE49-F238E27FC236}">
-                <a16:creationId xmlns:a16="http://schemas.microsoft.com/office/drawing/2014/main" id="{3F026415-C053-68AC-8729-A94D75BE7E80}"/>
-              </a:ext>
-            </a:extLst>
-          </p:cNvPr>
-          <p:cNvPicPr>
-            <a:picLocks noChangeAspect="1"/>
-          </p:cNvPicPr>
-          <p:nvPr/>
-        </p:nvPicPr>
-        <p:blipFill>
-          <a:blip r:embed="rId3">
-            <a:extLst>
-              <a:ext uri="{28A0092B-C50C-407E-A947-70E740481C1C}">
-                <a14:useLocalDpi xmlns:a14="http://schemas.microsoft.com/office/drawing/2010/main" val="0"/>
-              </a:ext>
-            </a:extLst>
-          </a:blip>
-          <a:stretch>
-            <a:fillRect/>
-          </a:stretch>
-        </p:blipFill>
-        <p:spPr>
-          <a:xfrm>
-            <a:off x="1791810" y="3311804"/>
-            <a:ext cx="1676634" cy="1324160"/>
-          </a:xfrm>
-          <a:prstGeom prst="rect">
-            <a:avLst/>
-          </a:prstGeom>
-        </p:spPr>
-      </p:pic>
-      <p:pic>
-        <p:nvPicPr>
-          <p:cNvPr id="10" name="図 9">
-            <a:extLst>
-              <a:ext uri="{FF2B5EF4-FFF2-40B4-BE49-F238E27FC236}">
-                <a16:creationId xmlns:a16="http://schemas.microsoft.com/office/drawing/2014/main" id="{7299FB53-0C3B-4D62-751A-973DD1CB40FF}"/>
-              </a:ext>
-            </a:extLst>
-          </p:cNvPr>
-          <p:cNvPicPr>
-            <a:picLocks noChangeAspect="1"/>
-          </p:cNvPicPr>
-          <p:nvPr/>
-        </p:nvPicPr>
-        <p:blipFill>
-          <a:blip r:embed="rId4">
-            <a:extLst>
-              <a:ext uri="{28A0092B-C50C-407E-A947-70E740481C1C}">
-                <a14:useLocalDpi xmlns:a14="http://schemas.microsoft.com/office/drawing/2010/main" val="0"/>
-              </a:ext>
-            </a:extLst>
-          </a:blip>
-          <a:stretch>
-            <a:fillRect/>
-          </a:stretch>
-        </p:blipFill>
-        <p:spPr>
-          <a:xfrm>
-            <a:off x="6096000" y="3311804"/>
-            <a:ext cx="5504873" cy="3092985"/>
-          </a:xfrm>
-          <a:prstGeom prst="rect">
-            <a:avLst/>
-          </a:prstGeom>
-        </p:spPr>
-      </p:pic>
-      <p:sp>
-        <p:nvSpPr>
-          <p:cNvPr id="11" name="テキスト ボックス 10">
-            <a:extLst>
-              <a:ext uri="{FF2B5EF4-FFF2-40B4-BE49-F238E27FC236}">
-                <a16:creationId xmlns:a16="http://schemas.microsoft.com/office/drawing/2014/main" id="{797F338B-8999-EBA8-C8A1-44B41F88CD6B}"/>
-              </a:ext>
-            </a:extLst>
-          </p:cNvPr>
-          <p:cNvSpPr txBox="1"/>
-          <p:nvPr/>
-        </p:nvSpPr>
-        <p:spPr>
-          <a:xfrm>
-            <a:off x="1383632" y="2756797"/>
-            <a:ext cx="2492990" cy="369332"/>
-          </a:xfrm>
-          <a:prstGeom prst="rect">
-            <a:avLst/>
-          </a:prstGeom>
-          <a:noFill/>
-        </p:spPr>
-        <p:txBody>
-          <a:bodyPr wrap="none" rtlCol="0">
-            <a:spAutoFit/>
-          </a:bodyPr>
-          <a:lstStyle/>
-          <a:p>
-            <a:r>
-              <a:rPr kumimoji="1" lang="ja-JP" altLang="en-US" dirty="0"/>
-              <a:t>攻撃でゲージを貯める</a:t>
-            </a:r>
-          </a:p>
-        </p:txBody>
-      </p:sp>
-      <p:sp>
-        <p:nvSpPr>
-          <p:cNvPr id="12" name="テキスト ボックス 11">
-            <a:extLst>
-              <a:ext uri="{FF2B5EF4-FFF2-40B4-BE49-F238E27FC236}">
-                <a16:creationId xmlns:a16="http://schemas.microsoft.com/office/drawing/2014/main" id="{62BA1A6C-6ACE-26D9-E116-EF76580E7A93}"/>
-              </a:ext>
-            </a:extLst>
-          </p:cNvPr>
-          <p:cNvSpPr txBox="1"/>
-          <p:nvPr/>
-        </p:nvSpPr>
-        <p:spPr>
-          <a:xfrm>
-            <a:off x="7140276" y="2541388"/>
-            <a:ext cx="3416320" cy="369332"/>
-          </a:xfrm>
-          <a:prstGeom prst="rect">
-            <a:avLst/>
-          </a:prstGeom>
-          <a:noFill/>
-        </p:spPr>
-        <p:txBody>
-          <a:bodyPr wrap="none" rtlCol="0">
-            <a:spAutoFit/>
-          </a:bodyPr>
-          <a:lstStyle/>
-          <a:p>
-            <a:r>
-              <a:rPr kumimoji="1" lang="ja-JP" altLang="en-US" dirty="0"/>
-              <a:t>ゲージを消費して必殺技を発動</a:t>
-            </a:r>
-          </a:p>
-        </p:txBody>
-      </p:sp>
-      <p:sp>
-        <p:nvSpPr>
-          <p:cNvPr id="13" name="矢印: 右 12">
-            <a:extLst>
-              <a:ext uri="{FF2B5EF4-FFF2-40B4-BE49-F238E27FC236}">
-                <a16:creationId xmlns:a16="http://schemas.microsoft.com/office/drawing/2014/main" id="{912FBBBD-056B-7254-FF1B-BCDFF3EC36B9}"/>
-              </a:ext>
-            </a:extLst>
-          </p:cNvPr>
-          <p:cNvSpPr/>
-          <p:nvPr/>
-        </p:nvSpPr>
-        <p:spPr>
-          <a:xfrm>
-            <a:off x="4729018" y="3749964"/>
-            <a:ext cx="1237673" cy="415636"/>
-          </a:xfrm>
-          <a:prstGeom prst="rightArrow">
-            <a:avLst/>
-          </a:prstGeom>
-        </p:spPr>
-        <p:style>
-          <a:lnRef idx="2">
-            <a:schemeClr val="accent1">
-              <a:shade val="15000"/>
-            </a:schemeClr>
-          </a:lnRef>
-          <a:fillRef idx="1">
-            <a:schemeClr val="accent1"/>
-          </a:fillRef>
-          <a:effectRef idx="0">
-            <a:schemeClr val="accent1"/>
-          </a:effectRef>
-          <a:fontRef idx="minor">
-            <a:schemeClr val="lt1"/>
-          </a:fontRef>
-        </p:style>
-        <p:txBody>
-          <a:bodyPr rtlCol="0" anchor="ctr"/>
-          <a:lstStyle/>
-          <a:p>
-            <a:pPr algn="ctr"/>
-            <a:endParaRPr kumimoji="1" lang="ja-JP" altLang="en-US"/>
-          </a:p>
-        </p:txBody>
-      </p:sp>
-      <p:sp>
-        <p:nvSpPr>
-          <p:cNvPr id="14" name="矢印: 右 13">
-            <a:extLst>
-              <a:ext uri="{FF2B5EF4-FFF2-40B4-BE49-F238E27FC236}">
-                <a16:creationId xmlns:a16="http://schemas.microsoft.com/office/drawing/2014/main" id="{8BF0D0A6-2640-80DA-2B97-E9A68776EF7E}"/>
-              </a:ext>
-            </a:extLst>
-          </p:cNvPr>
-          <p:cNvSpPr/>
-          <p:nvPr/>
-        </p:nvSpPr>
-        <p:spPr>
-          <a:xfrm flipH="1">
-            <a:off x="4683004" y="5299222"/>
-            <a:ext cx="1195919" cy="415636"/>
-          </a:xfrm>
-          <a:prstGeom prst="rightArrow">
-            <a:avLst/>
-          </a:prstGeom>
-        </p:spPr>
-        <p:style>
-          <a:lnRef idx="2">
-            <a:schemeClr val="accent1">
-              <a:shade val="15000"/>
-            </a:schemeClr>
-          </a:lnRef>
-          <a:fillRef idx="1">
-            <a:schemeClr val="accent1"/>
-          </a:fillRef>
-          <a:effectRef idx="0">
-            <a:schemeClr val="accent1"/>
-          </a:effectRef>
-          <a:fontRef idx="minor">
-            <a:schemeClr val="lt1"/>
-          </a:fontRef>
-        </p:style>
-        <p:txBody>
-          <a:bodyPr rtlCol="0" anchor="ctr"/>
-          <a:lstStyle/>
-          <a:p>
-            <a:pPr algn="ctr"/>
-            <a:endParaRPr kumimoji="1" lang="ja-JP" altLang="en-US"/>
           </a:p>
         </p:txBody>
       </p:sp>
     </p:spTree>
     <p:extLst>
       <p:ext uri="{BB962C8B-B14F-4D97-AF65-F5344CB8AC3E}">
-        <p14:creationId xmlns:p14="http://schemas.microsoft.com/office/powerpoint/2010/main" val="1773422627"/>
+        <p14:creationId xmlns:p14="http://schemas.microsoft.com/office/powerpoint/2010/main" val="3732904182"/>
       </p:ext>
     </p:extLst>
   </p:cSld>
@@ -3951,7 +3748,7 @@
           <p:cNvPr id="4" name="テキスト ボックス 3">
             <a:extLst>
               <a:ext uri="{FF2B5EF4-FFF2-40B4-BE49-F238E27FC236}">
-                <a16:creationId xmlns:a16="http://schemas.microsoft.com/office/drawing/2014/main" id="{80D26A04-2271-A027-F015-60D32318480D}"/>
+                <a16:creationId xmlns:a16="http://schemas.microsoft.com/office/drawing/2014/main" id="{73191CAD-547E-63E0-1E99-0946D6A3654E}"/>
               </a:ext>
             </a:extLst>
           </p:cNvPr>
@@ -3960,8 +3757,8 @@
         </p:nvSpPr>
         <p:spPr>
           <a:xfrm>
-            <a:off x="665018" y="738909"/>
-            <a:ext cx="3143809" cy="923330"/>
+            <a:off x="4721263" y="1466850"/>
+            <a:ext cx="2749471" cy="707886"/>
           </a:xfrm>
           <a:prstGeom prst="rect">
             <a:avLst/>
@@ -3975,47 +3772,162 @@
           <a:lstStyle/>
           <a:p>
             <a:r>
-              <a:rPr lang="ja-JP" altLang="en-US" dirty="0"/>
-              <a:t>・ステージ数：</a:t>
-            </a:r>
-            <a:r>
-              <a:rPr lang="en-US" altLang="ja-JP" dirty="0"/>
-              <a:t>1~3</a:t>
-            </a:r>
-            <a:r>
-              <a:rPr lang="ja-JP" altLang="en-US" dirty="0"/>
-              <a:t>ステージ</a:t>
-            </a:r>
-            <a:br>
-              <a:rPr lang="en-US" altLang="ja-JP" dirty="0"/>
-            </a:br>
-            <a:r>
-              <a:rPr lang="ja-JP" altLang="en-US" dirty="0"/>
-              <a:t>・敵　　　　：</a:t>
-            </a:r>
-            <a:r>
-              <a:rPr lang="en-US" altLang="ja-JP" dirty="0"/>
-              <a:t>3~4</a:t>
-            </a:r>
-            <a:r>
-              <a:rPr lang="ja-JP" altLang="en-US" dirty="0"/>
-              <a:t>種類</a:t>
-            </a:r>
-            <a:endParaRPr lang="en-US" altLang="ja-JP" dirty="0"/>
-          </a:p>
-          <a:p>
-            <a:r>
-              <a:rPr kumimoji="1" lang="ja-JP" altLang="en-US" dirty="0"/>
-              <a:t>・ボス　　　：</a:t>
-            </a:r>
-            <a:r>
-              <a:rPr kumimoji="1" lang="en-US" altLang="ja-JP" dirty="0"/>
-              <a:t>1~2</a:t>
-            </a:r>
-            <a:r>
-              <a:rPr kumimoji="1" lang="ja-JP" altLang="en-US" dirty="0"/>
-              <a:t>種類</a:t>
-            </a:r>
+              <a:rPr kumimoji="1" lang="ja-JP" altLang="en-US" sz="4000" dirty="0"/>
+              <a:t>コンセプト</a:t>
+            </a:r>
+            <a:endParaRPr kumimoji="1" lang="ja-JP" altLang="en-US" dirty="0"/>
+          </a:p>
+        </p:txBody>
+      </p:sp>
+      <p:sp>
+        <p:nvSpPr>
+          <p:cNvPr id="5" name="テキスト ボックス 4">
+            <a:extLst>
+              <a:ext uri="{FF2B5EF4-FFF2-40B4-BE49-F238E27FC236}">
+                <a16:creationId xmlns:a16="http://schemas.microsoft.com/office/drawing/2014/main" id="{9A0810D5-B6D9-0395-AB2D-115E6B7C4F50}"/>
+              </a:ext>
+            </a:extLst>
+          </p:cNvPr>
+          <p:cNvSpPr txBox="1"/>
+          <p:nvPr/>
+        </p:nvSpPr>
+        <p:spPr>
+          <a:xfrm>
+            <a:off x="3579926" y="2967335"/>
+            <a:ext cx="5032147" cy="923330"/>
+          </a:xfrm>
+          <a:prstGeom prst="rect">
+            <a:avLst/>
+          </a:prstGeom>
+          <a:noFill/>
+        </p:spPr>
+        <p:txBody>
+          <a:bodyPr wrap="none" rtlCol="0">
+            <a:spAutoFit/>
+          </a:bodyPr>
+          <a:lstStyle/>
+          <a:p>
+            <a:r>
+              <a:rPr kumimoji="1" lang="ja-JP" altLang="en-US" sz="5400" dirty="0"/>
+              <a:t>シンプル</a:t>
+            </a:r>
+            <a:r>
+              <a:rPr kumimoji="1" lang="en-US" altLang="ja-JP" sz="5400" dirty="0"/>
+              <a:t>×</a:t>
+            </a:r>
+            <a:r>
+              <a:rPr lang="ja-JP" altLang="en-US" sz="5400" dirty="0"/>
+              <a:t>爽快</a:t>
+            </a:r>
+            <a:endParaRPr lang="en-US" altLang="ja-JP" sz="5400" dirty="0"/>
+          </a:p>
+        </p:txBody>
+      </p:sp>
+    </p:spTree>
+    <p:extLst>
+      <p:ext uri="{BB962C8B-B14F-4D97-AF65-F5344CB8AC3E}">
+        <p14:creationId xmlns:p14="http://schemas.microsoft.com/office/powerpoint/2010/main" val="1887785406"/>
+      </p:ext>
+    </p:extLst>
+  </p:cSld>
+  <p:clrMapOvr>
+    <a:masterClrMapping/>
+  </p:clrMapOvr>
+</p:sld>
+</file>
+
+<file path=ppt/slides/slide3.xml><?xml version="1.0" encoding="utf-8"?>
+<p:sld xmlns:a="http://schemas.openxmlformats.org/drawingml/2006/main" xmlns:r="http://schemas.openxmlformats.org/officeDocument/2006/relationships" xmlns:p="http://schemas.openxmlformats.org/presentationml/2006/main">
+  <p:cSld>
+    <p:spTree>
+      <p:nvGrpSpPr>
+        <p:cNvPr id="1" name=""/>
+        <p:cNvGrpSpPr/>
+        <p:nvPr/>
+      </p:nvGrpSpPr>
+      <p:grpSpPr>
+        <a:xfrm>
+          <a:off x="0" y="0"/>
+          <a:ext cx="0" cy="0"/>
+          <a:chOff x="0" y="0"/>
+          <a:chExt cx="0" cy="0"/>
+        </a:xfrm>
+      </p:grpSpPr>
+      <p:sp>
+        <p:nvSpPr>
+          <p:cNvPr id="3" name="テキスト ボックス 2">
+            <a:extLst>
+              <a:ext uri="{FF2B5EF4-FFF2-40B4-BE49-F238E27FC236}">
+                <a16:creationId xmlns:a16="http://schemas.microsoft.com/office/drawing/2014/main" id="{1CDB0864-9183-EA12-91B0-4130E0F5A634}"/>
+              </a:ext>
+            </a:extLst>
+          </p:cNvPr>
+          <p:cNvSpPr txBox="1"/>
+          <p:nvPr/>
+        </p:nvSpPr>
+        <p:spPr>
+          <a:xfrm>
+            <a:off x="781050" y="704850"/>
+            <a:ext cx="2749471" cy="707886"/>
+          </a:xfrm>
+          <a:prstGeom prst="rect">
+            <a:avLst/>
+          </a:prstGeom>
+          <a:noFill/>
+        </p:spPr>
+        <p:txBody>
+          <a:bodyPr wrap="none" rtlCol="0">
+            <a:spAutoFit/>
+          </a:bodyPr>
+          <a:lstStyle/>
+          <a:p>
+            <a:r>
+              <a:rPr kumimoji="1" lang="ja-JP" altLang="en-US" sz="4000" dirty="0"/>
+              <a:t>ゲーム概要</a:t>
+            </a:r>
+          </a:p>
+        </p:txBody>
+      </p:sp>
+      <p:sp>
+        <p:nvSpPr>
+          <p:cNvPr id="5" name="テキスト ボックス 4">
+            <a:extLst>
+              <a:ext uri="{FF2B5EF4-FFF2-40B4-BE49-F238E27FC236}">
+                <a16:creationId xmlns:a16="http://schemas.microsoft.com/office/drawing/2014/main" id="{81E7EC91-4465-C72C-1CE0-78AE38B34E1C}"/>
+              </a:ext>
+            </a:extLst>
+          </p:cNvPr>
+          <p:cNvSpPr txBox="1"/>
+          <p:nvPr/>
+        </p:nvSpPr>
+        <p:spPr>
+          <a:xfrm>
+            <a:off x="781050" y="1992050"/>
+            <a:ext cx="7007046" cy="954107"/>
+          </a:xfrm>
+          <a:prstGeom prst="rect">
+            <a:avLst/>
+          </a:prstGeom>
+          <a:noFill/>
+        </p:spPr>
+        <p:txBody>
+          <a:bodyPr wrap="none" rtlCol="0">
+            <a:spAutoFit/>
+          </a:bodyPr>
+          <a:lstStyle/>
+          <a:p>
+            <a:r>
+              <a:rPr lang="ja-JP" altLang="en-US" sz="2800" dirty="0"/>
+              <a:t>剣での通常攻撃コンボと必殺技で敵を倒し</a:t>
+            </a:r>
+            <a:endParaRPr lang="en-US" altLang="ja-JP" sz="2800" dirty="0"/>
+          </a:p>
+          <a:p>
+            <a:r>
+              <a:rPr lang="ja-JP" altLang="en-US" sz="2800" dirty="0"/>
+              <a:t>ステージを攻略していくゲーム</a:t>
+            </a:r>
+            <a:endParaRPr lang="en-US" altLang="ja-JP" sz="2800" dirty="0"/>
           </a:p>
         </p:txBody>
       </p:sp>
@@ -4023,6 +3935,769 @@
     <p:extLst>
       <p:ext uri="{BB962C8B-B14F-4D97-AF65-F5344CB8AC3E}">
         <p14:creationId xmlns:p14="http://schemas.microsoft.com/office/powerpoint/2010/main" val="2487228979"/>
+      </p:ext>
+    </p:extLst>
+  </p:cSld>
+  <p:clrMapOvr>
+    <a:masterClrMapping/>
+  </p:clrMapOvr>
+</p:sld>
+</file>
+
+<file path=ppt/slides/slide4.xml><?xml version="1.0" encoding="utf-8"?>
+<p:sld xmlns:a="http://schemas.openxmlformats.org/drawingml/2006/main" xmlns:r="http://schemas.openxmlformats.org/officeDocument/2006/relationships" xmlns:p="http://schemas.openxmlformats.org/presentationml/2006/main">
+  <p:cSld>
+    <p:spTree>
+      <p:nvGrpSpPr>
+        <p:cNvPr id="1" name=""/>
+        <p:cNvGrpSpPr/>
+        <p:nvPr/>
+      </p:nvGrpSpPr>
+      <p:grpSpPr>
+        <a:xfrm>
+          <a:off x="0" y="0"/>
+          <a:ext cx="0" cy="0"/>
+          <a:chOff x="0" y="0"/>
+          <a:chExt cx="0" cy="0"/>
+        </a:xfrm>
+      </p:grpSpPr>
+      <p:sp>
+        <p:nvSpPr>
+          <p:cNvPr id="4" name="テキスト ボックス 3">
+            <a:extLst>
+              <a:ext uri="{FF2B5EF4-FFF2-40B4-BE49-F238E27FC236}">
+                <a16:creationId xmlns:a16="http://schemas.microsoft.com/office/drawing/2014/main" id="{1F286948-9E6E-A637-A1C6-EEF496644A5E}"/>
+              </a:ext>
+            </a:extLst>
+          </p:cNvPr>
+          <p:cNvSpPr txBox="1"/>
+          <p:nvPr/>
+        </p:nvSpPr>
+        <p:spPr>
+          <a:xfrm>
+            <a:off x="466724" y="514350"/>
+            <a:ext cx="3667125" cy="707886"/>
+          </a:xfrm>
+          <a:prstGeom prst="rect">
+            <a:avLst/>
+          </a:prstGeom>
+          <a:noFill/>
+        </p:spPr>
+        <p:txBody>
+          <a:bodyPr wrap="square" rtlCol="0">
+            <a:spAutoFit/>
+          </a:bodyPr>
+          <a:lstStyle/>
+          <a:p>
+            <a:r>
+              <a:rPr kumimoji="1" lang="ja-JP" altLang="en-US" sz="4000" dirty="0"/>
+              <a:t>ゲームの流れ</a:t>
+            </a:r>
+          </a:p>
+        </p:txBody>
+      </p:sp>
+    </p:spTree>
+    <p:extLst>
+      <p:ext uri="{BB962C8B-B14F-4D97-AF65-F5344CB8AC3E}">
+        <p14:creationId xmlns:p14="http://schemas.microsoft.com/office/powerpoint/2010/main" val="199027094"/>
+      </p:ext>
+    </p:extLst>
+  </p:cSld>
+  <p:clrMapOvr>
+    <a:masterClrMapping/>
+  </p:clrMapOvr>
+</p:sld>
+</file>
+
+<file path=ppt/slides/slide5.xml><?xml version="1.0" encoding="utf-8"?>
+<p:sld xmlns:a="http://schemas.openxmlformats.org/drawingml/2006/main" xmlns:r="http://schemas.openxmlformats.org/officeDocument/2006/relationships" xmlns:p="http://schemas.openxmlformats.org/presentationml/2006/main">
+  <p:cSld>
+    <p:spTree>
+      <p:nvGrpSpPr>
+        <p:cNvPr id="1" name=""/>
+        <p:cNvGrpSpPr/>
+        <p:nvPr/>
+      </p:nvGrpSpPr>
+      <p:grpSpPr>
+        <a:xfrm>
+          <a:off x="0" y="0"/>
+          <a:ext cx="0" cy="0"/>
+          <a:chOff x="0" y="0"/>
+          <a:chExt cx="0" cy="0"/>
+        </a:xfrm>
+      </p:grpSpPr>
+      <p:sp>
+        <p:nvSpPr>
+          <p:cNvPr id="4" name="テキスト ボックス 3">
+            <a:extLst>
+              <a:ext uri="{FF2B5EF4-FFF2-40B4-BE49-F238E27FC236}">
+                <a16:creationId xmlns:a16="http://schemas.microsoft.com/office/drawing/2014/main" id="{7A9EEDD8-5C9A-3BD1-AE5E-1B58FC870539}"/>
+              </a:ext>
+            </a:extLst>
+          </p:cNvPr>
+          <p:cNvSpPr txBox="1"/>
+          <p:nvPr/>
+        </p:nvSpPr>
+        <p:spPr>
+          <a:xfrm>
+            <a:off x="708602" y="526063"/>
+            <a:ext cx="8359198" cy="830997"/>
+          </a:xfrm>
+          <a:prstGeom prst="rect">
+            <a:avLst/>
+          </a:prstGeom>
+          <a:noFill/>
+        </p:spPr>
+        <p:txBody>
+          <a:bodyPr wrap="square" rtlCol="0">
+            <a:spAutoFit/>
+          </a:bodyPr>
+          <a:lstStyle/>
+          <a:p>
+            <a:r>
+              <a:rPr kumimoji="1" lang="ja-JP" altLang="en-US" sz="4800" dirty="0"/>
+              <a:t>やりたいこと</a:t>
+            </a:r>
+            <a:r>
+              <a:rPr lang="ja-JP" altLang="en-US" sz="4800" dirty="0"/>
+              <a:t>①</a:t>
+            </a:r>
+            <a:r>
+              <a:rPr kumimoji="1" lang="ja-JP" altLang="en-US" sz="4800" dirty="0"/>
+              <a:t>：必殺技</a:t>
+            </a:r>
+          </a:p>
+        </p:txBody>
+      </p:sp>
+      <p:pic>
+        <p:nvPicPr>
+          <p:cNvPr id="6" name="図 5">
+            <a:extLst>
+              <a:ext uri="{FF2B5EF4-FFF2-40B4-BE49-F238E27FC236}">
+                <a16:creationId xmlns:a16="http://schemas.microsoft.com/office/drawing/2014/main" id="{533E33F7-14C9-B1B5-5486-FC585BE355A9}"/>
+              </a:ext>
+            </a:extLst>
+          </p:cNvPr>
+          <p:cNvPicPr>
+            <a:picLocks noChangeAspect="1"/>
+          </p:cNvPicPr>
+          <p:nvPr/>
+        </p:nvPicPr>
+        <p:blipFill>
+          <a:blip r:embed="rId2">
+            <a:extLst>
+              <a:ext uri="{28A0092B-C50C-407E-A947-70E740481C1C}">
+                <a14:useLocalDpi xmlns:a14="http://schemas.microsoft.com/office/drawing/2010/main" val="0"/>
+              </a:ext>
+            </a:extLst>
+          </a:blip>
+          <a:stretch>
+            <a:fillRect/>
+          </a:stretch>
+        </p:blipFill>
+        <p:spPr>
+          <a:xfrm>
+            <a:off x="708602" y="4565130"/>
+            <a:ext cx="3671601" cy="1738116"/>
+          </a:xfrm>
+          <a:prstGeom prst="rect">
+            <a:avLst/>
+          </a:prstGeom>
+        </p:spPr>
+      </p:pic>
+      <p:pic>
+        <p:nvPicPr>
+          <p:cNvPr id="8" name="図 7">
+            <a:extLst>
+              <a:ext uri="{FF2B5EF4-FFF2-40B4-BE49-F238E27FC236}">
+                <a16:creationId xmlns:a16="http://schemas.microsoft.com/office/drawing/2014/main" id="{3F026415-C053-68AC-8729-A94D75BE7E80}"/>
+              </a:ext>
+            </a:extLst>
+          </p:cNvPr>
+          <p:cNvPicPr>
+            <a:picLocks noChangeAspect="1"/>
+          </p:cNvPicPr>
+          <p:nvPr/>
+        </p:nvPicPr>
+        <p:blipFill>
+          <a:blip r:embed="rId3">
+            <a:extLst>
+              <a:ext uri="{28A0092B-C50C-407E-A947-70E740481C1C}">
+                <a14:useLocalDpi xmlns:a14="http://schemas.microsoft.com/office/drawing/2010/main" val="0"/>
+              </a:ext>
+            </a:extLst>
+          </a:blip>
+          <a:stretch>
+            <a:fillRect/>
+          </a:stretch>
+        </p:blipFill>
+        <p:spPr>
+          <a:xfrm>
+            <a:off x="1706085" y="3238952"/>
+            <a:ext cx="1676634" cy="1324160"/>
+          </a:xfrm>
+          <a:prstGeom prst="rect">
+            <a:avLst/>
+          </a:prstGeom>
+        </p:spPr>
+      </p:pic>
+      <p:pic>
+        <p:nvPicPr>
+          <p:cNvPr id="10" name="図 9">
+            <a:extLst>
+              <a:ext uri="{FF2B5EF4-FFF2-40B4-BE49-F238E27FC236}">
+                <a16:creationId xmlns:a16="http://schemas.microsoft.com/office/drawing/2014/main" id="{7299FB53-0C3B-4D62-751A-973DD1CB40FF}"/>
+              </a:ext>
+            </a:extLst>
+          </p:cNvPr>
+          <p:cNvPicPr>
+            <a:picLocks noChangeAspect="1"/>
+          </p:cNvPicPr>
+          <p:nvPr/>
+        </p:nvPicPr>
+        <p:blipFill>
+          <a:blip r:embed="rId4">
+            <a:extLst>
+              <a:ext uri="{28A0092B-C50C-407E-A947-70E740481C1C}">
+                <a14:useLocalDpi xmlns:a14="http://schemas.microsoft.com/office/drawing/2010/main" val="0"/>
+              </a:ext>
+            </a:extLst>
+          </a:blip>
+          <a:stretch>
+            <a:fillRect/>
+          </a:stretch>
+        </p:blipFill>
+        <p:spPr>
+          <a:xfrm>
+            <a:off x="6010275" y="3238952"/>
+            <a:ext cx="5504873" cy="3092985"/>
+          </a:xfrm>
+          <a:prstGeom prst="rect">
+            <a:avLst/>
+          </a:prstGeom>
+        </p:spPr>
+      </p:pic>
+      <p:sp>
+        <p:nvSpPr>
+          <p:cNvPr id="11" name="テキスト ボックス 10">
+            <a:extLst>
+              <a:ext uri="{FF2B5EF4-FFF2-40B4-BE49-F238E27FC236}">
+                <a16:creationId xmlns:a16="http://schemas.microsoft.com/office/drawing/2014/main" id="{797F338B-8999-EBA8-C8A1-44B41F88CD6B}"/>
+              </a:ext>
+            </a:extLst>
+          </p:cNvPr>
+          <p:cNvSpPr txBox="1"/>
+          <p:nvPr/>
+        </p:nvSpPr>
+        <p:spPr>
+          <a:xfrm>
+            <a:off x="1297907" y="2683945"/>
+            <a:ext cx="2492990" cy="369332"/>
+          </a:xfrm>
+          <a:prstGeom prst="rect">
+            <a:avLst/>
+          </a:prstGeom>
+          <a:noFill/>
+        </p:spPr>
+        <p:txBody>
+          <a:bodyPr wrap="none" rtlCol="0">
+            <a:spAutoFit/>
+          </a:bodyPr>
+          <a:lstStyle/>
+          <a:p>
+            <a:r>
+              <a:rPr kumimoji="1" lang="ja-JP" altLang="en-US" dirty="0"/>
+              <a:t>攻撃でゲージを貯める</a:t>
+            </a:r>
+          </a:p>
+        </p:txBody>
+      </p:sp>
+      <p:sp>
+        <p:nvSpPr>
+          <p:cNvPr id="12" name="テキスト ボックス 11">
+            <a:extLst>
+              <a:ext uri="{FF2B5EF4-FFF2-40B4-BE49-F238E27FC236}">
+                <a16:creationId xmlns:a16="http://schemas.microsoft.com/office/drawing/2014/main" id="{62BA1A6C-6ACE-26D9-E116-EF76580E7A93}"/>
+              </a:ext>
+            </a:extLst>
+          </p:cNvPr>
+          <p:cNvSpPr txBox="1"/>
+          <p:nvPr/>
+        </p:nvSpPr>
+        <p:spPr>
+          <a:xfrm>
+            <a:off x="7054551" y="2468536"/>
+            <a:ext cx="3416320" cy="369332"/>
+          </a:xfrm>
+          <a:prstGeom prst="rect">
+            <a:avLst/>
+          </a:prstGeom>
+          <a:noFill/>
+        </p:spPr>
+        <p:txBody>
+          <a:bodyPr wrap="none" rtlCol="0">
+            <a:spAutoFit/>
+          </a:bodyPr>
+          <a:lstStyle/>
+          <a:p>
+            <a:r>
+              <a:rPr kumimoji="1" lang="ja-JP" altLang="en-US" dirty="0"/>
+              <a:t>ゲージを消費して必殺技を発動</a:t>
+            </a:r>
+          </a:p>
+        </p:txBody>
+      </p:sp>
+      <p:sp>
+        <p:nvSpPr>
+          <p:cNvPr id="13" name="矢印: 右 12">
+            <a:extLst>
+              <a:ext uri="{FF2B5EF4-FFF2-40B4-BE49-F238E27FC236}">
+                <a16:creationId xmlns:a16="http://schemas.microsoft.com/office/drawing/2014/main" id="{912FBBBD-056B-7254-FF1B-BCDFF3EC36B9}"/>
+              </a:ext>
+            </a:extLst>
+          </p:cNvPr>
+          <p:cNvSpPr/>
+          <p:nvPr/>
+        </p:nvSpPr>
+        <p:spPr>
+          <a:xfrm>
+            <a:off x="4643293" y="3677112"/>
+            <a:ext cx="1237673" cy="415636"/>
+          </a:xfrm>
+          <a:prstGeom prst="rightArrow">
+            <a:avLst/>
+          </a:prstGeom>
+        </p:spPr>
+        <p:style>
+          <a:lnRef idx="2">
+            <a:schemeClr val="accent1">
+              <a:shade val="15000"/>
+            </a:schemeClr>
+          </a:lnRef>
+          <a:fillRef idx="1">
+            <a:schemeClr val="accent1"/>
+          </a:fillRef>
+          <a:effectRef idx="0">
+            <a:schemeClr val="accent1"/>
+          </a:effectRef>
+          <a:fontRef idx="minor">
+            <a:schemeClr val="lt1"/>
+          </a:fontRef>
+        </p:style>
+        <p:txBody>
+          <a:bodyPr rtlCol="0" anchor="ctr"/>
+          <a:lstStyle/>
+          <a:p>
+            <a:pPr algn="ctr"/>
+            <a:endParaRPr kumimoji="1" lang="ja-JP" altLang="en-US"/>
+          </a:p>
+        </p:txBody>
+      </p:sp>
+      <p:sp>
+        <p:nvSpPr>
+          <p:cNvPr id="14" name="矢印: 右 13">
+            <a:extLst>
+              <a:ext uri="{FF2B5EF4-FFF2-40B4-BE49-F238E27FC236}">
+                <a16:creationId xmlns:a16="http://schemas.microsoft.com/office/drawing/2014/main" id="{8BF0D0A6-2640-80DA-2B97-E9A68776EF7E}"/>
+              </a:ext>
+            </a:extLst>
+          </p:cNvPr>
+          <p:cNvSpPr/>
+          <p:nvPr/>
+        </p:nvSpPr>
+        <p:spPr>
+          <a:xfrm flipH="1">
+            <a:off x="4597279" y="5226370"/>
+            <a:ext cx="1195919" cy="415636"/>
+          </a:xfrm>
+          <a:prstGeom prst="rightArrow">
+            <a:avLst/>
+          </a:prstGeom>
+        </p:spPr>
+        <p:style>
+          <a:lnRef idx="2">
+            <a:schemeClr val="accent1">
+              <a:shade val="15000"/>
+            </a:schemeClr>
+          </a:lnRef>
+          <a:fillRef idx="1">
+            <a:schemeClr val="accent1"/>
+          </a:fillRef>
+          <a:effectRef idx="0">
+            <a:schemeClr val="accent1"/>
+          </a:effectRef>
+          <a:fontRef idx="minor">
+            <a:schemeClr val="lt1"/>
+          </a:fontRef>
+        </p:style>
+        <p:txBody>
+          <a:bodyPr rtlCol="0" anchor="ctr"/>
+          <a:lstStyle/>
+          <a:p>
+            <a:pPr algn="ctr"/>
+            <a:endParaRPr kumimoji="1" lang="ja-JP" altLang="en-US"/>
+          </a:p>
+        </p:txBody>
+      </p:sp>
+      <p:sp>
+        <p:nvSpPr>
+          <p:cNvPr id="3" name="テキスト ボックス 2">
+            <a:extLst>
+              <a:ext uri="{FF2B5EF4-FFF2-40B4-BE49-F238E27FC236}">
+                <a16:creationId xmlns:a16="http://schemas.microsoft.com/office/drawing/2014/main" id="{38E0FF73-7B18-5E39-E51B-5E7BBB8D82EC}"/>
+              </a:ext>
+            </a:extLst>
+          </p:cNvPr>
+          <p:cNvSpPr txBox="1"/>
+          <p:nvPr/>
+        </p:nvSpPr>
+        <p:spPr>
+          <a:xfrm>
+            <a:off x="3541454" y="1728363"/>
+            <a:ext cx="5109091" cy="461665"/>
+          </a:xfrm>
+          <a:prstGeom prst="rect">
+            <a:avLst/>
+          </a:prstGeom>
+          <a:noFill/>
+        </p:spPr>
+        <p:txBody>
+          <a:bodyPr wrap="none" rtlCol="0">
+            <a:spAutoFit/>
+          </a:bodyPr>
+          <a:lstStyle/>
+          <a:p>
+            <a:r>
+              <a:rPr lang="ja-JP" altLang="en-US" sz="2400" dirty="0"/>
+              <a:t>必殺技で敵を一掃するのが爽快！！</a:t>
+            </a:r>
+            <a:endParaRPr kumimoji="1" lang="ja-JP" altLang="en-US" sz="2400" dirty="0"/>
+          </a:p>
+        </p:txBody>
+      </p:sp>
+    </p:spTree>
+    <p:extLst>
+      <p:ext uri="{BB962C8B-B14F-4D97-AF65-F5344CB8AC3E}">
+        <p14:creationId xmlns:p14="http://schemas.microsoft.com/office/powerpoint/2010/main" val="1773422627"/>
+      </p:ext>
+    </p:extLst>
+  </p:cSld>
+  <p:clrMapOvr>
+    <a:masterClrMapping/>
+  </p:clrMapOvr>
+</p:sld>
+</file>
+
+<file path=ppt/slides/slide6.xml><?xml version="1.0" encoding="utf-8"?>
+<p:sld xmlns:a="http://schemas.openxmlformats.org/drawingml/2006/main" xmlns:r="http://schemas.openxmlformats.org/officeDocument/2006/relationships" xmlns:p="http://schemas.openxmlformats.org/presentationml/2006/main">
+  <p:cSld>
+    <p:spTree>
+      <p:nvGrpSpPr>
+        <p:cNvPr id="1" name="">
+          <a:extLst>
+            <a:ext uri="{FF2B5EF4-FFF2-40B4-BE49-F238E27FC236}">
+              <a16:creationId xmlns:a16="http://schemas.microsoft.com/office/drawing/2014/main" id="{DB9B0909-FECC-BCAE-2D44-1EA094A431D9}"/>
+            </a:ext>
+          </a:extLst>
+        </p:cNvPr>
+        <p:cNvGrpSpPr/>
+        <p:nvPr/>
+      </p:nvGrpSpPr>
+      <p:grpSpPr>
+        <a:xfrm>
+          <a:off x="0" y="0"/>
+          <a:ext cx="0" cy="0"/>
+          <a:chOff x="0" y="0"/>
+          <a:chExt cx="0" cy="0"/>
+        </a:xfrm>
+      </p:grpSpPr>
+      <p:sp>
+        <p:nvSpPr>
+          <p:cNvPr id="4" name="テキスト ボックス 3">
+            <a:extLst>
+              <a:ext uri="{FF2B5EF4-FFF2-40B4-BE49-F238E27FC236}">
+                <a16:creationId xmlns:a16="http://schemas.microsoft.com/office/drawing/2014/main" id="{EB903457-A90E-2F84-A4D3-374D3A55D191}"/>
+              </a:ext>
+            </a:extLst>
+          </p:cNvPr>
+          <p:cNvSpPr txBox="1"/>
+          <p:nvPr/>
+        </p:nvSpPr>
+        <p:spPr>
+          <a:xfrm>
+            <a:off x="708601" y="526063"/>
+            <a:ext cx="10368973" cy="830997"/>
+          </a:xfrm>
+          <a:prstGeom prst="rect">
+            <a:avLst/>
+          </a:prstGeom>
+          <a:noFill/>
+        </p:spPr>
+        <p:txBody>
+          <a:bodyPr wrap="square" rtlCol="0">
+            <a:spAutoFit/>
+          </a:bodyPr>
+          <a:lstStyle/>
+          <a:p>
+            <a:r>
+              <a:rPr kumimoji="1" lang="ja-JP" altLang="en-US" sz="4800" dirty="0"/>
+              <a:t>やりたいこと②：ジャスト回避反撃</a:t>
+            </a:r>
+          </a:p>
+        </p:txBody>
+      </p:sp>
+      <p:sp>
+        <p:nvSpPr>
+          <p:cNvPr id="3" name="テキスト ボックス 2">
+            <a:extLst>
+              <a:ext uri="{FF2B5EF4-FFF2-40B4-BE49-F238E27FC236}">
+                <a16:creationId xmlns:a16="http://schemas.microsoft.com/office/drawing/2014/main" id="{1CA826D8-26F5-817A-AC5C-53BDB8BC6008}"/>
+              </a:ext>
+            </a:extLst>
+          </p:cNvPr>
+          <p:cNvSpPr txBox="1"/>
+          <p:nvPr/>
+        </p:nvSpPr>
+        <p:spPr>
+          <a:xfrm>
+            <a:off x="2050887" y="1988023"/>
+            <a:ext cx="7571303" cy="461665"/>
+          </a:xfrm>
+          <a:prstGeom prst="rect">
+            <a:avLst/>
+          </a:prstGeom>
+          <a:noFill/>
+        </p:spPr>
+        <p:txBody>
+          <a:bodyPr wrap="none" rtlCol="0">
+            <a:spAutoFit/>
+          </a:bodyPr>
+          <a:lstStyle/>
+          <a:p>
+            <a:r>
+              <a:rPr lang="ja-JP" altLang="en-US" sz="2400" dirty="0"/>
+              <a:t>ゲージがたくさん貯まるため、より必殺技を回せる！</a:t>
+            </a:r>
+            <a:endParaRPr kumimoji="1" lang="ja-JP" altLang="en-US" sz="2400" dirty="0"/>
+          </a:p>
+        </p:txBody>
+      </p:sp>
+      <p:pic>
+        <p:nvPicPr>
+          <p:cNvPr id="5" name="図 4">
+            <a:extLst>
+              <a:ext uri="{FF2B5EF4-FFF2-40B4-BE49-F238E27FC236}">
+                <a16:creationId xmlns:a16="http://schemas.microsoft.com/office/drawing/2014/main" id="{6EEE3DEF-1B8B-53D3-BC4D-24DBD36E1F85}"/>
+              </a:ext>
+            </a:extLst>
+          </p:cNvPr>
+          <p:cNvPicPr>
+            <a:picLocks noChangeAspect="1"/>
+          </p:cNvPicPr>
+          <p:nvPr/>
+        </p:nvPicPr>
+        <p:blipFill>
+          <a:blip r:embed="rId2"/>
+          <a:stretch>
+            <a:fillRect/>
+          </a:stretch>
+        </p:blipFill>
+        <p:spPr>
+          <a:xfrm>
+            <a:off x="708601" y="3519844"/>
+            <a:ext cx="3972330" cy="2695974"/>
+          </a:xfrm>
+          <a:prstGeom prst="rect">
+            <a:avLst/>
+          </a:prstGeom>
+        </p:spPr>
+      </p:pic>
+      <p:pic>
+        <p:nvPicPr>
+          <p:cNvPr id="9" name="図 8">
+            <a:extLst>
+              <a:ext uri="{FF2B5EF4-FFF2-40B4-BE49-F238E27FC236}">
+                <a16:creationId xmlns:a16="http://schemas.microsoft.com/office/drawing/2014/main" id="{9D22112C-5D25-A18A-59FA-E312B4577362}"/>
+              </a:ext>
+            </a:extLst>
+          </p:cNvPr>
+          <p:cNvPicPr>
+            <a:picLocks noChangeAspect="1"/>
+          </p:cNvPicPr>
+          <p:nvPr/>
+        </p:nvPicPr>
+        <p:blipFill>
+          <a:blip r:embed="rId3"/>
+          <a:stretch>
+            <a:fillRect/>
+          </a:stretch>
+        </p:blipFill>
+        <p:spPr>
+          <a:xfrm>
+            <a:off x="7024876" y="3519845"/>
+            <a:ext cx="4612765" cy="2695974"/>
+          </a:xfrm>
+          <a:prstGeom prst="rect">
+            <a:avLst/>
+          </a:prstGeom>
+        </p:spPr>
+      </p:pic>
+      <p:sp>
+        <p:nvSpPr>
+          <p:cNvPr id="15" name="矢印: 右 14">
+            <a:extLst>
+              <a:ext uri="{FF2B5EF4-FFF2-40B4-BE49-F238E27FC236}">
+                <a16:creationId xmlns:a16="http://schemas.microsoft.com/office/drawing/2014/main" id="{11CA87FD-4051-2587-8CBA-DE0BFD0FCD2A}"/>
+              </a:ext>
+            </a:extLst>
+          </p:cNvPr>
+          <p:cNvSpPr/>
+          <p:nvPr/>
+        </p:nvSpPr>
+        <p:spPr>
+          <a:xfrm>
+            <a:off x="4857750" y="4591050"/>
+            <a:ext cx="2076450" cy="461665"/>
+          </a:xfrm>
+          <a:prstGeom prst="rightArrow">
+            <a:avLst/>
+          </a:prstGeom>
+        </p:spPr>
+        <p:style>
+          <a:lnRef idx="2">
+            <a:schemeClr val="accent1">
+              <a:shade val="15000"/>
+            </a:schemeClr>
+          </a:lnRef>
+          <a:fillRef idx="1">
+            <a:schemeClr val="accent1"/>
+          </a:fillRef>
+          <a:effectRef idx="0">
+            <a:schemeClr val="accent1"/>
+          </a:effectRef>
+          <a:fontRef idx="minor">
+            <a:schemeClr val="lt1"/>
+          </a:fontRef>
+        </p:style>
+        <p:txBody>
+          <a:bodyPr rtlCol="0" anchor="ctr"/>
+          <a:lstStyle/>
+          <a:p>
+            <a:pPr algn="ctr"/>
+            <a:endParaRPr kumimoji="1" lang="ja-JP" altLang="en-US"/>
+          </a:p>
+        </p:txBody>
+      </p:sp>
+      <p:sp>
+        <p:nvSpPr>
+          <p:cNvPr id="16" name="テキスト ボックス 15">
+            <a:extLst>
+              <a:ext uri="{FF2B5EF4-FFF2-40B4-BE49-F238E27FC236}">
+                <a16:creationId xmlns:a16="http://schemas.microsoft.com/office/drawing/2014/main" id="{046672B7-48E6-8295-D91C-321BC9E188C4}"/>
+              </a:ext>
+            </a:extLst>
+          </p:cNvPr>
+          <p:cNvSpPr txBox="1"/>
+          <p:nvPr/>
+        </p:nvSpPr>
+        <p:spPr>
+          <a:xfrm>
+            <a:off x="1909936" y="3150512"/>
+            <a:ext cx="1569660" cy="369332"/>
+          </a:xfrm>
+          <a:prstGeom prst="rect">
+            <a:avLst/>
+          </a:prstGeom>
+          <a:noFill/>
+        </p:spPr>
+        <p:txBody>
+          <a:bodyPr wrap="none" rtlCol="0">
+            <a:spAutoFit/>
+          </a:bodyPr>
+          <a:lstStyle/>
+          <a:p>
+            <a:r>
+              <a:rPr lang="ja-JP" altLang="en-US" dirty="0"/>
+              <a:t>ジャスト回避</a:t>
+            </a:r>
+            <a:endParaRPr kumimoji="1" lang="ja-JP" altLang="en-US" dirty="0"/>
+          </a:p>
+        </p:txBody>
+      </p:sp>
+      <p:sp>
+        <p:nvSpPr>
+          <p:cNvPr id="17" name="テキスト ボックス 16">
+            <a:extLst>
+              <a:ext uri="{FF2B5EF4-FFF2-40B4-BE49-F238E27FC236}">
+                <a16:creationId xmlns:a16="http://schemas.microsoft.com/office/drawing/2014/main" id="{9BD40A98-B9C1-7AC8-1596-0D8703F7570D}"/>
+              </a:ext>
+            </a:extLst>
+          </p:cNvPr>
+          <p:cNvSpPr txBox="1"/>
+          <p:nvPr/>
+        </p:nvSpPr>
+        <p:spPr>
+          <a:xfrm>
+            <a:off x="9008092" y="3199565"/>
+            <a:ext cx="646331" cy="369332"/>
+          </a:xfrm>
+          <a:prstGeom prst="rect">
+            <a:avLst/>
+          </a:prstGeom>
+          <a:noFill/>
+        </p:spPr>
+        <p:txBody>
+          <a:bodyPr wrap="none" rtlCol="0">
+            <a:spAutoFit/>
+          </a:bodyPr>
+          <a:lstStyle/>
+          <a:p>
+            <a:r>
+              <a:rPr kumimoji="1" lang="ja-JP" altLang="en-US" dirty="0"/>
+              <a:t>反撃</a:t>
+            </a:r>
+          </a:p>
+        </p:txBody>
+      </p:sp>
+      <p:sp>
+        <p:nvSpPr>
+          <p:cNvPr id="18" name="テキスト ボックス 17">
+            <a:extLst>
+              <a:ext uri="{FF2B5EF4-FFF2-40B4-BE49-F238E27FC236}">
+                <a16:creationId xmlns:a16="http://schemas.microsoft.com/office/drawing/2014/main" id="{3CDE254B-720F-BFD1-55E5-EAE256C5CC0F}"/>
+              </a:ext>
+            </a:extLst>
+          </p:cNvPr>
+          <p:cNvSpPr txBox="1"/>
+          <p:nvPr/>
+        </p:nvSpPr>
+        <p:spPr>
+          <a:xfrm>
+            <a:off x="5167125" y="4298641"/>
+            <a:ext cx="1338828" cy="369332"/>
+          </a:xfrm>
+          <a:prstGeom prst="rect">
+            <a:avLst/>
+          </a:prstGeom>
+          <a:noFill/>
+        </p:spPr>
+        <p:txBody>
+          <a:bodyPr wrap="none" rtlCol="0">
+            <a:spAutoFit/>
+          </a:bodyPr>
+          <a:lstStyle/>
+          <a:p>
+            <a:r>
+              <a:rPr kumimoji="1" lang="ja-JP" altLang="en-US" dirty="0"/>
+              <a:t>攻撃ボタン</a:t>
+            </a:r>
+          </a:p>
+        </p:txBody>
+      </p:sp>
+    </p:spTree>
+    <p:extLst>
+      <p:ext uri="{BB962C8B-B14F-4D97-AF65-F5344CB8AC3E}">
+        <p14:creationId xmlns:p14="http://schemas.microsoft.com/office/powerpoint/2010/main" val="3336402463"/>
       </p:ext>
     </p:extLst>
   </p:cSld>

--- a/夏ゲーム企画.pptx
+++ b/夏ゲーム企画.pptx
@@ -2,24 +2,24 @@
 <file path=ppt/presentation.xml><?xml version="1.0" encoding="utf-8"?>
 <p:presentation xmlns:a="http://schemas.openxmlformats.org/drawingml/2006/main" xmlns:r="http://schemas.openxmlformats.org/officeDocument/2006/relationships" xmlns:p="http://schemas.openxmlformats.org/presentationml/2006/main" saveSubsetFonts="1">
   <p:sldMasterIdLst>
-    <p:sldMasterId id="2147483648" r:id="rId1"/>
+    <p:sldMasterId id="2147483660" r:id="rId1"/>
   </p:sldMasterIdLst>
   <p:sldIdLst>
     <p:sldId id="258" r:id="rId2"/>
     <p:sldId id="259" r:id="rId3"/>
     <p:sldId id="257" r:id="rId4"/>
-    <p:sldId id="261" r:id="rId5"/>
-    <p:sldId id="256" r:id="rId6"/>
-    <p:sldId id="260" r:id="rId7"/>
+    <p:sldId id="256" r:id="rId5"/>
+    <p:sldId id="260" r:id="rId6"/>
+    <p:sldId id="262" r:id="rId7"/>
   </p:sldIdLst>
   <p:sldSz cx="12192000" cy="6858000"/>
   <p:notesSz cx="6858000" cy="9144000"/>
   <p:defaultTextStyle>
     <a:defPPr>
-      <a:defRPr lang="ja-JP"/>
+      <a:defRPr lang="en-US"/>
     </a:defPPr>
-    <a:lvl1pPr marL="0" algn="l" defTabSz="914400" rtl="0" eaLnBrk="1" latinLnBrk="0" hangingPunct="1">
-      <a:defRPr kumimoji="1" sz="1800" kern="1200">
+    <a:lvl1pPr marL="0" algn="l" defTabSz="457200" rtl="0" eaLnBrk="1" latinLnBrk="0" hangingPunct="1">
+      <a:defRPr sz="1800" kern="1200">
         <a:solidFill>
           <a:schemeClr val="tx1"/>
         </a:solidFill>
@@ -28,8 +28,8 @@
         <a:cs typeface="+mn-cs"/>
       </a:defRPr>
     </a:lvl1pPr>
-    <a:lvl2pPr marL="457200" algn="l" defTabSz="914400" rtl="0" eaLnBrk="1" latinLnBrk="0" hangingPunct="1">
-      <a:defRPr kumimoji="1" sz="1800" kern="1200">
+    <a:lvl2pPr marL="457200" algn="l" defTabSz="457200" rtl="0" eaLnBrk="1" latinLnBrk="0" hangingPunct="1">
+      <a:defRPr sz="1800" kern="1200">
         <a:solidFill>
           <a:schemeClr val="tx1"/>
         </a:solidFill>
@@ -38,8 +38,8 @@
         <a:cs typeface="+mn-cs"/>
       </a:defRPr>
     </a:lvl2pPr>
-    <a:lvl3pPr marL="914400" algn="l" defTabSz="914400" rtl="0" eaLnBrk="1" latinLnBrk="0" hangingPunct="1">
-      <a:defRPr kumimoji="1" sz="1800" kern="1200">
+    <a:lvl3pPr marL="914400" algn="l" defTabSz="457200" rtl="0" eaLnBrk="1" latinLnBrk="0" hangingPunct="1">
+      <a:defRPr sz="1800" kern="1200">
         <a:solidFill>
           <a:schemeClr val="tx1"/>
         </a:solidFill>
@@ -48,8 +48,8 @@
         <a:cs typeface="+mn-cs"/>
       </a:defRPr>
     </a:lvl3pPr>
-    <a:lvl4pPr marL="1371600" algn="l" defTabSz="914400" rtl="0" eaLnBrk="1" latinLnBrk="0" hangingPunct="1">
-      <a:defRPr kumimoji="1" sz="1800" kern="1200">
+    <a:lvl4pPr marL="1371600" algn="l" defTabSz="457200" rtl="0" eaLnBrk="1" latinLnBrk="0" hangingPunct="1">
+      <a:defRPr sz="1800" kern="1200">
         <a:solidFill>
           <a:schemeClr val="tx1"/>
         </a:solidFill>
@@ -58,8 +58,8 @@
         <a:cs typeface="+mn-cs"/>
       </a:defRPr>
     </a:lvl4pPr>
-    <a:lvl5pPr marL="1828800" algn="l" defTabSz="914400" rtl="0" eaLnBrk="1" latinLnBrk="0" hangingPunct="1">
-      <a:defRPr kumimoji="1" sz="1800" kern="1200">
+    <a:lvl5pPr marL="1828800" algn="l" defTabSz="457200" rtl="0" eaLnBrk="1" latinLnBrk="0" hangingPunct="1">
+      <a:defRPr sz="1800" kern="1200">
         <a:solidFill>
           <a:schemeClr val="tx1"/>
         </a:solidFill>
@@ -68,8 +68,8 @@
         <a:cs typeface="+mn-cs"/>
       </a:defRPr>
     </a:lvl5pPr>
-    <a:lvl6pPr marL="2286000" algn="l" defTabSz="914400" rtl="0" eaLnBrk="1" latinLnBrk="0" hangingPunct="1">
-      <a:defRPr kumimoji="1" sz="1800" kern="1200">
+    <a:lvl6pPr marL="2286000" algn="l" defTabSz="457200" rtl="0" eaLnBrk="1" latinLnBrk="0" hangingPunct="1">
+      <a:defRPr sz="1800" kern="1200">
         <a:solidFill>
           <a:schemeClr val="tx1"/>
         </a:solidFill>
@@ -78,8 +78,8 @@
         <a:cs typeface="+mn-cs"/>
       </a:defRPr>
     </a:lvl6pPr>
-    <a:lvl7pPr marL="2743200" algn="l" defTabSz="914400" rtl="0" eaLnBrk="1" latinLnBrk="0" hangingPunct="1">
-      <a:defRPr kumimoji="1" sz="1800" kern="1200">
+    <a:lvl7pPr marL="2743200" algn="l" defTabSz="457200" rtl="0" eaLnBrk="1" latinLnBrk="0" hangingPunct="1">
+      <a:defRPr sz="1800" kern="1200">
         <a:solidFill>
           <a:schemeClr val="tx1"/>
         </a:solidFill>
@@ -88,8 +88,8 @@
         <a:cs typeface="+mn-cs"/>
       </a:defRPr>
     </a:lvl7pPr>
-    <a:lvl8pPr marL="3200400" algn="l" defTabSz="914400" rtl="0" eaLnBrk="1" latinLnBrk="0" hangingPunct="1">
-      <a:defRPr kumimoji="1" sz="1800" kern="1200">
+    <a:lvl8pPr marL="3200400" algn="l" defTabSz="457200" rtl="0" eaLnBrk="1" latinLnBrk="0" hangingPunct="1">
+      <a:defRPr sz="1800" kern="1200">
         <a:solidFill>
           <a:schemeClr val="tx1"/>
         </a:solidFill>
@@ -98,8 +98,8 @@
         <a:cs typeface="+mn-cs"/>
       </a:defRPr>
     </a:lvl8pPr>
-    <a:lvl9pPr marL="3657600" algn="l" defTabSz="914400" rtl="0" eaLnBrk="1" latinLnBrk="0" hangingPunct="1">
-      <a:defRPr kumimoji="1" sz="1800" kern="1200">
+    <a:lvl9pPr marL="3657600" algn="l" defTabSz="457200" rtl="0" eaLnBrk="1" latinLnBrk="0" hangingPunct="1">
+      <a:defRPr sz="1800" kern="1200">
         <a:solidFill>
           <a:schemeClr val="tx1"/>
         </a:solidFill>
@@ -136,13 +136,7 @@
       </p:grpSpPr>
       <p:sp>
         <p:nvSpPr>
-          <p:cNvPr id="2" name="タイトル 1">
-            <a:extLst>
-              <a:ext uri="{FF2B5EF4-FFF2-40B4-BE49-F238E27FC236}">
-                <a16:creationId xmlns:a16="http://schemas.microsoft.com/office/drawing/2014/main" id="{1D5A6D50-8642-B3CB-068C-66C4A7B7F1DA}"/>
-              </a:ext>
-            </a:extLst>
-          </p:cNvPr>
+          <p:cNvPr id="2" name="Title 1"/>
           <p:cNvSpPr>
             <a:spLocks noGrp="1"/>
           </p:cNvSpPr>
@@ -165,21 +159,16 @@
           </a:lstStyle>
           <a:p>
             <a:r>
-              <a:rPr kumimoji="1" lang="ja-JP" altLang="en-US"/>
+              <a:rPr lang="ja-JP" altLang="en-US"/>
               <a:t>マスター タイトルの書式設定</a:t>
             </a:r>
-          </a:p>
-        </p:txBody>
-      </p:sp>
-      <p:sp>
-        <p:nvSpPr>
-          <p:cNvPr id="3" name="字幕 2">
-            <a:extLst>
-              <a:ext uri="{FF2B5EF4-FFF2-40B4-BE49-F238E27FC236}">
-                <a16:creationId xmlns:a16="http://schemas.microsoft.com/office/drawing/2014/main" id="{8F7117C1-0AD0-6ED3-A058-806B56F6CEE0}"/>
-              </a:ext>
-            </a:extLst>
-          </p:cNvPr>
+            <a:endParaRPr lang="en-US" dirty="0"/>
+          </a:p>
+        </p:txBody>
+      </p:sp>
+      <p:sp>
+        <p:nvSpPr>
+          <p:cNvPr id="3" name="Subtitle 2"/>
           <p:cNvSpPr>
             <a:spLocks noGrp="1"/>
           </p:cNvSpPr>
@@ -235,21 +224,16 @@
           </a:lstStyle>
           <a:p>
             <a:r>
-              <a:rPr kumimoji="1" lang="ja-JP" altLang="en-US"/>
+              <a:rPr lang="ja-JP" altLang="en-US"/>
               <a:t>マスター サブタイトルの書式設定</a:t>
             </a:r>
-          </a:p>
-        </p:txBody>
-      </p:sp>
-      <p:sp>
-        <p:nvSpPr>
-          <p:cNvPr id="4" name="日付プレースホルダー 3">
-            <a:extLst>
-              <a:ext uri="{FF2B5EF4-FFF2-40B4-BE49-F238E27FC236}">
-                <a16:creationId xmlns:a16="http://schemas.microsoft.com/office/drawing/2014/main" id="{EE402050-7FBB-6DB7-A149-04FE641AA567}"/>
-              </a:ext>
-            </a:extLst>
-          </p:cNvPr>
+            <a:endParaRPr lang="en-US" dirty="0"/>
+          </a:p>
+        </p:txBody>
+      </p:sp>
+      <p:sp>
+        <p:nvSpPr>
+          <p:cNvPr id="4" name="Date Placeholder 3"/>
           <p:cNvSpPr>
             <a:spLocks noGrp="1"/>
           </p:cNvSpPr>
@@ -272,13 +256,7 @@
       </p:sp>
       <p:sp>
         <p:nvSpPr>
-          <p:cNvPr id="5" name="フッター プレースホルダー 4">
-            <a:extLst>
-              <a:ext uri="{FF2B5EF4-FFF2-40B4-BE49-F238E27FC236}">
-                <a16:creationId xmlns:a16="http://schemas.microsoft.com/office/drawing/2014/main" id="{FF82BFD2-E6B8-94E7-830C-90508F233A82}"/>
-              </a:ext>
-            </a:extLst>
-          </p:cNvPr>
+          <p:cNvPr id="5" name="Footer Placeholder 4"/>
           <p:cNvSpPr>
             <a:spLocks noGrp="1"/>
           </p:cNvSpPr>
@@ -297,13 +275,7 @@
       </p:sp>
       <p:sp>
         <p:nvSpPr>
-          <p:cNvPr id="6" name="スライド番号プレースホルダー 5">
-            <a:extLst>
-              <a:ext uri="{FF2B5EF4-FFF2-40B4-BE49-F238E27FC236}">
-                <a16:creationId xmlns:a16="http://schemas.microsoft.com/office/drawing/2014/main" id="{901CC9B3-0DCE-43FE-0174-A358C037095D}"/>
-              </a:ext>
-            </a:extLst>
-          </p:cNvPr>
+          <p:cNvPr id="6" name="Slide Number Placeholder 5"/>
           <p:cNvSpPr>
             <a:spLocks noGrp="1"/>
           </p:cNvSpPr>
@@ -327,7 +299,7 @@
     </p:spTree>
     <p:extLst>
       <p:ext uri="{BB962C8B-B14F-4D97-AF65-F5344CB8AC3E}">
-        <p14:creationId xmlns:p14="http://schemas.microsoft.com/office/powerpoint/2010/main" val="155610346"/>
+        <p14:creationId xmlns:p14="http://schemas.microsoft.com/office/powerpoint/2010/main" val="1570329394"/>
       </p:ext>
     </p:extLst>
   </p:cSld>
@@ -356,13 +328,7 @@
       </p:grpSpPr>
       <p:sp>
         <p:nvSpPr>
-          <p:cNvPr id="2" name="タイトル 1">
-            <a:extLst>
-              <a:ext uri="{FF2B5EF4-FFF2-40B4-BE49-F238E27FC236}">
-                <a16:creationId xmlns:a16="http://schemas.microsoft.com/office/drawing/2014/main" id="{865AA82C-84FC-FFBF-A728-6436C299D431}"/>
-              </a:ext>
-            </a:extLst>
-          </p:cNvPr>
+          <p:cNvPr id="2" name="Title 1"/>
           <p:cNvSpPr>
             <a:spLocks noGrp="1"/>
           </p:cNvSpPr>
@@ -376,21 +342,16 @@
           <a:lstStyle/>
           <a:p>
             <a:r>
-              <a:rPr kumimoji="1" lang="ja-JP" altLang="en-US"/>
+              <a:rPr lang="ja-JP" altLang="en-US"/>
               <a:t>マスター タイトルの書式設定</a:t>
             </a:r>
-          </a:p>
-        </p:txBody>
-      </p:sp>
-      <p:sp>
-        <p:nvSpPr>
-          <p:cNvPr id="3" name="縦書きテキスト プレースホルダー 2">
-            <a:extLst>
-              <a:ext uri="{FF2B5EF4-FFF2-40B4-BE49-F238E27FC236}">
-                <a16:creationId xmlns:a16="http://schemas.microsoft.com/office/drawing/2014/main" id="{CF278A21-440E-5CC1-7884-58063500E66F}"/>
-              </a:ext>
-            </a:extLst>
-          </p:cNvPr>
+            <a:endParaRPr lang="en-US" dirty="0"/>
+          </a:p>
+        </p:txBody>
+      </p:sp>
+      <p:sp>
+        <p:nvSpPr>
+          <p:cNvPr id="3" name="Vertical Text Placeholder 2"/>
           <p:cNvSpPr>
             <a:spLocks noGrp="1"/>
           </p:cNvSpPr>
@@ -405,81 +366,76 @@
           <a:p>
             <a:pPr lvl="0"/>
             <a:r>
-              <a:rPr kumimoji="1" lang="ja-JP" altLang="en-US"/>
+              <a:rPr lang="ja-JP" altLang="en-US"/>
               <a:t>マスター テキストの書式設定</a:t>
             </a:r>
           </a:p>
           <a:p>
             <a:pPr lvl="1"/>
             <a:r>
-              <a:rPr kumimoji="1" lang="ja-JP" altLang="en-US"/>
+              <a:rPr lang="ja-JP" altLang="en-US"/>
               <a:t>第 </a:t>
             </a:r>
             <a:r>
-              <a:rPr kumimoji="1" lang="en-US" altLang="ja-JP"/>
+              <a:rPr lang="en-US" altLang="ja-JP"/>
               <a:t>2 </a:t>
             </a:r>
             <a:r>
-              <a:rPr kumimoji="1" lang="ja-JP" altLang="en-US"/>
+              <a:rPr lang="ja-JP" altLang="en-US"/>
               <a:t>レベル</a:t>
             </a:r>
           </a:p>
           <a:p>
             <a:pPr lvl="2"/>
             <a:r>
-              <a:rPr kumimoji="1" lang="ja-JP" altLang="en-US"/>
+              <a:rPr lang="ja-JP" altLang="en-US"/>
               <a:t>第 </a:t>
             </a:r>
             <a:r>
-              <a:rPr kumimoji="1" lang="en-US" altLang="ja-JP"/>
+              <a:rPr lang="en-US" altLang="ja-JP"/>
               <a:t>3 </a:t>
             </a:r>
             <a:r>
-              <a:rPr kumimoji="1" lang="ja-JP" altLang="en-US"/>
+              <a:rPr lang="ja-JP" altLang="en-US"/>
               <a:t>レベル</a:t>
             </a:r>
           </a:p>
           <a:p>
             <a:pPr lvl="3"/>
             <a:r>
-              <a:rPr kumimoji="1" lang="ja-JP" altLang="en-US"/>
+              <a:rPr lang="ja-JP" altLang="en-US"/>
               <a:t>第 </a:t>
             </a:r>
             <a:r>
-              <a:rPr kumimoji="1" lang="en-US" altLang="ja-JP"/>
+              <a:rPr lang="en-US" altLang="ja-JP"/>
               <a:t>4 </a:t>
             </a:r>
             <a:r>
-              <a:rPr kumimoji="1" lang="ja-JP" altLang="en-US"/>
+              <a:rPr lang="ja-JP" altLang="en-US"/>
               <a:t>レベル</a:t>
             </a:r>
           </a:p>
           <a:p>
             <a:pPr lvl="4"/>
             <a:r>
-              <a:rPr kumimoji="1" lang="ja-JP" altLang="en-US"/>
+              <a:rPr lang="ja-JP" altLang="en-US"/>
               <a:t>第 </a:t>
             </a:r>
             <a:r>
-              <a:rPr kumimoji="1" lang="en-US" altLang="ja-JP"/>
+              <a:rPr lang="en-US" altLang="ja-JP"/>
               <a:t>5 </a:t>
             </a:r>
             <a:r>
-              <a:rPr kumimoji="1" lang="ja-JP" altLang="en-US"/>
+              <a:rPr lang="ja-JP" altLang="en-US"/>
               <a:t>レベル</a:t>
             </a:r>
-          </a:p>
-        </p:txBody>
-      </p:sp>
-      <p:sp>
-        <p:nvSpPr>
-          <p:cNvPr id="4" name="日付プレースホルダー 3">
-            <a:extLst>
-              <a:ext uri="{FF2B5EF4-FFF2-40B4-BE49-F238E27FC236}">
-                <a16:creationId xmlns:a16="http://schemas.microsoft.com/office/drawing/2014/main" id="{3C4DB624-0FFE-8008-2293-0E8025B83DFA}"/>
-              </a:ext>
-            </a:extLst>
-          </p:cNvPr>
+            <a:endParaRPr lang="en-US" dirty="0"/>
+          </a:p>
+        </p:txBody>
+      </p:sp>
+      <p:sp>
+        <p:nvSpPr>
+          <p:cNvPr id="4" name="Date Placeholder 3"/>
           <p:cNvSpPr>
             <a:spLocks noGrp="1"/>
           </p:cNvSpPr>
@@ -502,13 +458,7 @@
       </p:sp>
       <p:sp>
         <p:nvSpPr>
-          <p:cNvPr id="5" name="フッター プレースホルダー 4">
-            <a:extLst>
-              <a:ext uri="{FF2B5EF4-FFF2-40B4-BE49-F238E27FC236}">
-                <a16:creationId xmlns:a16="http://schemas.microsoft.com/office/drawing/2014/main" id="{B0201487-E0F0-073B-1434-DAA3EB7D9341}"/>
-              </a:ext>
-            </a:extLst>
-          </p:cNvPr>
+          <p:cNvPr id="5" name="Footer Placeholder 4"/>
           <p:cNvSpPr>
             <a:spLocks noGrp="1"/>
           </p:cNvSpPr>
@@ -527,13 +477,7 @@
       </p:sp>
       <p:sp>
         <p:nvSpPr>
-          <p:cNvPr id="6" name="スライド番号プレースホルダー 5">
-            <a:extLst>
-              <a:ext uri="{FF2B5EF4-FFF2-40B4-BE49-F238E27FC236}">
-                <a16:creationId xmlns:a16="http://schemas.microsoft.com/office/drawing/2014/main" id="{EBEA7071-2CF0-6C99-2894-AC2C37CD6C06}"/>
-              </a:ext>
-            </a:extLst>
-          </p:cNvPr>
+          <p:cNvPr id="6" name="Slide Number Placeholder 5"/>
           <p:cNvSpPr>
             <a:spLocks noGrp="1"/>
           </p:cNvSpPr>
@@ -557,7 +501,7 @@
     </p:spTree>
     <p:extLst>
       <p:ext uri="{BB962C8B-B14F-4D97-AF65-F5344CB8AC3E}">
-        <p14:creationId xmlns:p14="http://schemas.microsoft.com/office/powerpoint/2010/main" val="3283119313"/>
+        <p14:creationId xmlns:p14="http://schemas.microsoft.com/office/powerpoint/2010/main" val="1248870136"/>
       </p:ext>
     </p:extLst>
   </p:cSld>
@@ -586,13 +530,7 @@
       </p:grpSpPr>
       <p:sp>
         <p:nvSpPr>
-          <p:cNvPr id="2" name="縦書きタイトル 1">
-            <a:extLst>
-              <a:ext uri="{FF2B5EF4-FFF2-40B4-BE49-F238E27FC236}">
-                <a16:creationId xmlns:a16="http://schemas.microsoft.com/office/drawing/2014/main" id="{A142ECAA-AFC7-44BB-522A-7FBB2799B17B}"/>
-              </a:ext>
-            </a:extLst>
-          </p:cNvPr>
+          <p:cNvPr id="2" name="Vertical Title 1"/>
           <p:cNvSpPr>
             <a:spLocks noGrp="1"/>
           </p:cNvSpPr>
@@ -611,21 +549,16 @@
           <a:lstStyle/>
           <a:p>
             <a:r>
-              <a:rPr kumimoji="1" lang="ja-JP" altLang="en-US"/>
+              <a:rPr lang="ja-JP" altLang="en-US"/>
               <a:t>マスター タイトルの書式設定</a:t>
             </a:r>
-          </a:p>
-        </p:txBody>
-      </p:sp>
-      <p:sp>
-        <p:nvSpPr>
-          <p:cNvPr id="3" name="縦書きテキスト プレースホルダー 2">
-            <a:extLst>
-              <a:ext uri="{FF2B5EF4-FFF2-40B4-BE49-F238E27FC236}">
-                <a16:creationId xmlns:a16="http://schemas.microsoft.com/office/drawing/2014/main" id="{0DFA286F-3E57-DA01-AA00-9EEF27D4C483}"/>
-              </a:ext>
-            </a:extLst>
-          </p:cNvPr>
+            <a:endParaRPr lang="en-US" dirty="0"/>
+          </a:p>
+        </p:txBody>
+      </p:sp>
+      <p:sp>
+        <p:nvSpPr>
+          <p:cNvPr id="3" name="Vertical Text Placeholder 2"/>
           <p:cNvSpPr>
             <a:spLocks noGrp="1"/>
           </p:cNvSpPr>
@@ -645,81 +578,76 @@
           <a:p>
             <a:pPr lvl="0"/>
             <a:r>
-              <a:rPr kumimoji="1" lang="ja-JP" altLang="en-US"/>
+              <a:rPr lang="ja-JP" altLang="en-US"/>
               <a:t>マスター テキストの書式設定</a:t>
             </a:r>
           </a:p>
           <a:p>
             <a:pPr lvl="1"/>
             <a:r>
-              <a:rPr kumimoji="1" lang="ja-JP" altLang="en-US"/>
+              <a:rPr lang="ja-JP" altLang="en-US"/>
               <a:t>第 </a:t>
             </a:r>
             <a:r>
-              <a:rPr kumimoji="1" lang="en-US" altLang="ja-JP"/>
+              <a:rPr lang="en-US" altLang="ja-JP"/>
               <a:t>2 </a:t>
             </a:r>
             <a:r>
-              <a:rPr kumimoji="1" lang="ja-JP" altLang="en-US"/>
+              <a:rPr lang="ja-JP" altLang="en-US"/>
               <a:t>レベル</a:t>
             </a:r>
           </a:p>
           <a:p>
             <a:pPr lvl="2"/>
             <a:r>
-              <a:rPr kumimoji="1" lang="ja-JP" altLang="en-US"/>
+              <a:rPr lang="ja-JP" altLang="en-US"/>
               <a:t>第 </a:t>
             </a:r>
             <a:r>
-              <a:rPr kumimoji="1" lang="en-US" altLang="ja-JP"/>
+              <a:rPr lang="en-US" altLang="ja-JP"/>
               <a:t>3 </a:t>
             </a:r>
             <a:r>
-              <a:rPr kumimoji="1" lang="ja-JP" altLang="en-US"/>
+              <a:rPr lang="ja-JP" altLang="en-US"/>
               <a:t>レベル</a:t>
             </a:r>
           </a:p>
           <a:p>
             <a:pPr lvl="3"/>
             <a:r>
-              <a:rPr kumimoji="1" lang="ja-JP" altLang="en-US"/>
+              <a:rPr lang="ja-JP" altLang="en-US"/>
               <a:t>第 </a:t>
             </a:r>
             <a:r>
-              <a:rPr kumimoji="1" lang="en-US" altLang="ja-JP"/>
+              <a:rPr lang="en-US" altLang="ja-JP"/>
               <a:t>4 </a:t>
             </a:r>
             <a:r>
-              <a:rPr kumimoji="1" lang="ja-JP" altLang="en-US"/>
+              <a:rPr lang="ja-JP" altLang="en-US"/>
               <a:t>レベル</a:t>
             </a:r>
           </a:p>
           <a:p>
             <a:pPr lvl="4"/>
             <a:r>
-              <a:rPr kumimoji="1" lang="ja-JP" altLang="en-US"/>
+              <a:rPr lang="ja-JP" altLang="en-US"/>
               <a:t>第 </a:t>
             </a:r>
             <a:r>
-              <a:rPr kumimoji="1" lang="en-US" altLang="ja-JP"/>
+              <a:rPr lang="en-US" altLang="ja-JP"/>
               <a:t>5 </a:t>
             </a:r>
             <a:r>
-              <a:rPr kumimoji="1" lang="ja-JP" altLang="en-US"/>
+              <a:rPr lang="ja-JP" altLang="en-US"/>
               <a:t>レベル</a:t>
             </a:r>
-          </a:p>
-        </p:txBody>
-      </p:sp>
-      <p:sp>
-        <p:nvSpPr>
-          <p:cNvPr id="4" name="日付プレースホルダー 3">
-            <a:extLst>
-              <a:ext uri="{FF2B5EF4-FFF2-40B4-BE49-F238E27FC236}">
-                <a16:creationId xmlns:a16="http://schemas.microsoft.com/office/drawing/2014/main" id="{4B23AF4C-C0B8-36DA-34BD-6FE3D3520D12}"/>
-              </a:ext>
-            </a:extLst>
-          </p:cNvPr>
+            <a:endParaRPr lang="en-US" dirty="0"/>
+          </a:p>
+        </p:txBody>
+      </p:sp>
+      <p:sp>
+        <p:nvSpPr>
+          <p:cNvPr id="4" name="Date Placeholder 3"/>
           <p:cNvSpPr>
             <a:spLocks noGrp="1"/>
           </p:cNvSpPr>
@@ -742,13 +670,7 @@
       </p:sp>
       <p:sp>
         <p:nvSpPr>
-          <p:cNvPr id="5" name="フッター プレースホルダー 4">
-            <a:extLst>
-              <a:ext uri="{FF2B5EF4-FFF2-40B4-BE49-F238E27FC236}">
-                <a16:creationId xmlns:a16="http://schemas.microsoft.com/office/drawing/2014/main" id="{CF4EB4B5-E641-52A6-724B-07CC9106CCC7}"/>
-              </a:ext>
-            </a:extLst>
-          </p:cNvPr>
+          <p:cNvPr id="5" name="Footer Placeholder 4"/>
           <p:cNvSpPr>
             <a:spLocks noGrp="1"/>
           </p:cNvSpPr>
@@ -767,13 +689,7 @@
       </p:sp>
       <p:sp>
         <p:nvSpPr>
-          <p:cNvPr id="6" name="スライド番号プレースホルダー 5">
-            <a:extLst>
-              <a:ext uri="{FF2B5EF4-FFF2-40B4-BE49-F238E27FC236}">
-                <a16:creationId xmlns:a16="http://schemas.microsoft.com/office/drawing/2014/main" id="{E1A212CC-5C12-5281-2B7C-0B288E11E3F3}"/>
-              </a:ext>
-            </a:extLst>
-          </p:cNvPr>
+          <p:cNvPr id="6" name="Slide Number Placeholder 5"/>
           <p:cNvSpPr>
             <a:spLocks noGrp="1"/>
           </p:cNvSpPr>
@@ -797,7 +713,7 @@
     </p:spTree>
     <p:extLst>
       <p:ext uri="{BB962C8B-B14F-4D97-AF65-F5344CB8AC3E}">
-        <p14:creationId xmlns:p14="http://schemas.microsoft.com/office/powerpoint/2010/main" val="3321035363"/>
+        <p14:creationId xmlns:p14="http://schemas.microsoft.com/office/powerpoint/2010/main" val="3809075698"/>
       </p:ext>
     </p:extLst>
   </p:cSld>
@@ -826,13 +742,7 @@
       </p:grpSpPr>
       <p:sp>
         <p:nvSpPr>
-          <p:cNvPr id="2" name="タイトル 1">
-            <a:extLst>
-              <a:ext uri="{FF2B5EF4-FFF2-40B4-BE49-F238E27FC236}">
-                <a16:creationId xmlns:a16="http://schemas.microsoft.com/office/drawing/2014/main" id="{046BCCB7-D80E-59AE-31EC-C083713A52F8}"/>
-              </a:ext>
-            </a:extLst>
-          </p:cNvPr>
+          <p:cNvPr id="2" name="Title 1"/>
           <p:cNvSpPr>
             <a:spLocks noGrp="1"/>
           </p:cNvSpPr>
@@ -846,21 +756,16 @@
           <a:lstStyle/>
           <a:p>
             <a:r>
-              <a:rPr kumimoji="1" lang="ja-JP" altLang="en-US"/>
+              <a:rPr lang="ja-JP" altLang="en-US"/>
               <a:t>マスター タイトルの書式設定</a:t>
             </a:r>
-          </a:p>
-        </p:txBody>
-      </p:sp>
-      <p:sp>
-        <p:nvSpPr>
-          <p:cNvPr id="3" name="コンテンツ プレースホルダー 2">
-            <a:extLst>
-              <a:ext uri="{FF2B5EF4-FFF2-40B4-BE49-F238E27FC236}">
-                <a16:creationId xmlns:a16="http://schemas.microsoft.com/office/drawing/2014/main" id="{364C66F8-3A81-055E-E6A7-6A3F90567B77}"/>
-              </a:ext>
-            </a:extLst>
-          </p:cNvPr>
+            <a:endParaRPr lang="en-US" dirty="0"/>
+          </a:p>
+        </p:txBody>
+      </p:sp>
+      <p:sp>
+        <p:nvSpPr>
+          <p:cNvPr id="3" name="Content Placeholder 2"/>
           <p:cNvSpPr>
             <a:spLocks noGrp="1"/>
           </p:cNvSpPr>
@@ -875,81 +780,76 @@
           <a:p>
             <a:pPr lvl="0"/>
             <a:r>
-              <a:rPr kumimoji="1" lang="ja-JP" altLang="en-US"/>
+              <a:rPr lang="ja-JP" altLang="en-US"/>
               <a:t>マスター テキストの書式設定</a:t>
             </a:r>
           </a:p>
           <a:p>
             <a:pPr lvl="1"/>
             <a:r>
-              <a:rPr kumimoji="1" lang="ja-JP" altLang="en-US"/>
+              <a:rPr lang="ja-JP" altLang="en-US"/>
               <a:t>第 </a:t>
             </a:r>
             <a:r>
-              <a:rPr kumimoji="1" lang="en-US" altLang="ja-JP"/>
+              <a:rPr lang="en-US" altLang="ja-JP"/>
               <a:t>2 </a:t>
             </a:r>
             <a:r>
-              <a:rPr kumimoji="1" lang="ja-JP" altLang="en-US"/>
+              <a:rPr lang="ja-JP" altLang="en-US"/>
               <a:t>レベル</a:t>
             </a:r>
           </a:p>
           <a:p>
             <a:pPr lvl="2"/>
             <a:r>
-              <a:rPr kumimoji="1" lang="ja-JP" altLang="en-US"/>
+              <a:rPr lang="ja-JP" altLang="en-US"/>
               <a:t>第 </a:t>
             </a:r>
             <a:r>
-              <a:rPr kumimoji="1" lang="en-US" altLang="ja-JP"/>
+              <a:rPr lang="en-US" altLang="ja-JP"/>
               <a:t>3 </a:t>
             </a:r>
             <a:r>
-              <a:rPr kumimoji="1" lang="ja-JP" altLang="en-US"/>
+              <a:rPr lang="ja-JP" altLang="en-US"/>
               <a:t>レベル</a:t>
             </a:r>
           </a:p>
           <a:p>
             <a:pPr lvl="3"/>
             <a:r>
-              <a:rPr kumimoji="1" lang="ja-JP" altLang="en-US"/>
+              <a:rPr lang="ja-JP" altLang="en-US"/>
               <a:t>第 </a:t>
             </a:r>
             <a:r>
-              <a:rPr kumimoji="1" lang="en-US" altLang="ja-JP"/>
+              <a:rPr lang="en-US" altLang="ja-JP"/>
               <a:t>4 </a:t>
             </a:r>
             <a:r>
-              <a:rPr kumimoji="1" lang="ja-JP" altLang="en-US"/>
+              <a:rPr lang="ja-JP" altLang="en-US"/>
               <a:t>レベル</a:t>
             </a:r>
           </a:p>
           <a:p>
             <a:pPr lvl="4"/>
             <a:r>
-              <a:rPr kumimoji="1" lang="ja-JP" altLang="en-US"/>
+              <a:rPr lang="ja-JP" altLang="en-US"/>
               <a:t>第 </a:t>
             </a:r>
             <a:r>
-              <a:rPr kumimoji="1" lang="en-US" altLang="ja-JP"/>
+              <a:rPr lang="en-US" altLang="ja-JP"/>
               <a:t>5 </a:t>
             </a:r>
             <a:r>
-              <a:rPr kumimoji="1" lang="ja-JP" altLang="en-US"/>
+              <a:rPr lang="ja-JP" altLang="en-US"/>
               <a:t>レベル</a:t>
             </a:r>
-          </a:p>
-        </p:txBody>
-      </p:sp>
-      <p:sp>
-        <p:nvSpPr>
-          <p:cNvPr id="4" name="日付プレースホルダー 3">
-            <a:extLst>
-              <a:ext uri="{FF2B5EF4-FFF2-40B4-BE49-F238E27FC236}">
-                <a16:creationId xmlns:a16="http://schemas.microsoft.com/office/drawing/2014/main" id="{F3282D48-DA2A-9BFE-BF00-408038D7576C}"/>
-              </a:ext>
-            </a:extLst>
-          </p:cNvPr>
+            <a:endParaRPr lang="en-US" dirty="0"/>
+          </a:p>
+        </p:txBody>
+      </p:sp>
+      <p:sp>
+        <p:nvSpPr>
+          <p:cNvPr id="4" name="Date Placeholder 3"/>
           <p:cNvSpPr>
             <a:spLocks noGrp="1"/>
           </p:cNvSpPr>
@@ -972,13 +872,7 @@
       </p:sp>
       <p:sp>
         <p:nvSpPr>
-          <p:cNvPr id="5" name="フッター プレースホルダー 4">
-            <a:extLst>
-              <a:ext uri="{FF2B5EF4-FFF2-40B4-BE49-F238E27FC236}">
-                <a16:creationId xmlns:a16="http://schemas.microsoft.com/office/drawing/2014/main" id="{F778145B-9B94-E26A-31C3-DEE9D1968E3D}"/>
-              </a:ext>
-            </a:extLst>
-          </p:cNvPr>
+          <p:cNvPr id="5" name="Footer Placeholder 4"/>
           <p:cNvSpPr>
             <a:spLocks noGrp="1"/>
           </p:cNvSpPr>
@@ -997,13 +891,7 @@
       </p:sp>
       <p:sp>
         <p:nvSpPr>
-          <p:cNvPr id="6" name="スライド番号プレースホルダー 5">
-            <a:extLst>
-              <a:ext uri="{FF2B5EF4-FFF2-40B4-BE49-F238E27FC236}">
-                <a16:creationId xmlns:a16="http://schemas.microsoft.com/office/drawing/2014/main" id="{91AB4E25-F439-D0EE-2F4A-19F995F35169}"/>
-              </a:ext>
-            </a:extLst>
-          </p:cNvPr>
+          <p:cNvPr id="6" name="Slide Number Placeholder 5"/>
           <p:cNvSpPr>
             <a:spLocks noGrp="1"/>
           </p:cNvSpPr>
@@ -1027,7 +915,7 @@
     </p:spTree>
     <p:extLst>
       <p:ext uri="{BB962C8B-B14F-4D97-AF65-F5344CB8AC3E}">
-        <p14:creationId xmlns:p14="http://schemas.microsoft.com/office/powerpoint/2010/main" val="322295413"/>
+        <p14:creationId xmlns:p14="http://schemas.microsoft.com/office/powerpoint/2010/main" val="2589952248"/>
       </p:ext>
     </p:extLst>
   </p:cSld>
@@ -1056,13 +944,7 @@
       </p:grpSpPr>
       <p:sp>
         <p:nvSpPr>
-          <p:cNvPr id="2" name="タイトル 1">
-            <a:extLst>
-              <a:ext uri="{FF2B5EF4-FFF2-40B4-BE49-F238E27FC236}">
-                <a16:creationId xmlns:a16="http://schemas.microsoft.com/office/drawing/2014/main" id="{5F24A72D-18DF-3339-2926-E548C50F85BB}"/>
-              </a:ext>
-            </a:extLst>
-          </p:cNvPr>
+          <p:cNvPr id="2" name="Title 1"/>
           <p:cNvSpPr>
             <a:spLocks noGrp="1"/>
           </p:cNvSpPr>
@@ -1085,21 +967,16 @@
           </a:lstStyle>
           <a:p>
             <a:r>
-              <a:rPr kumimoji="1" lang="ja-JP" altLang="en-US"/>
+              <a:rPr lang="ja-JP" altLang="en-US"/>
               <a:t>マスター タイトルの書式設定</a:t>
             </a:r>
-          </a:p>
-        </p:txBody>
-      </p:sp>
-      <p:sp>
-        <p:nvSpPr>
-          <p:cNvPr id="3" name="テキスト プレースホルダー 2">
-            <a:extLst>
-              <a:ext uri="{FF2B5EF4-FFF2-40B4-BE49-F238E27FC236}">
-                <a16:creationId xmlns:a16="http://schemas.microsoft.com/office/drawing/2014/main" id="{1E9211EF-0241-2807-457C-66E60174EE31}"/>
-              </a:ext>
-            </a:extLst>
-          </p:cNvPr>
+            <a:endParaRPr lang="en-US" dirty="0"/>
+          </a:p>
+        </p:txBody>
+      </p:sp>
+      <p:sp>
+        <p:nvSpPr>
+          <p:cNvPr id="3" name="Text Placeholder 2"/>
           <p:cNvSpPr>
             <a:spLocks noGrp="1"/>
           </p:cNvSpPr>
@@ -1121,7 +998,7 @@
               <a:defRPr sz="2400">
                 <a:solidFill>
                   <a:schemeClr val="tx1">
-                    <a:tint val="82000"/>
+                    <a:shade val="82000"/>
                   </a:schemeClr>
                 </a:solidFill>
               </a:defRPr>
@@ -1131,7 +1008,7 @@
               <a:defRPr sz="2000">
                 <a:solidFill>
                   <a:schemeClr val="tx1">
-                    <a:tint val="82000"/>
+                    <a:shade val="82000"/>
                   </a:schemeClr>
                 </a:solidFill>
               </a:defRPr>
@@ -1141,7 +1018,7 @@
               <a:defRPr sz="1800">
                 <a:solidFill>
                   <a:schemeClr val="tx1">
-                    <a:tint val="82000"/>
+                    <a:shade val="82000"/>
                   </a:schemeClr>
                 </a:solidFill>
               </a:defRPr>
@@ -1151,7 +1028,7 @@
               <a:defRPr sz="1600">
                 <a:solidFill>
                   <a:schemeClr val="tx1">
-                    <a:tint val="82000"/>
+                    <a:shade val="82000"/>
                   </a:schemeClr>
                 </a:solidFill>
               </a:defRPr>
@@ -1161,7 +1038,7 @@
               <a:defRPr sz="1600">
                 <a:solidFill>
                   <a:schemeClr val="tx1">
-                    <a:tint val="82000"/>
+                    <a:shade val="82000"/>
                   </a:schemeClr>
                 </a:solidFill>
               </a:defRPr>
@@ -1171,7 +1048,7 @@
               <a:defRPr sz="1600">
                 <a:solidFill>
                   <a:schemeClr val="tx1">
-                    <a:tint val="82000"/>
+                    <a:shade val="82000"/>
                   </a:schemeClr>
                 </a:solidFill>
               </a:defRPr>
@@ -1181,7 +1058,7 @@
               <a:defRPr sz="1600">
                 <a:solidFill>
                   <a:schemeClr val="tx1">
-                    <a:tint val="82000"/>
+                    <a:shade val="82000"/>
                   </a:schemeClr>
                 </a:solidFill>
               </a:defRPr>
@@ -1191,7 +1068,7 @@
               <a:defRPr sz="1600">
                 <a:solidFill>
                   <a:schemeClr val="tx1">
-                    <a:tint val="82000"/>
+                    <a:shade val="82000"/>
                   </a:schemeClr>
                 </a:solidFill>
               </a:defRPr>
@@ -1201,7 +1078,7 @@
               <a:defRPr sz="1600">
                 <a:solidFill>
                   <a:schemeClr val="tx1">
-                    <a:tint val="82000"/>
+                    <a:shade val="82000"/>
                   </a:schemeClr>
                 </a:solidFill>
               </a:defRPr>
@@ -1210,7 +1087,7 @@
           <a:p>
             <a:pPr lvl="0"/>
             <a:r>
-              <a:rPr kumimoji="1" lang="ja-JP" altLang="en-US"/>
+              <a:rPr lang="ja-JP" altLang="en-US"/>
               <a:t>マスター テキストの書式設定</a:t>
             </a:r>
           </a:p>
@@ -1218,13 +1095,7 @@
       </p:sp>
       <p:sp>
         <p:nvSpPr>
-          <p:cNvPr id="4" name="日付プレースホルダー 3">
-            <a:extLst>
-              <a:ext uri="{FF2B5EF4-FFF2-40B4-BE49-F238E27FC236}">
-                <a16:creationId xmlns:a16="http://schemas.microsoft.com/office/drawing/2014/main" id="{C45B40F0-00AA-499E-9452-FB1952BC6333}"/>
-              </a:ext>
-            </a:extLst>
-          </p:cNvPr>
+          <p:cNvPr id="4" name="Date Placeholder 3"/>
           <p:cNvSpPr>
             <a:spLocks noGrp="1"/>
           </p:cNvSpPr>
@@ -1247,13 +1118,7 @@
       </p:sp>
       <p:sp>
         <p:nvSpPr>
-          <p:cNvPr id="5" name="フッター プレースホルダー 4">
-            <a:extLst>
-              <a:ext uri="{FF2B5EF4-FFF2-40B4-BE49-F238E27FC236}">
-                <a16:creationId xmlns:a16="http://schemas.microsoft.com/office/drawing/2014/main" id="{F6D13937-DEA8-A6F2-478D-00CEB6D86BF0}"/>
-              </a:ext>
-            </a:extLst>
-          </p:cNvPr>
+          <p:cNvPr id="5" name="Footer Placeholder 4"/>
           <p:cNvSpPr>
             <a:spLocks noGrp="1"/>
           </p:cNvSpPr>
@@ -1272,13 +1137,7 @@
       </p:sp>
       <p:sp>
         <p:nvSpPr>
-          <p:cNvPr id="6" name="スライド番号プレースホルダー 5">
-            <a:extLst>
-              <a:ext uri="{FF2B5EF4-FFF2-40B4-BE49-F238E27FC236}">
-                <a16:creationId xmlns:a16="http://schemas.microsoft.com/office/drawing/2014/main" id="{E5172369-3A2F-2E48-C287-861E67679157}"/>
-              </a:ext>
-            </a:extLst>
-          </p:cNvPr>
+          <p:cNvPr id="6" name="Slide Number Placeholder 5"/>
           <p:cNvSpPr>
             <a:spLocks noGrp="1"/>
           </p:cNvSpPr>
@@ -1302,7 +1161,7 @@
     </p:spTree>
     <p:extLst>
       <p:ext uri="{BB962C8B-B14F-4D97-AF65-F5344CB8AC3E}">
-        <p14:creationId xmlns:p14="http://schemas.microsoft.com/office/powerpoint/2010/main" val="2966174350"/>
+        <p14:creationId xmlns:p14="http://schemas.microsoft.com/office/powerpoint/2010/main" val="1732062692"/>
       </p:ext>
     </p:extLst>
   </p:cSld>
@@ -1331,13 +1190,7 @@
       </p:grpSpPr>
       <p:sp>
         <p:nvSpPr>
-          <p:cNvPr id="2" name="タイトル 1">
-            <a:extLst>
-              <a:ext uri="{FF2B5EF4-FFF2-40B4-BE49-F238E27FC236}">
-                <a16:creationId xmlns:a16="http://schemas.microsoft.com/office/drawing/2014/main" id="{E123E1B0-5D42-87FB-2C2E-3A2D6738324B}"/>
-              </a:ext>
-            </a:extLst>
-          </p:cNvPr>
+          <p:cNvPr id="2" name="Title 1"/>
           <p:cNvSpPr>
             <a:spLocks noGrp="1"/>
           </p:cNvSpPr>
@@ -1351,21 +1204,16 @@
           <a:lstStyle/>
           <a:p>
             <a:r>
-              <a:rPr kumimoji="1" lang="ja-JP" altLang="en-US"/>
+              <a:rPr lang="ja-JP" altLang="en-US"/>
               <a:t>マスター タイトルの書式設定</a:t>
             </a:r>
-          </a:p>
-        </p:txBody>
-      </p:sp>
-      <p:sp>
-        <p:nvSpPr>
-          <p:cNvPr id="3" name="コンテンツ プレースホルダー 2">
-            <a:extLst>
-              <a:ext uri="{FF2B5EF4-FFF2-40B4-BE49-F238E27FC236}">
-                <a16:creationId xmlns:a16="http://schemas.microsoft.com/office/drawing/2014/main" id="{C3BB8405-786F-5EA1-B4EC-A757AC571B7E}"/>
-              </a:ext>
-            </a:extLst>
-          </p:cNvPr>
+            <a:endParaRPr lang="en-US" dirty="0"/>
+          </a:p>
+        </p:txBody>
+      </p:sp>
+      <p:sp>
+        <p:nvSpPr>
+          <p:cNvPr id="3" name="Content Placeholder 2"/>
           <p:cNvSpPr>
             <a:spLocks noGrp="1"/>
           </p:cNvSpPr>
@@ -1385,81 +1233,76 @@
           <a:p>
             <a:pPr lvl="0"/>
             <a:r>
-              <a:rPr kumimoji="1" lang="ja-JP" altLang="en-US"/>
+              <a:rPr lang="ja-JP" altLang="en-US"/>
               <a:t>マスター テキストの書式設定</a:t>
             </a:r>
           </a:p>
           <a:p>
             <a:pPr lvl="1"/>
             <a:r>
-              <a:rPr kumimoji="1" lang="ja-JP" altLang="en-US"/>
+              <a:rPr lang="ja-JP" altLang="en-US"/>
               <a:t>第 </a:t>
             </a:r>
             <a:r>
-              <a:rPr kumimoji="1" lang="en-US" altLang="ja-JP"/>
+              <a:rPr lang="en-US" altLang="ja-JP"/>
               <a:t>2 </a:t>
             </a:r>
             <a:r>
-              <a:rPr kumimoji="1" lang="ja-JP" altLang="en-US"/>
+              <a:rPr lang="ja-JP" altLang="en-US"/>
               <a:t>レベル</a:t>
             </a:r>
           </a:p>
           <a:p>
             <a:pPr lvl="2"/>
             <a:r>
-              <a:rPr kumimoji="1" lang="ja-JP" altLang="en-US"/>
+              <a:rPr lang="ja-JP" altLang="en-US"/>
               <a:t>第 </a:t>
             </a:r>
             <a:r>
-              <a:rPr kumimoji="1" lang="en-US" altLang="ja-JP"/>
+              <a:rPr lang="en-US" altLang="ja-JP"/>
               <a:t>3 </a:t>
             </a:r>
             <a:r>
-              <a:rPr kumimoji="1" lang="ja-JP" altLang="en-US"/>
+              <a:rPr lang="ja-JP" altLang="en-US"/>
               <a:t>レベル</a:t>
             </a:r>
           </a:p>
           <a:p>
             <a:pPr lvl="3"/>
             <a:r>
-              <a:rPr kumimoji="1" lang="ja-JP" altLang="en-US"/>
+              <a:rPr lang="ja-JP" altLang="en-US"/>
               <a:t>第 </a:t>
             </a:r>
             <a:r>
-              <a:rPr kumimoji="1" lang="en-US" altLang="ja-JP"/>
+              <a:rPr lang="en-US" altLang="ja-JP"/>
               <a:t>4 </a:t>
             </a:r>
             <a:r>
-              <a:rPr kumimoji="1" lang="ja-JP" altLang="en-US"/>
+              <a:rPr lang="ja-JP" altLang="en-US"/>
               <a:t>レベル</a:t>
             </a:r>
           </a:p>
           <a:p>
             <a:pPr lvl="4"/>
             <a:r>
-              <a:rPr kumimoji="1" lang="ja-JP" altLang="en-US"/>
+              <a:rPr lang="ja-JP" altLang="en-US"/>
               <a:t>第 </a:t>
             </a:r>
             <a:r>
-              <a:rPr kumimoji="1" lang="en-US" altLang="ja-JP"/>
+              <a:rPr lang="en-US" altLang="ja-JP"/>
               <a:t>5 </a:t>
             </a:r>
             <a:r>
-              <a:rPr kumimoji="1" lang="ja-JP" altLang="en-US"/>
+              <a:rPr lang="ja-JP" altLang="en-US"/>
               <a:t>レベル</a:t>
             </a:r>
-          </a:p>
-        </p:txBody>
-      </p:sp>
-      <p:sp>
-        <p:nvSpPr>
-          <p:cNvPr id="4" name="コンテンツ プレースホルダー 3">
-            <a:extLst>
-              <a:ext uri="{FF2B5EF4-FFF2-40B4-BE49-F238E27FC236}">
-                <a16:creationId xmlns:a16="http://schemas.microsoft.com/office/drawing/2014/main" id="{C3F2FD32-9E3E-CB7B-D40E-BB379BD1A187}"/>
-              </a:ext>
-            </a:extLst>
-          </p:cNvPr>
+            <a:endParaRPr lang="en-US" dirty="0"/>
+          </a:p>
+        </p:txBody>
+      </p:sp>
+      <p:sp>
+        <p:nvSpPr>
+          <p:cNvPr id="4" name="Content Placeholder 3"/>
           <p:cNvSpPr>
             <a:spLocks noGrp="1"/>
           </p:cNvSpPr>
@@ -1479,81 +1322,76 @@
           <a:p>
             <a:pPr lvl="0"/>
             <a:r>
-              <a:rPr kumimoji="1" lang="ja-JP" altLang="en-US"/>
+              <a:rPr lang="ja-JP" altLang="en-US"/>
               <a:t>マスター テキストの書式設定</a:t>
             </a:r>
           </a:p>
           <a:p>
             <a:pPr lvl="1"/>
             <a:r>
-              <a:rPr kumimoji="1" lang="ja-JP" altLang="en-US"/>
+              <a:rPr lang="ja-JP" altLang="en-US"/>
               <a:t>第 </a:t>
             </a:r>
             <a:r>
-              <a:rPr kumimoji="1" lang="en-US" altLang="ja-JP"/>
+              <a:rPr lang="en-US" altLang="ja-JP"/>
               <a:t>2 </a:t>
             </a:r>
             <a:r>
-              <a:rPr kumimoji="1" lang="ja-JP" altLang="en-US"/>
+              <a:rPr lang="ja-JP" altLang="en-US"/>
               <a:t>レベル</a:t>
             </a:r>
           </a:p>
           <a:p>
             <a:pPr lvl="2"/>
             <a:r>
-              <a:rPr kumimoji="1" lang="ja-JP" altLang="en-US"/>
+              <a:rPr lang="ja-JP" altLang="en-US"/>
               <a:t>第 </a:t>
             </a:r>
             <a:r>
-              <a:rPr kumimoji="1" lang="en-US" altLang="ja-JP"/>
+              <a:rPr lang="en-US" altLang="ja-JP"/>
               <a:t>3 </a:t>
             </a:r>
             <a:r>
-              <a:rPr kumimoji="1" lang="ja-JP" altLang="en-US"/>
+              <a:rPr lang="ja-JP" altLang="en-US"/>
               <a:t>レベル</a:t>
             </a:r>
           </a:p>
           <a:p>
             <a:pPr lvl="3"/>
             <a:r>
-              <a:rPr kumimoji="1" lang="ja-JP" altLang="en-US"/>
+              <a:rPr lang="ja-JP" altLang="en-US"/>
               <a:t>第 </a:t>
             </a:r>
             <a:r>
-              <a:rPr kumimoji="1" lang="en-US" altLang="ja-JP"/>
+              <a:rPr lang="en-US" altLang="ja-JP"/>
               <a:t>4 </a:t>
             </a:r>
             <a:r>
-              <a:rPr kumimoji="1" lang="ja-JP" altLang="en-US"/>
+              <a:rPr lang="ja-JP" altLang="en-US"/>
               <a:t>レベル</a:t>
             </a:r>
           </a:p>
           <a:p>
             <a:pPr lvl="4"/>
             <a:r>
-              <a:rPr kumimoji="1" lang="ja-JP" altLang="en-US"/>
+              <a:rPr lang="ja-JP" altLang="en-US"/>
               <a:t>第 </a:t>
             </a:r>
             <a:r>
-              <a:rPr kumimoji="1" lang="en-US" altLang="ja-JP"/>
+              <a:rPr lang="en-US" altLang="ja-JP"/>
               <a:t>5 </a:t>
             </a:r>
             <a:r>
-              <a:rPr kumimoji="1" lang="ja-JP" altLang="en-US"/>
+              <a:rPr lang="ja-JP" altLang="en-US"/>
               <a:t>レベル</a:t>
             </a:r>
-          </a:p>
-        </p:txBody>
-      </p:sp>
-      <p:sp>
-        <p:nvSpPr>
-          <p:cNvPr id="5" name="日付プレースホルダー 4">
-            <a:extLst>
-              <a:ext uri="{FF2B5EF4-FFF2-40B4-BE49-F238E27FC236}">
-                <a16:creationId xmlns:a16="http://schemas.microsoft.com/office/drawing/2014/main" id="{59D2D140-9E9B-1ACB-8627-53FBA1632073}"/>
-              </a:ext>
-            </a:extLst>
-          </p:cNvPr>
+            <a:endParaRPr lang="en-US" dirty="0"/>
+          </a:p>
+        </p:txBody>
+      </p:sp>
+      <p:sp>
+        <p:nvSpPr>
+          <p:cNvPr id="5" name="Date Placeholder 4"/>
           <p:cNvSpPr>
             <a:spLocks noGrp="1"/>
           </p:cNvSpPr>
@@ -1576,13 +1414,7 @@
       </p:sp>
       <p:sp>
         <p:nvSpPr>
-          <p:cNvPr id="6" name="フッター プレースホルダー 5">
-            <a:extLst>
-              <a:ext uri="{FF2B5EF4-FFF2-40B4-BE49-F238E27FC236}">
-                <a16:creationId xmlns:a16="http://schemas.microsoft.com/office/drawing/2014/main" id="{DBEFB77E-870D-CC30-0734-7ED12C46AB3E}"/>
-              </a:ext>
-            </a:extLst>
-          </p:cNvPr>
+          <p:cNvPr id="6" name="Footer Placeholder 5"/>
           <p:cNvSpPr>
             <a:spLocks noGrp="1"/>
           </p:cNvSpPr>
@@ -1601,13 +1433,7 @@
       </p:sp>
       <p:sp>
         <p:nvSpPr>
-          <p:cNvPr id="7" name="スライド番号プレースホルダー 6">
-            <a:extLst>
-              <a:ext uri="{FF2B5EF4-FFF2-40B4-BE49-F238E27FC236}">
-                <a16:creationId xmlns:a16="http://schemas.microsoft.com/office/drawing/2014/main" id="{4BBA8E41-EFEC-69B8-4D68-B5566D5111F4}"/>
-              </a:ext>
-            </a:extLst>
-          </p:cNvPr>
+          <p:cNvPr id="7" name="Slide Number Placeholder 6"/>
           <p:cNvSpPr>
             <a:spLocks noGrp="1"/>
           </p:cNvSpPr>
@@ -1631,7 +1457,7 @@
     </p:spTree>
     <p:extLst>
       <p:ext uri="{BB962C8B-B14F-4D97-AF65-F5344CB8AC3E}">
-        <p14:creationId xmlns:p14="http://schemas.microsoft.com/office/powerpoint/2010/main" val="819097652"/>
+        <p14:creationId xmlns:p14="http://schemas.microsoft.com/office/powerpoint/2010/main" val="2812956188"/>
       </p:ext>
     </p:extLst>
   </p:cSld>
@@ -1660,13 +1486,7 @@
       </p:grpSpPr>
       <p:sp>
         <p:nvSpPr>
-          <p:cNvPr id="2" name="タイトル 1">
-            <a:extLst>
-              <a:ext uri="{FF2B5EF4-FFF2-40B4-BE49-F238E27FC236}">
-                <a16:creationId xmlns:a16="http://schemas.microsoft.com/office/drawing/2014/main" id="{63B8DD2B-BEEC-2119-F2EC-ED48D14ECB5F}"/>
-              </a:ext>
-            </a:extLst>
-          </p:cNvPr>
+          <p:cNvPr id="2" name="Title 1"/>
           <p:cNvSpPr>
             <a:spLocks noGrp="1"/>
           </p:cNvSpPr>
@@ -1685,21 +1505,16 @@
           <a:lstStyle/>
           <a:p>
             <a:r>
-              <a:rPr kumimoji="1" lang="ja-JP" altLang="en-US"/>
+              <a:rPr lang="ja-JP" altLang="en-US"/>
               <a:t>マスター タイトルの書式設定</a:t>
             </a:r>
-          </a:p>
-        </p:txBody>
-      </p:sp>
-      <p:sp>
-        <p:nvSpPr>
-          <p:cNvPr id="3" name="テキスト プレースホルダー 2">
-            <a:extLst>
-              <a:ext uri="{FF2B5EF4-FFF2-40B4-BE49-F238E27FC236}">
-                <a16:creationId xmlns:a16="http://schemas.microsoft.com/office/drawing/2014/main" id="{7BD221E5-78E7-2E43-87BB-9DC20C072BFA}"/>
-              </a:ext>
-            </a:extLst>
-          </p:cNvPr>
+            <a:endParaRPr lang="en-US" dirty="0"/>
+          </a:p>
+        </p:txBody>
+      </p:sp>
+      <p:sp>
+        <p:nvSpPr>
+          <p:cNvPr id="3" name="Text Placeholder 2"/>
           <p:cNvSpPr>
             <a:spLocks noGrp="1"/>
           </p:cNvSpPr>
@@ -1756,7 +1571,7 @@
           <a:p>
             <a:pPr lvl="0"/>
             <a:r>
-              <a:rPr kumimoji="1" lang="ja-JP" altLang="en-US"/>
+              <a:rPr lang="ja-JP" altLang="en-US"/>
               <a:t>マスター テキストの書式設定</a:t>
             </a:r>
           </a:p>
@@ -1764,13 +1579,7 @@
       </p:sp>
       <p:sp>
         <p:nvSpPr>
-          <p:cNvPr id="4" name="コンテンツ プレースホルダー 3">
-            <a:extLst>
-              <a:ext uri="{FF2B5EF4-FFF2-40B4-BE49-F238E27FC236}">
-                <a16:creationId xmlns:a16="http://schemas.microsoft.com/office/drawing/2014/main" id="{4AECE11F-9C96-A149-5922-07A4CE18478A}"/>
-              </a:ext>
-            </a:extLst>
-          </p:cNvPr>
+          <p:cNvPr id="4" name="Content Placeholder 3"/>
           <p:cNvSpPr>
             <a:spLocks noGrp="1"/>
           </p:cNvSpPr>
@@ -1790,81 +1599,76 @@
           <a:p>
             <a:pPr lvl="0"/>
             <a:r>
-              <a:rPr kumimoji="1" lang="ja-JP" altLang="en-US"/>
+              <a:rPr lang="ja-JP" altLang="en-US"/>
               <a:t>マスター テキストの書式設定</a:t>
             </a:r>
           </a:p>
           <a:p>
             <a:pPr lvl="1"/>
             <a:r>
-              <a:rPr kumimoji="1" lang="ja-JP" altLang="en-US"/>
+              <a:rPr lang="ja-JP" altLang="en-US"/>
               <a:t>第 </a:t>
             </a:r>
             <a:r>
-              <a:rPr kumimoji="1" lang="en-US" altLang="ja-JP"/>
+              <a:rPr lang="en-US" altLang="ja-JP"/>
               <a:t>2 </a:t>
             </a:r>
             <a:r>
-              <a:rPr kumimoji="1" lang="ja-JP" altLang="en-US"/>
+              <a:rPr lang="ja-JP" altLang="en-US"/>
               <a:t>レベル</a:t>
             </a:r>
           </a:p>
           <a:p>
             <a:pPr lvl="2"/>
             <a:r>
-              <a:rPr kumimoji="1" lang="ja-JP" altLang="en-US"/>
+              <a:rPr lang="ja-JP" altLang="en-US"/>
               <a:t>第 </a:t>
             </a:r>
             <a:r>
-              <a:rPr kumimoji="1" lang="en-US" altLang="ja-JP"/>
+              <a:rPr lang="en-US" altLang="ja-JP"/>
               <a:t>3 </a:t>
             </a:r>
             <a:r>
-              <a:rPr kumimoji="1" lang="ja-JP" altLang="en-US"/>
+              <a:rPr lang="ja-JP" altLang="en-US"/>
               <a:t>レベル</a:t>
             </a:r>
           </a:p>
           <a:p>
             <a:pPr lvl="3"/>
             <a:r>
-              <a:rPr kumimoji="1" lang="ja-JP" altLang="en-US"/>
+              <a:rPr lang="ja-JP" altLang="en-US"/>
               <a:t>第 </a:t>
             </a:r>
             <a:r>
-              <a:rPr kumimoji="1" lang="en-US" altLang="ja-JP"/>
+              <a:rPr lang="en-US" altLang="ja-JP"/>
               <a:t>4 </a:t>
             </a:r>
             <a:r>
-              <a:rPr kumimoji="1" lang="ja-JP" altLang="en-US"/>
+              <a:rPr lang="ja-JP" altLang="en-US"/>
               <a:t>レベル</a:t>
             </a:r>
           </a:p>
           <a:p>
             <a:pPr lvl="4"/>
             <a:r>
-              <a:rPr kumimoji="1" lang="ja-JP" altLang="en-US"/>
+              <a:rPr lang="ja-JP" altLang="en-US"/>
               <a:t>第 </a:t>
             </a:r>
             <a:r>
-              <a:rPr kumimoji="1" lang="en-US" altLang="ja-JP"/>
+              <a:rPr lang="en-US" altLang="ja-JP"/>
               <a:t>5 </a:t>
             </a:r>
             <a:r>
-              <a:rPr kumimoji="1" lang="ja-JP" altLang="en-US"/>
+              <a:rPr lang="ja-JP" altLang="en-US"/>
               <a:t>レベル</a:t>
             </a:r>
-          </a:p>
-        </p:txBody>
-      </p:sp>
-      <p:sp>
-        <p:nvSpPr>
-          <p:cNvPr id="5" name="テキスト プレースホルダー 4">
-            <a:extLst>
-              <a:ext uri="{FF2B5EF4-FFF2-40B4-BE49-F238E27FC236}">
-                <a16:creationId xmlns:a16="http://schemas.microsoft.com/office/drawing/2014/main" id="{64BAD40A-BD1A-C617-7DE6-0F600BA772CE}"/>
-              </a:ext>
-            </a:extLst>
-          </p:cNvPr>
+            <a:endParaRPr lang="en-US" dirty="0"/>
+          </a:p>
+        </p:txBody>
+      </p:sp>
+      <p:sp>
+        <p:nvSpPr>
+          <p:cNvPr id="5" name="Text Placeholder 4"/>
           <p:cNvSpPr>
             <a:spLocks noGrp="1"/>
           </p:cNvSpPr>
@@ -1921,7 +1725,7 @@
           <a:p>
             <a:pPr lvl="0"/>
             <a:r>
-              <a:rPr kumimoji="1" lang="ja-JP" altLang="en-US"/>
+              <a:rPr lang="ja-JP" altLang="en-US"/>
               <a:t>マスター テキストの書式設定</a:t>
             </a:r>
           </a:p>
@@ -1929,13 +1733,7 @@
       </p:sp>
       <p:sp>
         <p:nvSpPr>
-          <p:cNvPr id="6" name="コンテンツ プレースホルダー 5">
-            <a:extLst>
-              <a:ext uri="{FF2B5EF4-FFF2-40B4-BE49-F238E27FC236}">
-                <a16:creationId xmlns:a16="http://schemas.microsoft.com/office/drawing/2014/main" id="{AA7B71BD-0D6A-D17C-1492-10B860D2A541}"/>
-              </a:ext>
-            </a:extLst>
-          </p:cNvPr>
+          <p:cNvPr id="6" name="Content Placeholder 5"/>
           <p:cNvSpPr>
             <a:spLocks noGrp="1"/>
           </p:cNvSpPr>
@@ -1955,81 +1753,76 @@
           <a:p>
             <a:pPr lvl="0"/>
             <a:r>
-              <a:rPr kumimoji="1" lang="ja-JP" altLang="en-US"/>
+              <a:rPr lang="ja-JP" altLang="en-US"/>
               <a:t>マスター テキストの書式設定</a:t>
             </a:r>
           </a:p>
           <a:p>
             <a:pPr lvl="1"/>
             <a:r>
-              <a:rPr kumimoji="1" lang="ja-JP" altLang="en-US"/>
+              <a:rPr lang="ja-JP" altLang="en-US"/>
               <a:t>第 </a:t>
             </a:r>
             <a:r>
-              <a:rPr kumimoji="1" lang="en-US" altLang="ja-JP"/>
+              <a:rPr lang="en-US" altLang="ja-JP"/>
               <a:t>2 </a:t>
             </a:r>
             <a:r>
-              <a:rPr kumimoji="1" lang="ja-JP" altLang="en-US"/>
+              <a:rPr lang="ja-JP" altLang="en-US"/>
               <a:t>レベル</a:t>
             </a:r>
           </a:p>
           <a:p>
             <a:pPr lvl="2"/>
             <a:r>
-              <a:rPr kumimoji="1" lang="ja-JP" altLang="en-US"/>
+              <a:rPr lang="ja-JP" altLang="en-US"/>
               <a:t>第 </a:t>
             </a:r>
             <a:r>
-              <a:rPr kumimoji="1" lang="en-US" altLang="ja-JP"/>
+              <a:rPr lang="en-US" altLang="ja-JP"/>
               <a:t>3 </a:t>
             </a:r>
             <a:r>
-              <a:rPr kumimoji="1" lang="ja-JP" altLang="en-US"/>
+              <a:rPr lang="ja-JP" altLang="en-US"/>
               <a:t>レベル</a:t>
             </a:r>
           </a:p>
           <a:p>
             <a:pPr lvl="3"/>
             <a:r>
-              <a:rPr kumimoji="1" lang="ja-JP" altLang="en-US"/>
+              <a:rPr lang="ja-JP" altLang="en-US"/>
               <a:t>第 </a:t>
             </a:r>
             <a:r>
-              <a:rPr kumimoji="1" lang="en-US" altLang="ja-JP"/>
+              <a:rPr lang="en-US" altLang="ja-JP"/>
               <a:t>4 </a:t>
             </a:r>
             <a:r>
-              <a:rPr kumimoji="1" lang="ja-JP" altLang="en-US"/>
+              <a:rPr lang="ja-JP" altLang="en-US"/>
               <a:t>レベル</a:t>
             </a:r>
           </a:p>
           <a:p>
             <a:pPr lvl="4"/>
             <a:r>
-              <a:rPr kumimoji="1" lang="ja-JP" altLang="en-US"/>
+              <a:rPr lang="ja-JP" altLang="en-US"/>
               <a:t>第 </a:t>
             </a:r>
             <a:r>
-              <a:rPr kumimoji="1" lang="en-US" altLang="ja-JP"/>
+              <a:rPr lang="en-US" altLang="ja-JP"/>
               <a:t>5 </a:t>
             </a:r>
             <a:r>
-              <a:rPr kumimoji="1" lang="ja-JP" altLang="en-US"/>
+              <a:rPr lang="ja-JP" altLang="en-US"/>
               <a:t>レベル</a:t>
             </a:r>
-          </a:p>
-        </p:txBody>
-      </p:sp>
-      <p:sp>
-        <p:nvSpPr>
-          <p:cNvPr id="7" name="日付プレースホルダー 6">
-            <a:extLst>
-              <a:ext uri="{FF2B5EF4-FFF2-40B4-BE49-F238E27FC236}">
-                <a16:creationId xmlns:a16="http://schemas.microsoft.com/office/drawing/2014/main" id="{115C7572-5CB2-3BD6-B5B3-7D98DAE7857F}"/>
-              </a:ext>
-            </a:extLst>
-          </p:cNvPr>
+            <a:endParaRPr lang="en-US" dirty="0"/>
+          </a:p>
+        </p:txBody>
+      </p:sp>
+      <p:sp>
+        <p:nvSpPr>
+          <p:cNvPr id="7" name="Date Placeholder 6"/>
           <p:cNvSpPr>
             <a:spLocks noGrp="1"/>
           </p:cNvSpPr>
@@ -2052,13 +1845,7 @@
       </p:sp>
       <p:sp>
         <p:nvSpPr>
-          <p:cNvPr id="8" name="フッター プレースホルダー 7">
-            <a:extLst>
-              <a:ext uri="{FF2B5EF4-FFF2-40B4-BE49-F238E27FC236}">
-                <a16:creationId xmlns:a16="http://schemas.microsoft.com/office/drawing/2014/main" id="{AD727C18-937C-DB9E-88F0-59A205E234B2}"/>
-              </a:ext>
-            </a:extLst>
-          </p:cNvPr>
+          <p:cNvPr id="8" name="Footer Placeholder 7"/>
           <p:cNvSpPr>
             <a:spLocks noGrp="1"/>
           </p:cNvSpPr>
@@ -2077,13 +1864,7 @@
       </p:sp>
       <p:sp>
         <p:nvSpPr>
-          <p:cNvPr id="9" name="スライド番号プレースホルダー 8">
-            <a:extLst>
-              <a:ext uri="{FF2B5EF4-FFF2-40B4-BE49-F238E27FC236}">
-                <a16:creationId xmlns:a16="http://schemas.microsoft.com/office/drawing/2014/main" id="{B491D3E8-F8B1-8EC8-332E-534FC2B0EA68}"/>
-              </a:ext>
-            </a:extLst>
-          </p:cNvPr>
+          <p:cNvPr id="9" name="Slide Number Placeholder 8"/>
           <p:cNvSpPr>
             <a:spLocks noGrp="1"/>
           </p:cNvSpPr>
@@ -2107,7 +1888,7 @@
     </p:spTree>
     <p:extLst>
       <p:ext uri="{BB962C8B-B14F-4D97-AF65-F5344CB8AC3E}">
-        <p14:creationId xmlns:p14="http://schemas.microsoft.com/office/powerpoint/2010/main" val="2439140613"/>
+        <p14:creationId xmlns:p14="http://schemas.microsoft.com/office/powerpoint/2010/main" val="3767590261"/>
       </p:ext>
     </p:extLst>
   </p:cSld>
@@ -2136,13 +1917,7 @@
       </p:grpSpPr>
       <p:sp>
         <p:nvSpPr>
-          <p:cNvPr id="2" name="タイトル 1">
-            <a:extLst>
-              <a:ext uri="{FF2B5EF4-FFF2-40B4-BE49-F238E27FC236}">
-                <a16:creationId xmlns:a16="http://schemas.microsoft.com/office/drawing/2014/main" id="{CB09A82D-E0CD-4681-2C00-8DC3E202AC1A}"/>
-              </a:ext>
-            </a:extLst>
-          </p:cNvPr>
+          <p:cNvPr id="2" name="Title 1"/>
           <p:cNvSpPr>
             <a:spLocks noGrp="1"/>
           </p:cNvSpPr>
@@ -2156,21 +1931,16 @@
           <a:lstStyle/>
           <a:p>
             <a:r>
-              <a:rPr kumimoji="1" lang="ja-JP" altLang="en-US"/>
+              <a:rPr lang="ja-JP" altLang="en-US"/>
               <a:t>マスター タイトルの書式設定</a:t>
             </a:r>
-          </a:p>
-        </p:txBody>
-      </p:sp>
-      <p:sp>
-        <p:nvSpPr>
-          <p:cNvPr id="3" name="日付プレースホルダー 2">
-            <a:extLst>
-              <a:ext uri="{FF2B5EF4-FFF2-40B4-BE49-F238E27FC236}">
-                <a16:creationId xmlns:a16="http://schemas.microsoft.com/office/drawing/2014/main" id="{952CD855-B1D1-EDB9-B4C0-4EDC897D201D}"/>
-              </a:ext>
-            </a:extLst>
-          </p:cNvPr>
+            <a:endParaRPr lang="en-US" dirty="0"/>
+          </a:p>
+        </p:txBody>
+      </p:sp>
+      <p:sp>
+        <p:nvSpPr>
+          <p:cNvPr id="3" name="Date Placeholder 2"/>
           <p:cNvSpPr>
             <a:spLocks noGrp="1"/>
           </p:cNvSpPr>
@@ -2193,13 +1963,7 @@
       </p:sp>
       <p:sp>
         <p:nvSpPr>
-          <p:cNvPr id="4" name="フッター プレースホルダー 3">
-            <a:extLst>
-              <a:ext uri="{FF2B5EF4-FFF2-40B4-BE49-F238E27FC236}">
-                <a16:creationId xmlns:a16="http://schemas.microsoft.com/office/drawing/2014/main" id="{E42A7F51-E055-7950-D143-7A8A036E6439}"/>
-              </a:ext>
-            </a:extLst>
-          </p:cNvPr>
+          <p:cNvPr id="4" name="Footer Placeholder 3"/>
           <p:cNvSpPr>
             <a:spLocks noGrp="1"/>
           </p:cNvSpPr>
@@ -2218,13 +1982,7 @@
       </p:sp>
       <p:sp>
         <p:nvSpPr>
-          <p:cNvPr id="5" name="スライド番号プレースホルダー 4">
-            <a:extLst>
-              <a:ext uri="{FF2B5EF4-FFF2-40B4-BE49-F238E27FC236}">
-                <a16:creationId xmlns:a16="http://schemas.microsoft.com/office/drawing/2014/main" id="{0999D1C8-0AF3-93EA-17B4-983731DE0513}"/>
-              </a:ext>
-            </a:extLst>
-          </p:cNvPr>
+          <p:cNvPr id="5" name="Slide Number Placeholder 4"/>
           <p:cNvSpPr>
             <a:spLocks noGrp="1"/>
           </p:cNvSpPr>
@@ -2248,7 +2006,7 @@
     </p:spTree>
     <p:extLst>
       <p:ext uri="{BB962C8B-B14F-4D97-AF65-F5344CB8AC3E}">
-        <p14:creationId xmlns:p14="http://schemas.microsoft.com/office/powerpoint/2010/main" val="2185186473"/>
+        <p14:creationId xmlns:p14="http://schemas.microsoft.com/office/powerpoint/2010/main" val="694240694"/>
       </p:ext>
     </p:extLst>
   </p:cSld>
@@ -2277,13 +2035,7 @@
       </p:grpSpPr>
       <p:sp>
         <p:nvSpPr>
-          <p:cNvPr id="2" name="日付プレースホルダー 1">
-            <a:extLst>
-              <a:ext uri="{FF2B5EF4-FFF2-40B4-BE49-F238E27FC236}">
-                <a16:creationId xmlns:a16="http://schemas.microsoft.com/office/drawing/2014/main" id="{39280FE8-405A-A5D6-BAA5-630CDC816A3E}"/>
-              </a:ext>
-            </a:extLst>
-          </p:cNvPr>
+          <p:cNvPr id="2" name="Date Placeholder 1"/>
           <p:cNvSpPr>
             <a:spLocks noGrp="1"/>
           </p:cNvSpPr>
@@ -2306,13 +2058,7 @@
       </p:sp>
       <p:sp>
         <p:nvSpPr>
-          <p:cNvPr id="3" name="フッター プレースホルダー 2">
-            <a:extLst>
-              <a:ext uri="{FF2B5EF4-FFF2-40B4-BE49-F238E27FC236}">
-                <a16:creationId xmlns:a16="http://schemas.microsoft.com/office/drawing/2014/main" id="{6B9B2668-9227-47FA-A995-0824F2E6040E}"/>
-              </a:ext>
-            </a:extLst>
-          </p:cNvPr>
+          <p:cNvPr id="3" name="Footer Placeholder 2"/>
           <p:cNvSpPr>
             <a:spLocks noGrp="1"/>
           </p:cNvSpPr>
@@ -2331,13 +2077,7 @@
       </p:sp>
       <p:sp>
         <p:nvSpPr>
-          <p:cNvPr id="4" name="スライド番号プレースホルダー 3">
-            <a:extLst>
-              <a:ext uri="{FF2B5EF4-FFF2-40B4-BE49-F238E27FC236}">
-                <a16:creationId xmlns:a16="http://schemas.microsoft.com/office/drawing/2014/main" id="{7A6DA642-7F72-0189-2428-CF024DEE20E5}"/>
-              </a:ext>
-            </a:extLst>
-          </p:cNvPr>
+          <p:cNvPr id="4" name="Slide Number Placeholder 3"/>
           <p:cNvSpPr>
             <a:spLocks noGrp="1"/>
           </p:cNvSpPr>
@@ -2361,7 +2101,7 @@
     </p:spTree>
     <p:extLst>
       <p:ext uri="{BB962C8B-B14F-4D97-AF65-F5344CB8AC3E}">
-        <p14:creationId xmlns:p14="http://schemas.microsoft.com/office/powerpoint/2010/main" val="2124925333"/>
+        <p14:creationId xmlns:p14="http://schemas.microsoft.com/office/powerpoint/2010/main" val="4080469788"/>
       </p:ext>
     </p:extLst>
   </p:cSld>
@@ -2390,13 +2130,7 @@
       </p:grpSpPr>
       <p:sp>
         <p:nvSpPr>
-          <p:cNvPr id="2" name="タイトル 1">
-            <a:extLst>
-              <a:ext uri="{FF2B5EF4-FFF2-40B4-BE49-F238E27FC236}">
-                <a16:creationId xmlns:a16="http://schemas.microsoft.com/office/drawing/2014/main" id="{70A60B44-2F8D-A4F6-7501-3F08C17EAF58}"/>
-              </a:ext>
-            </a:extLst>
-          </p:cNvPr>
+          <p:cNvPr id="2" name="Title 1"/>
           <p:cNvSpPr>
             <a:spLocks noGrp="1"/>
           </p:cNvSpPr>
@@ -2419,21 +2153,16 @@
           </a:lstStyle>
           <a:p>
             <a:r>
-              <a:rPr kumimoji="1" lang="ja-JP" altLang="en-US"/>
+              <a:rPr lang="ja-JP" altLang="en-US"/>
               <a:t>マスター タイトルの書式設定</a:t>
             </a:r>
-          </a:p>
-        </p:txBody>
-      </p:sp>
-      <p:sp>
-        <p:nvSpPr>
-          <p:cNvPr id="3" name="コンテンツ プレースホルダー 2">
-            <a:extLst>
-              <a:ext uri="{FF2B5EF4-FFF2-40B4-BE49-F238E27FC236}">
-                <a16:creationId xmlns:a16="http://schemas.microsoft.com/office/drawing/2014/main" id="{4EE5CC1A-6DCF-17B0-FD2C-66AA0631938E}"/>
-              </a:ext>
-            </a:extLst>
-          </p:cNvPr>
+            <a:endParaRPr lang="en-US" dirty="0"/>
+          </a:p>
+        </p:txBody>
+      </p:sp>
+      <p:sp>
+        <p:nvSpPr>
+          <p:cNvPr id="3" name="Content Placeholder 2"/>
           <p:cNvSpPr>
             <a:spLocks noGrp="1"/>
           </p:cNvSpPr>
@@ -2481,81 +2210,76 @@
           <a:p>
             <a:pPr lvl="0"/>
             <a:r>
-              <a:rPr kumimoji="1" lang="ja-JP" altLang="en-US"/>
+              <a:rPr lang="ja-JP" altLang="en-US"/>
               <a:t>マスター テキストの書式設定</a:t>
             </a:r>
           </a:p>
           <a:p>
             <a:pPr lvl="1"/>
             <a:r>
-              <a:rPr kumimoji="1" lang="ja-JP" altLang="en-US"/>
+              <a:rPr lang="ja-JP" altLang="en-US"/>
               <a:t>第 </a:t>
             </a:r>
             <a:r>
-              <a:rPr kumimoji="1" lang="en-US" altLang="ja-JP"/>
+              <a:rPr lang="en-US" altLang="ja-JP"/>
               <a:t>2 </a:t>
             </a:r>
             <a:r>
-              <a:rPr kumimoji="1" lang="ja-JP" altLang="en-US"/>
+              <a:rPr lang="ja-JP" altLang="en-US"/>
               <a:t>レベル</a:t>
             </a:r>
           </a:p>
           <a:p>
             <a:pPr lvl="2"/>
             <a:r>
-              <a:rPr kumimoji="1" lang="ja-JP" altLang="en-US"/>
+              <a:rPr lang="ja-JP" altLang="en-US"/>
               <a:t>第 </a:t>
             </a:r>
             <a:r>
-              <a:rPr kumimoji="1" lang="en-US" altLang="ja-JP"/>
+              <a:rPr lang="en-US" altLang="ja-JP"/>
               <a:t>3 </a:t>
             </a:r>
             <a:r>
-              <a:rPr kumimoji="1" lang="ja-JP" altLang="en-US"/>
+              <a:rPr lang="ja-JP" altLang="en-US"/>
               <a:t>レベル</a:t>
             </a:r>
           </a:p>
           <a:p>
             <a:pPr lvl="3"/>
             <a:r>
-              <a:rPr kumimoji="1" lang="ja-JP" altLang="en-US"/>
+              <a:rPr lang="ja-JP" altLang="en-US"/>
               <a:t>第 </a:t>
             </a:r>
             <a:r>
-              <a:rPr kumimoji="1" lang="en-US" altLang="ja-JP"/>
+              <a:rPr lang="en-US" altLang="ja-JP"/>
               <a:t>4 </a:t>
             </a:r>
             <a:r>
-              <a:rPr kumimoji="1" lang="ja-JP" altLang="en-US"/>
+              <a:rPr lang="ja-JP" altLang="en-US"/>
               <a:t>レベル</a:t>
             </a:r>
           </a:p>
           <a:p>
             <a:pPr lvl="4"/>
             <a:r>
-              <a:rPr kumimoji="1" lang="ja-JP" altLang="en-US"/>
+              <a:rPr lang="ja-JP" altLang="en-US"/>
               <a:t>第 </a:t>
             </a:r>
             <a:r>
-              <a:rPr kumimoji="1" lang="en-US" altLang="ja-JP"/>
+              <a:rPr lang="en-US" altLang="ja-JP"/>
               <a:t>5 </a:t>
             </a:r>
             <a:r>
-              <a:rPr kumimoji="1" lang="ja-JP" altLang="en-US"/>
+              <a:rPr lang="ja-JP" altLang="en-US"/>
               <a:t>レベル</a:t>
             </a:r>
-          </a:p>
-        </p:txBody>
-      </p:sp>
-      <p:sp>
-        <p:nvSpPr>
-          <p:cNvPr id="4" name="テキスト プレースホルダー 3">
-            <a:extLst>
-              <a:ext uri="{FF2B5EF4-FFF2-40B4-BE49-F238E27FC236}">
-                <a16:creationId xmlns:a16="http://schemas.microsoft.com/office/drawing/2014/main" id="{60AD4EBB-8581-BE82-EA85-29CDD38EA061}"/>
-              </a:ext>
-            </a:extLst>
-          </p:cNvPr>
+            <a:endParaRPr lang="en-US" dirty="0"/>
+          </a:p>
+        </p:txBody>
+      </p:sp>
+      <p:sp>
+        <p:nvSpPr>
+          <p:cNvPr id="4" name="Text Placeholder 3"/>
           <p:cNvSpPr>
             <a:spLocks noGrp="1"/>
           </p:cNvSpPr>
@@ -2612,7 +2336,7 @@
           <a:p>
             <a:pPr lvl="0"/>
             <a:r>
-              <a:rPr kumimoji="1" lang="ja-JP" altLang="en-US"/>
+              <a:rPr lang="ja-JP" altLang="en-US"/>
               <a:t>マスター テキストの書式設定</a:t>
             </a:r>
           </a:p>
@@ -2620,13 +2344,7 @@
       </p:sp>
       <p:sp>
         <p:nvSpPr>
-          <p:cNvPr id="5" name="日付プレースホルダー 4">
-            <a:extLst>
-              <a:ext uri="{FF2B5EF4-FFF2-40B4-BE49-F238E27FC236}">
-                <a16:creationId xmlns:a16="http://schemas.microsoft.com/office/drawing/2014/main" id="{57C5F19C-C176-B85F-9A98-B4D1FCB3D070}"/>
-              </a:ext>
-            </a:extLst>
-          </p:cNvPr>
+          <p:cNvPr id="5" name="Date Placeholder 4"/>
           <p:cNvSpPr>
             <a:spLocks noGrp="1"/>
           </p:cNvSpPr>
@@ -2649,13 +2367,7 @@
       </p:sp>
       <p:sp>
         <p:nvSpPr>
-          <p:cNvPr id="6" name="フッター プレースホルダー 5">
-            <a:extLst>
-              <a:ext uri="{FF2B5EF4-FFF2-40B4-BE49-F238E27FC236}">
-                <a16:creationId xmlns:a16="http://schemas.microsoft.com/office/drawing/2014/main" id="{64A3035F-23B9-E06E-DD2C-49BE845C1A54}"/>
-              </a:ext>
-            </a:extLst>
-          </p:cNvPr>
+          <p:cNvPr id="6" name="Footer Placeholder 5"/>
           <p:cNvSpPr>
             <a:spLocks noGrp="1"/>
           </p:cNvSpPr>
@@ -2674,13 +2386,7 @@
       </p:sp>
       <p:sp>
         <p:nvSpPr>
-          <p:cNvPr id="7" name="スライド番号プレースホルダー 6">
-            <a:extLst>
-              <a:ext uri="{FF2B5EF4-FFF2-40B4-BE49-F238E27FC236}">
-                <a16:creationId xmlns:a16="http://schemas.microsoft.com/office/drawing/2014/main" id="{801740E4-80A5-4918-E5A1-82F76A8178BB}"/>
-              </a:ext>
-            </a:extLst>
-          </p:cNvPr>
+          <p:cNvPr id="7" name="Slide Number Placeholder 6"/>
           <p:cNvSpPr>
             <a:spLocks noGrp="1"/>
           </p:cNvSpPr>
@@ -2704,7 +2410,7 @@
     </p:spTree>
     <p:extLst>
       <p:ext uri="{BB962C8B-B14F-4D97-AF65-F5344CB8AC3E}">
-        <p14:creationId xmlns:p14="http://schemas.microsoft.com/office/powerpoint/2010/main" val="3214063056"/>
+        <p14:creationId xmlns:p14="http://schemas.microsoft.com/office/powerpoint/2010/main" val="3608894371"/>
       </p:ext>
     </p:extLst>
   </p:cSld>
@@ -2733,13 +2439,7 @@
       </p:grpSpPr>
       <p:sp>
         <p:nvSpPr>
-          <p:cNvPr id="2" name="タイトル 1">
-            <a:extLst>
-              <a:ext uri="{FF2B5EF4-FFF2-40B4-BE49-F238E27FC236}">
-                <a16:creationId xmlns:a16="http://schemas.microsoft.com/office/drawing/2014/main" id="{CBDC0EC4-0BE3-353A-F46C-CD2CDE0E8115}"/>
-              </a:ext>
-            </a:extLst>
-          </p:cNvPr>
+          <p:cNvPr id="2" name="Title 1"/>
           <p:cNvSpPr>
             <a:spLocks noGrp="1"/>
           </p:cNvSpPr>
@@ -2762,23 +2462,18 @@
           </a:lstStyle>
           <a:p>
             <a:r>
-              <a:rPr kumimoji="1" lang="ja-JP" altLang="en-US"/>
+              <a:rPr lang="ja-JP" altLang="en-US"/>
               <a:t>マスター タイトルの書式設定</a:t>
             </a:r>
-          </a:p>
-        </p:txBody>
-      </p:sp>
-      <p:sp>
-        <p:nvSpPr>
-          <p:cNvPr id="3" name="図プレースホルダー 2">
-            <a:extLst>
-              <a:ext uri="{FF2B5EF4-FFF2-40B4-BE49-F238E27FC236}">
-                <a16:creationId xmlns:a16="http://schemas.microsoft.com/office/drawing/2014/main" id="{51D88204-7E28-D388-1357-FAFB372F40B3}"/>
-              </a:ext>
-            </a:extLst>
-          </p:cNvPr>
-          <p:cNvSpPr>
-            <a:spLocks noGrp="1"/>
+            <a:endParaRPr lang="en-US" dirty="0"/>
+          </a:p>
+        </p:txBody>
+      </p:sp>
+      <p:sp>
+        <p:nvSpPr>
+          <p:cNvPr id="3" name="Picture Placeholder 2"/>
+          <p:cNvSpPr>
+            <a:spLocks noGrp="1" noChangeAspect="1"/>
           </p:cNvSpPr>
           <p:nvPr>
             <p:ph type="pic" idx="1"/>
@@ -2788,6 +2483,71 @@
           <a:xfrm>
             <a:off x="5183188" y="987425"/>
             <a:ext cx="6172200" cy="4873625"/>
+          </a:xfrm>
+        </p:spPr>
+        <p:txBody>
+          <a:bodyPr anchor="t"/>
+          <a:lstStyle>
+            <a:lvl1pPr marL="0" indent="0">
+              <a:buNone/>
+              <a:defRPr sz="3200"/>
+            </a:lvl1pPr>
+            <a:lvl2pPr marL="457200" indent="0">
+              <a:buNone/>
+              <a:defRPr sz="2800"/>
+            </a:lvl2pPr>
+            <a:lvl3pPr marL="914400" indent="0">
+              <a:buNone/>
+              <a:defRPr sz="2400"/>
+            </a:lvl3pPr>
+            <a:lvl4pPr marL="1371600" indent="0">
+              <a:buNone/>
+              <a:defRPr sz="2000"/>
+            </a:lvl4pPr>
+            <a:lvl5pPr marL="1828800" indent="0">
+              <a:buNone/>
+              <a:defRPr sz="2000"/>
+            </a:lvl5pPr>
+            <a:lvl6pPr marL="2286000" indent="0">
+              <a:buNone/>
+              <a:defRPr sz="2000"/>
+            </a:lvl6pPr>
+            <a:lvl7pPr marL="2743200" indent="0">
+              <a:buNone/>
+              <a:defRPr sz="2000"/>
+            </a:lvl7pPr>
+            <a:lvl8pPr marL="3200400" indent="0">
+              <a:buNone/>
+              <a:defRPr sz="2000"/>
+            </a:lvl8pPr>
+            <a:lvl9pPr marL="3657600" indent="0">
+              <a:buNone/>
+              <a:defRPr sz="2000"/>
+            </a:lvl9pPr>
+          </a:lstStyle>
+          <a:p>
+            <a:r>
+              <a:rPr lang="ja-JP" altLang="en-US"/>
+              <a:t>アイコンをクリックして図を追加</a:t>
+            </a:r>
+            <a:endParaRPr lang="en-US" dirty="0"/>
+          </a:p>
+        </p:txBody>
+      </p:sp>
+      <p:sp>
+        <p:nvSpPr>
+          <p:cNvPr id="4" name="Text Placeholder 3"/>
+          <p:cNvSpPr>
+            <a:spLocks noGrp="1"/>
+          </p:cNvSpPr>
+          <p:nvPr>
+            <p:ph type="body" sz="half" idx="2"/>
+          </p:nvPr>
+        </p:nvSpPr>
+        <p:spPr>
+          <a:xfrm>
+            <a:off x="839788" y="2057400"/>
+            <a:ext cx="3932237" cy="3811588"/>
           </a:xfrm>
         </p:spPr>
         <p:txBody>
@@ -2795,73 +2555,6 @@
           <a:lstStyle>
             <a:lvl1pPr marL="0" indent="0">
               <a:buNone/>
-              <a:defRPr sz="3200"/>
-            </a:lvl1pPr>
-            <a:lvl2pPr marL="457200" indent="0">
-              <a:buNone/>
-              <a:defRPr sz="2800"/>
-            </a:lvl2pPr>
-            <a:lvl3pPr marL="914400" indent="0">
-              <a:buNone/>
-              <a:defRPr sz="2400"/>
-            </a:lvl3pPr>
-            <a:lvl4pPr marL="1371600" indent="0">
-              <a:buNone/>
-              <a:defRPr sz="2000"/>
-            </a:lvl4pPr>
-            <a:lvl5pPr marL="1828800" indent="0">
-              <a:buNone/>
-              <a:defRPr sz="2000"/>
-            </a:lvl5pPr>
-            <a:lvl6pPr marL="2286000" indent="0">
-              <a:buNone/>
-              <a:defRPr sz="2000"/>
-            </a:lvl6pPr>
-            <a:lvl7pPr marL="2743200" indent="0">
-              <a:buNone/>
-              <a:defRPr sz="2000"/>
-            </a:lvl7pPr>
-            <a:lvl8pPr marL="3200400" indent="0">
-              <a:buNone/>
-              <a:defRPr sz="2000"/>
-            </a:lvl8pPr>
-            <a:lvl9pPr marL="3657600" indent="0">
-              <a:buNone/>
-              <a:defRPr sz="2000"/>
-            </a:lvl9pPr>
-          </a:lstStyle>
-          <a:p>
-            <a:endParaRPr kumimoji="1" lang="ja-JP" altLang="en-US"/>
-          </a:p>
-        </p:txBody>
-      </p:sp>
-      <p:sp>
-        <p:nvSpPr>
-          <p:cNvPr id="4" name="テキスト プレースホルダー 3">
-            <a:extLst>
-              <a:ext uri="{FF2B5EF4-FFF2-40B4-BE49-F238E27FC236}">
-                <a16:creationId xmlns:a16="http://schemas.microsoft.com/office/drawing/2014/main" id="{907EC2B4-8383-8334-8D2C-0456B485ED04}"/>
-              </a:ext>
-            </a:extLst>
-          </p:cNvPr>
-          <p:cNvSpPr>
-            <a:spLocks noGrp="1"/>
-          </p:cNvSpPr>
-          <p:nvPr>
-            <p:ph type="body" sz="half" idx="2"/>
-          </p:nvPr>
-        </p:nvSpPr>
-        <p:spPr>
-          <a:xfrm>
-            <a:off x="839788" y="2057400"/>
-            <a:ext cx="3932237" cy="3811588"/>
-          </a:xfrm>
-        </p:spPr>
-        <p:txBody>
-          <a:bodyPr/>
-          <a:lstStyle>
-            <a:lvl1pPr marL="0" indent="0">
-              <a:buNone/>
               <a:defRPr sz="1600"/>
             </a:lvl1pPr>
             <a:lvl2pPr marL="457200" indent="0">
@@ -2900,7 +2593,7 @@
           <a:p>
             <a:pPr lvl="0"/>
             <a:r>
-              <a:rPr kumimoji="1" lang="ja-JP" altLang="en-US"/>
+              <a:rPr lang="ja-JP" altLang="en-US"/>
               <a:t>マスター テキストの書式設定</a:t>
             </a:r>
           </a:p>
@@ -2908,13 +2601,7 @@
       </p:sp>
       <p:sp>
         <p:nvSpPr>
-          <p:cNvPr id="5" name="日付プレースホルダー 4">
-            <a:extLst>
-              <a:ext uri="{FF2B5EF4-FFF2-40B4-BE49-F238E27FC236}">
-                <a16:creationId xmlns:a16="http://schemas.microsoft.com/office/drawing/2014/main" id="{EA285F5C-4F18-67AF-E5C7-838C7E4946ED}"/>
-              </a:ext>
-            </a:extLst>
-          </p:cNvPr>
+          <p:cNvPr id="5" name="Date Placeholder 4"/>
           <p:cNvSpPr>
             <a:spLocks noGrp="1"/>
           </p:cNvSpPr>
@@ -2937,13 +2624,7 @@
       </p:sp>
       <p:sp>
         <p:nvSpPr>
-          <p:cNvPr id="6" name="フッター プレースホルダー 5">
-            <a:extLst>
-              <a:ext uri="{FF2B5EF4-FFF2-40B4-BE49-F238E27FC236}">
-                <a16:creationId xmlns:a16="http://schemas.microsoft.com/office/drawing/2014/main" id="{D003CCB2-2A11-A373-5E37-C6FFD0F26506}"/>
-              </a:ext>
-            </a:extLst>
-          </p:cNvPr>
+          <p:cNvPr id="6" name="Footer Placeholder 5"/>
           <p:cNvSpPr>
             <a:spLocks noGrp="1"/>
           </p:cNvSpPr>
@@ -2962,13 +2643,7 @@
       </p:sp>
       <p:sp>
         <p:nvSpPr>
-          <p:cNvPr id="7" name="スライド番号プレースホルダー 6">
-            <a:extLst>
-              <a:ext uri="{FF2B5EF4-FFF2-40B4-BE49-F238E27FC236}">
-                <a16:creationId xmlns:a16="http://schemas.microsoft.com/office/drawing/2014/main" id="{9A70E314-9B90-53C0-B5F8-8FD4F3AB19A1}"/>
-              </a:ext>
-            </a:extLst>
-          </p:cNvPr>
+          <p:cNvPr id="7" name="Slide Number Placeholder 6"/>
           <p:cNvSpPr>
             <a:spLocks noGrp="1"/>
           </p:cNvSpPr>
@@ -2992,7 +2667,7 @@
     </p:spTree>
     <p:extLst>
       <p:ext uri="{BB962C8B-B14F-4D97-AF65-F5344CB8AC3E}">
-        <p14:creationId xmlns:p14="http://schemas.microsoft.com/office/powerpoint/2010/main" val="979932060"/>
+        <p14:creationId xmlns:p14="http://schemas.microsoft.com/office/powerpoint/2010/main" val="3098822756"/>
       </p:ext>
     </p:extLst>
   </p:cSld>
@@ -3026,13 +2701,7 @@
       </p:grpSpPr>
       <p:sp>
         <p:nvSpPr>
-          <p:cNvPr id="2" name="タイトル プレースホルダー 1">
-            <a:extLst>
-              <a:ext uri="{FF2B5EF4-FFF2-40B4-BE49-F238E27FC236}">
-                <a16:creationId xmlns:a16="http://schemas.microsoft.com/office/drawing/2014/main" id="{213DE4DE-4427-BB2F-45B1-63E3B305530C}"/>
-              </a:ext>
-            </a:extLst>
-          </p:cNvPr>
+          <p:cNvPr id="2" name="Title Placeholder 1"/>
           <p:cNvSpPr>
             <a:spLocks noGrp="1"/>
           </p:cNvSpPr>
@@ -3056,21 +2725,16 @@
           <a:lstStyle/>
           <a:p>
             <a:r>
-              <a:rPr kumimoji="1" lang="ja-JP" altLang="en-US"/>
+              <a:rPr lang="ja-JP" altLang="en-US"/>
               <a:t>マスター タイトルの書式設定</a:t>
             </a:r>
-          </a:p>
-        </p:txBody>
-      </p:sp>
-      <p:sp>
-        <p:nvSpPr>
-          <p:cNvPr id="3" name="テキスト プレースホルダー 2">
-            <a:extLst>
-              <a:ext uri="{FF2B5EF4-FFF2-40B4-BE49-F238E27FC236}">
-                <a16:creationId xmlns:a16="http://schemas.microsoft.com/office/drawing/2014/main" id="{D3AF4DFB-604E-7EC7-4692-0E7B13C1A61A}"/>
-              </a:ext>
-            </a:extLst>
-          </p:cNvPr>
+            <a:endParaRPr lang="en-US" dirty="0"/>
+          </a:p>
+        </p:txBody>
+      </p:sp>
+      <p:sp>
+        <p:nvSpPr>
+          <p:cNvPr id="3" name="Text Placeholder 2"/>
           <p:cNvSpPr>
             <a:spLocks noGrp="1"/>
           </p:cNvSpPr>
@@ -3095,81 +2759,76 @@
           <a:p>
             <a:pPr lvl="0"/>
             <a:r>
-              <a:rPr kumimoji="1" lang="ja-JP" altLang="en-US"/>
+              <a:rPr lang="ja-JP" altLang="en-US"/>
               <a:t>マスター テキストの書式設定</a:t>
             </a:r>
           </a:p>
           <a:p>
             <a:pPr lvl="1"/>
             <a:r>
-              <a:rPr kumimoji="1" lang="ja-JP" altLang="en-US"/>
+              <a:rPr lang="ja-JP" altLang="en-US"/>
               <a:t>第 </a:t>
             </a:r>
             <a:r>
-              <a:rPr kumimoji="1" lang="en-US" altLang="ja-JP"/>
+              <a:rPr lang="en-US" altLang="ja-JP"/>
               <a:t>2 </a:t>
             </a:r>
             <a:r>
-              <a:rPr kumimoji="1" lang="ja-JP" altLang="en-US"/>
+              <a:rPr lang="ja-JP" altLang="en-US"/>
               <a:t>レベル</a:t>
             </a:r>
           </a:p>
           <a:p>
             <a:pPr lvl="2"/>
             <a:r>
-              <a:rPr kumimoji="1" lang="ja-JP" altLang="en-US"/>
+              <a:rPr lang="ja-JP" altLang="en-US"/>
               <a:t>第 </a:t>
             </a:r>
             <a:r>
-              <a:rPr kumimoji="1" lang="en-US" altLang="ja-JP"/>
+              <a:rPr lang="en-US" altLang="ja-JP"/>
               <a:t>3 </a:t>
             </a:r>
             <a:r>
-              <a:rPr kumimoji="1" lang="ja-JP" altLang="en-US"/>
+              <a:rPr lang="ja-JP" altLang="en-US"/>
               <a:t>レベル</a:t>
             </a:r>
           </a:p>
           <a:p>
             <a:pPr lvl="3"/>
             <a:r>
-              <a:rPr kumimoji="1" lang="ja-JP" altLang="en-US"/>
+              <a:rPr lang="ja-JP" altLang="en-US"/>
               <a:t>第 </a:t>
             </a:r>
             <a:r>
-              <a:rPr kumimoji="1" lang="en-US" altLang="ja-JP"/>
+              <a:rPr lang="en-US" altLang="ja-JP"/>
               <a:t>4 </a:t>
             </a:r>
             <a:r>
-              <a:rPr kumimoji="1" lang="ja-JP" altLang="en-US"/>
+              <a:rPr lang="ja-JP" altLang="en-US"/>
               <a:t>レベル</a:t>
             </a:r>
           </a:p>
           <a:p>
             <a:pPr lvl="4"/>
             <a:r>
-              <a:rPr kumimoji="1" lang="ja-JP" altLang="en-US"/>
+              <a:rPr lang="ja-JP" altLang="en-US"/>
               <a:t>第 </a:t>
             </a:r>
             <a:r>
-              <a:rPr kumimoji="1" lang="en-US" altLang="ja-JP"/>
+              <a:rPr lang="en-US" altLang="ja-JP"/>
               <a:t>5 </a:t>
             </a:r>
             <a:r>
-              <a:rPr kumimoji="1" lang="ja-JP" altLang="en-US"/>
+              <a:rPr lang="ja-JP" altLang="en-US"/>
               <a:t>レベル</a:t>
             </a:r>
-          </a:p>
-        </p:txBody>
-      </p:sp>
-      <p:sp>
-        <p:nvSpPr>
-          <p:cNvPr id="4" name="日付プレースホルダー 3">
-            <a:extLst>
-              <a:ext uri="{FF2B5EF4-FFF2-40B4-BE49-F238E27FC236}">
-                <a16:creationId xmlns:a16="http://schemas.microsoft.com/office/drawing/2014/main" id="{B3070D7C-E012-06B5-8FE8-72099D6AE099}"/>
-              </a:ext>
-            </a:extLst>
-          </p:cNvPr>
+            <a:endParaRPr lang="en-US" dirty="0"/>
+          </a:p>
+        </p:txBody>
+      </p:sp>
+      <p:sp>
+        <p:nvSpPr>
+          <p:cNvPr id="4" name="Date Placeholder 3"/>
           <p:cNvSpPr>
             <a:spLocks noGrp="1"/>
           </p:cNvSpPr>
@@ -3193,7 +2852,7 @@
               <a:defRPr sz="1200">
                 <a:solidFill>
                   <a:schemeClr val="tx1">
-                    <a:tint val="82000"/>
+                    <a:shade val="82000"/>
                   </a:schemeClr>
                 </a:solidFill>
               </a:defRPr>
@@ -3210,13 +2869,7 @@
       </p:sp>
       <p:sp>
         <p:nvSpPr>
-          <p:cNvPr id="5" name="フッター プレースホルダー 4">
-            <a:extLst>
-              <a:ext uri="{FF2B5EF4-FFF2-40B4-BE49-F238E27FC236}">
-                <a16:creationId xmlns:a16="http://schemas.microsoft.com/office/drawing/2014/main" id="{A53D454F-08C5-38DD-6198-984D9B7AA251}"/>
-              </a:ext>
-            </a:extLst>
-          </p:cNvPr>
+          <p:cNvPr id="5" name="Footer Placeholder 4"/>
           <p:cNvSpPr>
             <a:spLocks noGrp="1"/>
           </p:cNvSpPr>
@@ -3240,7 +2893,7 @@
               <a:defRPr sz="1200">
                 <a:solidFill>
                   <a:schemeClr val="tx1">
-                    <a:tint val="82000"/>
+                    <a:shade val="82000"/>
                   </a:schemeClr>
                 </a:solidFill>
               </a:defRPr>
@@ -3253,13 +2906,7 @@
       </p:sp>
       <p:sp>
         <p:nvSpPr>
-          <p:cNvPr id="6" name="スライド番号プレースホルダー 5">
-            <a:extLst>
-              <a:ext uri="{FF2B5EF4-FFF2-40B4-BE49-F238E27FC236}">
-                <a16:creationId xmlns:a16="http://schemas.microsoft.com/office/drawing/2014/main" id="{F8EC3090-440A-74BC-65D4-E2A24727AA91}"/>
-              </a:ext>
-            </a:extLst>
-          </p:cNvPr>
+          <p:cNvPr id="6" name="Slide Number Placeholder 5"/>
           <p:cNvSpPr>
             <a:spLocks noGrp="1"/>
           </p:cNvSpPr>
@@ -3283,7 +2930,7 @@
               <a:defRPr sz="1200">
                 <a:solidFill>
                   <a:schemeClr val="tx1">
-                    <a:tint val="82000"/>
+                    <a:shade val="82000"/>
                   </a:schemeClr>
                 </a:solidFill>
               </a:defRPr>
@@ -3301,23 +2948,23 @@
     </p:spTree>
     <p:extLst>
       <p:ext uri="{BB962C8B-B14F-4D97-AF65-F5344CB8AC3E}">
-        <p14:creationId xmlns:p14="http://schemas.microsoft.com/office/powerpoint/2010/main" val="1377233191"/>
+        <p14:creationId xmlns:p14="http://schemas.microsoft.com/office/powerpoint/2010/main" val="3275136393"/>
       </p:ext>
     </p:extLst>
   </p:cSld>
-  <p:clrMap bg1="lt1" tx1="dk1" bg2="lt2" tx2="dk2" accent1="accent1" accent2="accent2" accent3="accent3" accent4="accent4" accent5="accent5" accent6="accent6" hlink="hlink" folHlink="folHlink"/>
+  <p:clrMap bg1="dk1" tx1="lt1" bg2="dk2" tx2="lt2" accent1="accent1" accent2="accent2" accent3="accent3" accent4="accent4" accent5="accent5" accent6="accent6" hlink="hlink" folHlink="folHlink"/>
   <p:sldLayoutIdLst>
-    <p:sldLayoutId id="2147483649" r:id="rId1"/>
-    <p:sldLayoutId id="2147483650" r:id="rId2"/>
-    <p:sldLayoutId id="2147483651" r:id="rId3"/>
-    <p:sldLayoutId id="2147483652" r:id="rId4"/>
-    <p:sldLayoutId id="2147483653" r:id="rId5"/>
-    <p:sldLayoutId id="2147483654" r:id="rId6"/>
-    <p:sldLayoutId id="2147483655" r:id="rId7"/>
-    <p:sldLayoutId id="2147483656" r:id="rId8"/>
-    <p:sldLayoutId id="2147483657" r:id="rId9"/>
-    <p:sldLayoutId id="2147483658" r:id="rId10"/>
-    <p:sldLayoutId id="2147483659" r:id="rId11"/>
+    <p:sldLayoutId id="2147483661" r:id="rId1"/>
+    <p:sldLayoutId id="2147483662" r:id="rId2"/>
+    <p:sldLayoutId id="2147483663" r:id="rId3"/>
+    <p:sldLayoutId id="2147483664" r:id="rId4"/>
+    <p:sldLayoutId id="2147483665" r:id="rId5"/>
+    <p:sldLayoutId id="2147483666" r:id="rId6"/>
+    <p:sldLayoutId id="2147483667" r:id="rId7"/>
+    <p:sldLayoutId id="2147483668" r:id="rId8"/>
+    <p:sldLayoutId id="2147483669" r:id="rId9"/>
+    <p:sldLayoutId id="2147483670" r:id="rId10"/>
+    <p:sldLayoutId id="2147483671" r:id="rId11"/>
   </p:sldLayoutIdLst>
   <p:txStyles>
     <p:titleStyle>
@@ -3505,7 +3152,7 @@
     </p:bodyStyle>
     <p:otherStyle>
       <a:defPPr>
-        <a:defRPr lang="ja-JP"/>
+        <a:defRPr lang="en-US"/>
       </a:defPPr>
       <a:lvl1pPr marL="0" algn="l" defTabSz="914400" rtl="0" eaLnBrk="1" latinLnBrk="0" hangingPunct="1">
         <a:defRPr kumimoji="1" sz="1800" kern="1200">
@@ -3605,6 +3252,14 @@
 <file path=ppt/slides/slide1.xml><?xml version="1.0" encoding="utf-8"?>
 <p:sld xmlns:a="http://schemas.openxmlformats.org/drawingml/2006/main" xmlns:r="http://schemas.openxmlformats.org/officeDocument/2006/relationships" xmlns:p="http://schemas.openxmlformats.org/presentationml/2006/main">
   <p:cSld>
+    <p:bg>
+      <p:bgPr>
+        <a:solidFill>
+          <a:schemeClr val="bg1"/>
+        </a:solidFill>
+        <a:effectLst/>
+      </p:bgPr>
+    </p:bg>
     <p:spTree>
       <p:nvGrpSpPr>
         <p:cNvPr id="1" name=""/>
@@ -3621,6 +3276,102 @@
       </p:grpSpPr>
       <p:sp>
         <p:nvSpPr>
+          <p:cNvPr id="18" name="Rectangle 17">
+            <a:extLst>
+              <a:ext uri="{FF2B5EF4-FFF2-40B4-BE49-F238E27FC236}">
+                <a16:creationId xmlns:a16="http://schemas.microsoft.com/office/drawing/2014/main" id="{657F69E0-C4B0-4BEC-A689-4F8D877F05D4}"/>
+              </a:ext>
+              <a:ext uri="{C183D7F6-B498-43B3-948B-1728B52AA6E4}">
+                <adec:decorative xmlns:adec="http://schemas.microsoft.com/office/drawing/2017/decorative" val="1"/>
+              </a:ext>
+            </a:extLst>
+          </p:cNvPr>
+          <p:cNvSpPr>
+            <a:spLocks noGrp="1" noRot="1" noChangeAspect="1" noMove="1" noResize="1" noEditPoints="1" noAdjustHandles="1" noChangeArrowheads="1" noChangeShapeType="1" noTextEdit="1"/>
+          </p:cNvSpPr>
+          <p:nvPr>
+            <p:extLst>
+              <p:ext uri="{386F3935-93C4-4BCD-93E2-E3B085C9AB24}">
+                <p16:designElem xmlns:p16="http://schemas.microsoft.com/office/powerpoint/2015/main" val="1"/>
+              </p:ext>
+            </p:extLst>
+          </p:nvPr>
+        </p:nvSpPr>
+        <p:spPr>
+          <a:xfrm>
+            <a:off x="0" y="0"/>
+            <a:ext cx="12188952" cy="6858000"/>
+          </a:xfrm>
+          <a:prstGeom prst="rect">
+            <a:avLst/>
+          </a:prstGeom>
+          <a:solidFill>
+            <a:schemeClr val="tx1"/>
+          </a:solidFill>
+          <a:ln>
+            <a:noFill/>
+          </a:ln>
+        </p:spPr>
+        <p:style>
+          <a:lnRef idx="2">
+            <a:schemeClr val="accent1">
+              <a:shade val="50000"/>
+            </a:schemeClr>
+          </a:lnRef>
+          <a:fillRef idx="1">
+            <a:schemeClr val="accent1"/>
+          </a:fillRef>
+          <a:effectRef idx="0">
+            <a:schemeClr val="accent1"/>
+          </a:effectRef>
+          <a:fontRef idx="minor">
+            <a:schemeClr val="lt1"/>
+          </a:fontRef>
+        </p:style>
+        <p:txBody>
+          <a:bodyPr rtlCol="0" anchor="ctr"/>
+          <a:lstStyle/>
+          <a:p>
+            <a:pPr algn="ctr"/>
+            <a:endParaRPr lang="en-US"/>
+          </a:p>
+        </p:txBody>
+      </p:sp>
+      <p:pic>
+        <p:nvPicPr>
+          <p:cNvPr id="5" name="Picture 4" descr="金属の剣と盾">
+            <a:extLst>
+              <a:ext uri="{FF2B5EF4-FFF2-40B4-BE49-F238E27FC236}">
+                <a16:creationId xmlns:a16="http://schemas.microsoft.com/office/drawing/2014/main" id="{E3268B8B-8A1B-2341-F85C-EE2F47D59890}"/>
+              </a:ext>
+            </a:extLst>
+          </p:cNvPr>
+          <p:cNvPicPr>
+            <a:picLocks noChangeAspect="1"/>
+          </p:cNvPicPr>
+          <p:nvPr/>
+        </p:nvPicPr>
+        <p:blipFill>
+          <a:blip r:embed="rId2">
+            <a:alphaModFix amt="50000"/>
+          </a:blip>
+          <a:srcRect t="13432" r="-1" b="1960"/>
+          <a:stretch>
+            <a:fillRect/>
+          </a:stretch>
+        </p:blipFill>
+        <p:spPr>
+          <a:xfrm>
+            <a:off x="20" y="10"/>
+            <a:ext cx="12188930" cy="6857990"/>
+          </a:xfrm>
+          <a:prstGeom prst="rect">
+            <a:avLst/>
+          </a:prstGeom>
+        </p:spPr>
+      </p:pic>
+      <p:sp>
+        <p:nvSpPr>
           <p:cNvPr id="2" name="タイトル 1">
             <a:extLst>
               <a:ext uri="{FF2B5EF4-FFF2-40B4-BE49-F238E27FC236}">
@@ -3635,16 +3386,31 @@
             <p:ph type="ctrTitle"/>
           </p:nvPr>
         </p:nvSpPr>
-        <p:spPr/>
-        <p:txBody>
-          <a:bodyPr/>
-          <a:lstStyle/>
-          <a:p>
-            <a:r>
-              <a:rPr kumimoji="1" lang="en-US" altLang="ja-JP" dirty="0"/>
+        <p:spPr>
+          <a:xfrm>
+            <a:off x="1522476" y="365760"/>
+            <a:ext cx="9144000" cy="3063240"/>
+          </a:xfrm>
+        </p:spPr>
+        <p:txBody>
+          <a:bodyPr>
+            <a:normAutofit/>
+          </a:bodyPr>
+          <a:lstStyle/>
+          <a:p>
+            <a:r>
+              <a:rPr kumimoji="1" lang="en-US" altLang="ja-JP" sz="6600" dirty="0">
+                <a:solidFill>
+                  <a:schemeClr val="bg1"/>
+                </a:solidFill>
+              </a:rPr>
               <a:t>Iron Sword</a:t>
             </a:r>
-            <a:endParaRPr kumimoji="1" lang="ja-JP" altLang="en-US" dirty="0"/>
+            <a:endParaRPr kumimoji="1" lang="ja-JP" altLang="en-US" sz="6600" dirty="0">
+              <a:solidFill>
+                <a:schemeClr val="bg1"/>
+              </a:solidFill>
+            </a:endParaRPr>
           </a:p>
         </p:txBody>
       </p:sp>
@@ -3664,52 +3430,457 @@
             <p:ph type="subTitle" idx="1"/>
           </p:nvPr>
         </p:nvSpPr>
-        <p:spPr/>
-        <p:txBody>
-          <a:bodyPr/>
-          <a:lstStyle/>
-          <a:p>
-            <a:r>
-              <a:rPr lang="ja-JP" altLang="en-US" dirty="0"/>
+        <p:spPr>
+          <a:xfrm>
+            <a:off x="1527048" y="4599432"/>
+            <a:ext cx="9144000" cy="1536192"/>
+          </a:xfrm>
+        </p:spPr>
+        <p:txBody>
+          <a:bodyPr>
+            <a:normAutofit/>
+          </a:bodyPr>
+          <a:lstStyle/>
+          <a:p>
+            <a:endParaRPr lang="en-US" altLang="ja-JP" sz="1900">
+              <a:solidFill>
+                <a:schemeClr val="bg1"/>
+              </a:solidFill>
+            </a:endParaRPr>
+          </a:p>
+          <a:p>
+            <a:r>
+              <a:rPr lang="ja-JP" altLang="en-US" sz="1900">
+                <a:solidFill>
+                  <a:schemeClr val="bg1"/>
+                </a:solidFill>
+              </a:rPr>
               <a:t>ジャンル：</a:t>
             </a:r>
             <a:r>
-              <a:rPr lang="en-US" altLang="ja-JP" dirty="0"/>
+              <a:rPr lang="en-US" altLang="ja-JP" sz="1900">
+                <a:solidFill>
+                  <a:schemeClr val="bg1"/>
+                </a:solidFill>
+              </a:rPr>
               <a:t>3D</a:t>
             </a:r>
             <a:r>
-              <a:rPr lang="ja-JP" altLang="en-US" dirty="0"/>
+              <a:rPr lang="ja-JP" altLang="en-US" sz="1900">
+                <a:solidFill>
+                  <a:schemeClr val="bg1"/>
+                </a:solidFill>
+              </a:rPr>
               <a:t>アクション</a:t>
             </a:r>
-            <a:endParaRPr lang="en-US" altLang="ja-JP" dirty="0"/>
-          </a:p>
-          <a:p>
-            <a:r>
-              <a:rPr lang="ja-JP" altLang="en-US" dirty="0"/>
+            <a:endParaRPr lang="en-US" altLang="ja-JP" sz="1900">
+              <a:solidFill>
+                <a:schemeClr val="bg1"/>
+              </a:solidFill>
+            </a:endParaRPr>
+          </a:p>
+          <a:p>
+            <a:r>
+              <a:rPr lang="ja-JP" altLang="en-US" sz="1900">
+                <a:solidFill>
+                  <a:schemeClr val="bg1"/>
+                </a:solidFill>
+              </a:rPr>
               <a:t>プレイ人数：</a:t>
             </a:r>
             <a:r>
-              <a:rPr lang="en-US" altLang="ja-JP" dirty="0"/>
+              <a:rPr lang="en-US" altLang="ja-JP" sz="1900">
+                <a:solidFill>
+                  <a:schemeClr val="bg1"/>
+                </a:solidFill>
+              </a:rPr>
               <a:t>1</a:t>
             </a:r>
             <a:r>
-              <a:rPr lang="ja-JP" altLang="en-US" dirty="0"/>
+              <a:rPr lang="ja-JP" altLang="en-US" sz="1900">
+                <a:solidFill>
+                  <a:schemeClr val="bg1"/>
+                </a:solidFill>
+              </a:rPr>
               <a:t>人</a:t>
             </a:r>
-            <a:endParaRPr lang="en-US" altLang="ja-JP" dirty="0"/>
-          </a:p>
-          <a:p>
-            <a:r>
-              <a:rPr kumimoji="1" lang="ja-JP" altLang="en-US" dirty="0"/>
+            <a:endParaRPr lang="en-US" altLang="ja-JP" sz="1900">
+              <a:solidFill>
+                <a:schemeClr val="bg1"/>
+              </a:solidFill>
+            </a:endParaRPr>
+          </a:p>
+          <a:p>
+            <a:r>
+              <a:rPr kumimoji="1" lang="ja-JP" altLang="en-US" sz="1900">
+                <a:solidFill>
+                  <a:schemeClr val="bg1"/>
+                </a:solidFill>
+              </a:rPr>
               <a:t>プラットフォーム：</a:t>
             </a:r>
             <a:r>
-              <a:rPr kumimoji="1" lang="en-US" altLang="ja-JP" dirty="0"/>
+              <a:rPr kumimoji="1" lang="en-US" altLang="ja-JP" sz="1900">
+                <a:solidFill>
+                  <a:schemeClr val="bg1"/>
+                </a:solidFill>
+              </a:rPr>
               <a:t>Windows</a:t>
             </a:r>
           </a:p>
           <a:p>
-            <a:endParaRPr kumimoji="1" lang="ja-JP" altLang="en-US" dirty="0"/>
+            <a:endParaRPr kumimoji="1" lang="ja-JP" altLang="en-US" sz="1900">
+              <a:solidFill>
+                <a:schemeClr val="bg1"/>
+              </a:solidFill>
+            </a:endParaRPr>
+          </a:p>
+        </p:txBody>
+      </p:sp>
+      <p:sp>
+        <p:nvSpPr>
+          <p:cNvPr id="20" name="sketchy line">
+            <a:extLst>
+              <a:ext uri="{FF2B5EF4-FFF2-40B4-BE49-F238E27FC236}">
+                <a16:creationId xmlns:a16="http://schemas.microsoft.com/office/drawing/2014/main" id="{9F6380B4-6A1C-481E-8408-B4E6C75B9B81}"/>
+              </a:ext>
+              <a:ext uri="{C183D7F6-B498-43B3-948B-1728B52AA6E4}">
+                <adec:decorative xmlns:adec="http://schemas.microsoft.com/office/drawing/2017/decorative" val="1"/>
+              </a:ext>
+            </a:extLst>
+          </p:cNvPr>
+          <p:cNvSpPr>
+            <a:spLocks noGrp="1" noRot="1" noChangeAspect="1" noMove="1" noResize="1" noEditPoints="1" noAdjustHandles="1" noChangeArrowheads="1" noChangeShapeType="1" noTextEdit="1"/>
+          </p:cNvSpPr>
+          <p:nvPr>
+            <p:extLst>
+              <p:ext uri="{386F3935-93C4-4BCD-93E2-E3B085C9AB24}">
+                <p16:designElem xmlns:p16="http://schemas.microsoft.com/office/powerpoint/2015/main" val="1"/>
+              </p:ext>
+            </p:extLst>
+          </p:nvPr>
+        </p:nvSpPr>
+        <p:spPr>
+          <a:xfrm>
+            <a:off x="3974206" y="4368623"/>
+            <a:ext cx="4243589" cy="18288"/>
+          </a:xfrm>
+          <a:custGeom>
+            <a:avLst/>
+            <a:gdLst>
+              <a:gd name="csX0" fmla="*/ 0 w 4243589"/>
+              <a:gd name="csY0" fmla="*/ 0 h 18288"/>
+              <a:gd name="csX1" fmla="*/ 478919 w 4243589"/>
+              <a:gd name="csY1" fmla="*/ 0 h 18288"/>
+              <a:gd name="csX2" fmla="*/ 957839 w 4243589"/>
+              <a:gd name="csY2" fmla="*/ 0 h 18288"/>
+              <a:gd name="csX3" fmla="*/ 1521630 w 4243589"/>
+              <a:gd name="csY3" fmla="*/ 0 h 18288"/>
+              <a:gd name="csX4" fmla="*/ 2212729 w 4243589"/>
+              <a:gd name="csY4" fmla="*/ 0 h 18288"/>
+              <a:gd name="csX5" fmla="*/ 2734084 w 4243589"/>
+              <a:gd name="csY5" fmla="*/ 0 h 18288"/>
+              <a:gd name="csX6" fmla="*/ 3255439 w 4243589"/>
+              <a:gd name="csY6" fmla="*/ 0 h 18288"/>
+              <a:gd name="csX7" fmla="*/ 4243589 w 4243589"/>
+              <a:gd name="csY7" fmla="*/ 0 h 18288"/>
+              <a:gd name="csX8" fmla="*/ 4243589 w 4243589"/>
+              <a:gd name="csY8" fmla="*/ 18288 h 18288"/>
+              <a:gd name="csX9" fmla="*/ 3594926 w 4243589"/>
+              <a:gd name="csY9" fmla="*/ 18288 h 18288"/>
+              <a:gd name="csX10" fmla="*/ 3073571 w 4243589"/>
+              <a:gd name="csY10" fmla="*/ 18288 h 18288"/>
+              <a:gd name="csX11" fmla="*/ 2552216 w 4243589"/>
+              <a:gd name="csY11" fmla="*/ 18288 h 18288"/>
+              <a:gd name="csX12" fmla="*/ 1903553 w 4243589"/>
+              <a:gd name="csY12" fmla="*/ 18288 h 18288"/>
+              <a:gd name="csX13" fmla="*/ 1212454 w 4243589"/>
+              <a:gd name="csY13" fmla="*/ 18288 h 18288"/>
+              <a:gd name="csX14" fmla="*/ 733535 w 4243589"/>
+              <a:gd name="csY14" fmla="*/ 18288 h 18288"/>
+              <a:gd name="csX15" fmla="*/ 0 w 4243589"/>
+              <a:gd name="csY15" fmla="*/ 18288 h 18288"/>
+              <a:gd name="csX16" fmla="*/ 0 w 4243589"/>
+              <a:gd name="csY16" fmla="*/ 0 h 18288"/>
+            </a:gdLst>
+            <a:ahLst/>
+            <a:cxnLst>
+              <a:cxn ang="0">
+                <a:pos x="csX0" y="csY0"/>
+              </a:cxn>
+              <a:cxn ang="0">
+                <a:pos x="csX1" y="csY1"/>
+              </a:cxn>
+              <a:cxn ang="0">
+                <a:pos x="csX2" y="csY2"/>
+              </a:cxn>
+              <a:cxn ang="0">
+                <a:pos x="csX3" y="csY3"/>
+              </a:cxn>
+              <a:cxn ang="0">
+                <a:pos x="csX4" y="csY4"/>
+              </a:cxn>
+              <a:cxn ang="0">
+                <a:pos x="csX5" y="csY5"/>
+              </a:cxn>
+              <a:cxn ang="0">
+                <a:pos x="csX6" y="csY6"/>
+              </a:cxn>
+              <a:cxn ang="0">
+                <a:pos x="csX7" y="csY7"/>
+              </a:cxn>
+              <a:cxn ang="0">
+                <a:pos x="csX8" y="csY8"/>
+              </a:cxn>
+              <a:cxn ang="0">
+                <a:pos x="csX9" y="csY9"/>
+              </a:cxn>
+              <a:cxn ang="0">
+                <a:pos x="csX10" y="csY10"/>
+              </a:cxn>
+              <a:cxn ang="0">
+                <a:pos x="csX11" y="csY11"/>
+              </a:cxn>
+              <a:cxn ang="0">
+                <a:pos x="csX12" y="csY12"/>
+              </a:cxn>
+              <a:cxn ang="0">
+                <a:pos x="csX13" y="csY13"/>
+              </a:cxn>
+              <a:cxn ang="0">
+                <a:pos x="csX14" y="csY14"/>
+              </a:cxn>
+              <a:cxn ang="0">
+                <a:pos x="csX15" y="csY15"/>
+              </a:cxn>
+              <a:cxn ang="0">
+                <a:pos x="csX16" y="csY16"/>
+              </a:cxn>
+            </a:cxnLst>
+            <a:rect l="l" t="t" r="r" b="b"/>
+            <a:pathLst>
+              <a:path w="4243589" h="18288" fill="none" extrusionOk="0">
+                <a:moveTo>
+                  <a:pt x="0" y="0"/>
+                </a:moveTo>
+                <a:cubicBezTo>
+                  <a:pt x="213395" y="-21006"/>
+                  <a:pt x="307421" y="-18116"/>
+                  <a:pt x="478919" y="0"/>
+                </a:cubicBezTo>
+                <a:cubicBezTo>
+                  <a:pt x="650417" y="18116"/>
+                  <a:pt x="831092" y="-21237"/>
+                  <a:pt x="957839" y="0"/>
+                </a:cubicBezTo>
+                <a:cubicBezTo>
+                  <a:pt x="1084586" y="21237"/>
+                  <a:pt x="1301682" y="25124"/>
+                  <a:pt x="1521630" y="0"/>
+                </a:cubicBezTo>
+                <a:cubicBezTo>
+                  <a:pt x="1741578" y="-25124"/>
+                  <a:pt x="1970269" y="-29139"/>
+                  <a:pt x="2212729" y="0"/>
+                </a:cubicBezTo>
+                <a:cubicBezTo>
+                  <a:pt x="2455189" y="29139"/>
+                  <a:pt x="2558847" y="-4796"/>
+                  <a:pt x="2734084" y="0"/>
+                </a:cubicBezTo>
+                <a:cubicBezTo>
+                  <a:pt x="2909321" y="4796"/>
+                  <a:pt x="3097217" y="-13409"/>
+                  <a:pt x="3255439" y="0"/>
+                </a:cubicBezTo>
+                <a:cubicBezTo>
+                  <a:pt x="3413662" y="13409"/>
+                  <a:pt x="3979999" y="-10121"/>
+                  <a:pt x="4243589" y="0"/>
+                </a:cubicBezTo>
+                <a:cubicBezTo>
+                  <a:pt x="4244484" y="8974"/>
+                  <a:pt x="4243043" y="9359"/>
+                  <a:pt x="4243589" y="18288"/>
+                </a:cubicBezTo>
+                <a:cubicBezTo>
+                  <a:pt x="4058777" y="31246"/>
+                  <a:pt x="3910348" y="3158"/>
+                  <a:pt x="3594926" y="18288"/>
+                </a:cubicBezTo>
+                <a:cubicBezTo>
+                  <a:pt x="3279504" y="33418"/>
+                  <a:pt x="3319955" y="-3977"/>
+                  <a:pt x="3073571" y="18288"/>
+                </a:cubicBezTo>
+                <a:cubicBezTo>
+                  <a:pt x="2827187" y="40553"/>
+                  <a:pt x="2767387" y="1863"/>
+                  <a:pt x="2552216" y="18288"/>
+                </a:cubicBezTo>
+                <a:cubicBezTo>
+                  <a:pt x="2337046" y="34713"/>
+                  <a:pt x="2181871" y="19527"/>
+                  <a:pt x="1903553" y="18288"/>
+                </a:cubicBezTo>
+                <a:cubicBezTo>
+                  <a:pt x="1625235" y="17049"/>
+                  <a:pt x="1557672" y="24174"/>
+                  <a:pt x="1212454" y="18288"/>
+                </a:cubicBezTo>
+                <a:cubicBezTo>
+                  <a:pt x="867236" y="12402"/>
+                  <a:pt x="874382" y="15627"/>
+                  <a:pt x="733535" y="18288"/>
+                </a:cubicBezTo>
+                <a:cubicBezTo>
+                  <a:pt x="592688" y="20949"/>
+                  <a:pt x="183477" y="14753"/>
+                  <a:pt x="0" y="18288"/>
+                </a:cubicBezTo>
+                <a:cubicBezTo>
+                  <a:pt x="-229" y="14222"/>
+                  <a:pt x="509" y="5816"/>
+                  <a:pt x="0" y="0"/>
+                </a:cubicBezTo>
+                <a:close/>
+              </a:path>
+              <a:path w="4243589" h="18288" stroke="0" extrusionOk="0">
+                <a:moveTo>
+                  <a:pt x="0" y="0"/>
+                </a:moveTo>
+                <a:cubicBezTo>
+                  <a:pt x="143690" y="16630"/>
+                  <a:pt x="266667" y="14847"/>
+                  <a:pt x="521355" y="0"/>
+                </a:cubicBezTo>
+                <a:cubicBezTo>
+                  <a:pt x="776043" y="-14847"/>
+                  <a:pt x="814491" y="-17363"/>
+                  <a:pt x="1000275" y="0"/>
+                </a:cubicBezTo>
+                <a:cubicBezTo>
+                  <a:pt x="1186059" y="17363"/>
+                  <a:pt x="1352504" y="-23507"/>
+                  <a:pt x="1521630" y="0"/>
+                </a:cubicBezTo>
+                <a:cubicBezTo>
+                  <a:pt x="1690756" y="23507"/>
+                  <a:pt x="1889525" y="5871"/>
+                  <a:pt x="2127857" y="0"/>
+                </a:cubicBezTo>
+                <a:cubicBezTo>
+                  <a:pt x="2366189" y="-5871"/>
+                  <a:pt x="2620628" y="-27997"/>
+                  <a:pt x="2776520" y="0"/>
+                </a:cubicBezTo>
+                <a:cubicBezTo>
+                  <a:pt x="2932412" y="27997"/>
+                  <a:pt x="3131683" y="-25073"/>
+                  <a:pt x="3467618" y="0"/>
+                </a:cubicBezTo>
+                <a:cubicBezTo>
+                  <a:pt x="3803553" y="25073"/>
+                  <a:pt x="4017371" y="3071"/>
+                  <a:pt x="4243589" y="0"/>
+                </a:cubicBezTo>
+                <a:cubicBezTo>
+                  <a:pt x="4243134" y="6162"/>
+                  <a:pt x="4243492" y="11775"/>
+                  <a:pt x="4243589" y="18288"/>
+                </a:cubicBezTo>
+                <a:cubicBezTo>
+                  <a:pt x="4017834" y="-5779"/>
+                  <a:pt x="3834586" y="13376"/>
+                  <a:pt x="3594926" y="18288"/>
+                </a:cubicBezTo>
+                <a:cubicBezTo>
+                  <a:pt x="3355266" y="23200"/>
+                  <a:pt x="3204179" y="2869"/>
+                  <a:pt x="2903827" y="18288"/>
+                </a:cubicBezTo>
+                <a:cubicBezTo>
+                  <a:pt x="2603475" y="33707"/>
+                  <a:pt x="2526187" y="46187"/>
+                  <a:pt x="2212729" y="18288"/>
+                </a:cubicBezTo>
+                <a:cubicBezTo>
+                  <a:pt x="1899271" y="-9611"/>
+                  <a:pt x="1966289" y="29692"/>
+                  <a:pt x="1733809" y="18288"/>
+                </a:cubicBezTo>
+                <a:cubicBezTo>
+                  <a:pt x="1501329" y="6884"/>
+                  <a:pt x="1343612" y="12492"/>
+                  <a:pt x="1085146" y="18288"/>
+                </a:cubicBezTo>
+                <a:cubicBezTo>
+                  <a:pt x="826680" y="24084"/>
+                  <a:pt x="778184" y="35607"/>
+                  <a:pt x="521355" y="18288"/>
+                </a:cubicBezTo>
+                <a:cubicBezTo>
+                  <a:pt x="264526" y="969"/>
+                  <a:pt x="120277" y="4268"/>
+                  <a:pt x="0" y="18288"/>
+                </a:cubicBezTo>
+                <a:cubicBezTo>
+                  <a:pt x="766" y="10800"/>
+                  <a:pt x="-457" y="8180"/>
+                  <a:pt x="0" y="0"/>
+                </a:cubicBezTo>
+                <a:close/>
+              </a:path>
+            </a:pathLst>
+          </a:custGeom>
+          <a:solidFill>
+            <a:srgbClr val="FFFFFF">
+              <a:alpha val="75000"/>
+            </a:srgbClr>
+          </a:solidFill>
+          <a:ln w="44450" cap="rnd">
+            <a:solidFill>
+              <a:schemeClr val="bg1">
+                <a:alpha val="75000"/>
+              </a:schemeClr>
+            </a:solidFill>
+            <a:round/>
+            <a:extLst>
+              <a:ext uri="{C807C97D-BFC1-408E-A445-0C87EB9F89A2}">
+                <ask:lineSketchStyleProps xmlns:ask="http://schemas.microsoft.com/office/drawing/2018/sketchyshapes" sd="2727557108">
+                  <a:prstGeom prst="rect">
+                    <a:avLst/>
+                  </a:prstGeom>
+                  <ask:type>
+                    <ask:lineSketchFreehand/>
+                  </ask:type>
+                </ask:lineSketchStyleProps>
+              </a:ext>
+            </a:extLst>
+          </a:ln>
+        </p:spPr>
+        <p:style>
+          <a:lnRef idx="2">
+            <a:schemeClr val="accent1">
+              <a:shade val="50000"/>
+            </a:schemeClr>
+          </a:lnRef>
+          <a:fillRef idx="1">
+            <a:schemeClr val="accent1"/>
+          </a:fillRef>
+          <a:effectRef idx="0">
+            <a:schemeClr val="accent1"/>
+          </a:effectRef>
+          <a:fontRef idx="minor">
+            <a:schemeClr val="lt1"/>
+          </a:fontRef>
+        </p:style>
+        <p:txBody>
+          <a:bodyPr rtlCol="0" anchor="ctr"/>
+          <a:lstStyle/>
+          <a:p>
+            <a:pPr algn="ctr"/>
+            <a:endParaRPr lang="en-US"/>
           </a:p>
         </p:txBody>
       </p:sp>
@@ -3721,7 +3892,7 @@
     </p:extLst>
   </p:cSld>
   <p:clrMapOvr>
-    <a:masterClrMapping/>
+    <a:overrideClrMapping bg1="lt1" tx1="dk1" bg2="lt2" tx2="dk2" accent1="accent1" accent2="accent2" accent3="accent3" accent4="accent4" accent5="accent5" accent6="accent6" hlink="hlink" folHlink="folHlink"/>
   </p:clrMapOvr>
 </p:sld>
 </file>
@@ -3903,7 +4074,7 @@
         <p:spPr>
           <a:xfrm>
             <a:off x="781050" y="1992050"/>
-            <a:ext cx="7007046" cy="954107"/>
+            <a:ext cx="8084264" cy="954107"/>
           </a:xfrm>
           <a:prstGeom prst="rect">
             <a:avLst/>
@@ -3918,7 +4089,7 @@
           <a:p>
             <a:r>
               <a:rPr lang="ja-JP" altLang="en-US" sz="2800" dirty="0"/>
-              <a:t>剣での通常攻撃コンボと必殺技で敵を倒し</a:t>
+              <a:t>剣での通常攻撃コンボと爽快な必殺技で敵を倒し</a:t>
             </a:r>
             <a:endParaRPr lang="en-US" altLang="ja-JP" sz="2800" dirty="0"/>
           </a:p>
@@ -3931,6 +4102,76 @@
           </a:p>
         </p:txBody>
       </p:sp>
+      <p:sp>
+        <p:nvSpPr>
+          <p:cNvPr id="2" name="テキスト ボックス 1">
+            <a:extLst>
+              <a:ext uri="{FF2B5EF4-FFF2-40B4-BE49-F238E27FC236}">
+                <a16:creationId xmlns:a16="http://schemas.microsoft.com/office/drawing/2014/main" id="{519A8A3B-ADCA-8131-EB6B-165311516FFB}"/>
+              </a:ext>
+            </a:extLst>
+          </p:cNvPr>
+          <p:cNvSpPr txBox="1"/>
+          <p:nvPr/>
+        </p:nvSpPr>
+        <p:spPr>
+          <a:xfrm>
+            <a:off x="781050" y="3525471"/>
+            <a:ext cx="4176143" cy="523220"/>
+          </a:xfrm>
+          <a:prstGeom prst="rect">
+            <a:avLst/>
+          </a:prstGeom>
+          <a:noFill/>
+        </p:spPr>
+        <p:txBody>
+          <a:bodyPr wrap="none" rtlCol="0">
+            <a:spAutoFit/>
+          </a:bodyPr>
+          <a:lstStyle/>
+          <a:p>
+            <a:r>
+              <a:rPr kumimoji="1" lang="ja-JP" altLang="en-US" sz="2800" dirty="0"/>
+              <a:t>参考にするゲーム：</a:t>
+            </a:r>
+            <a:r>
+              <a:rPr kumimoji="1" lang="en-US" altLang="ja-JP" sz="2800" dirty="0"/>
+              <a:t>FF16</a:t>
+            </a:r>
+            <a:endParaRPr kumimoji="1" lang="ja-JP" altLang="en-US" sz="2800" dirty="0"/>
+          </a:p>
+        </p:txBody>
+      </p:sp>
+      <p:pic>
+        <p:nvPicPr>
+          <p:cNvPr id="4" name="図 3" descr="FINAL FANTASY XVI">
+            <a:extLst>
+              <a:ext uri="{FF2B5EF4-FFF2-40B4-BE49-F238E27FC236}">
+                <a16:creationId xmlns:a16="http://schemas.microsoft.com/office/drawing/2014/main" id="{1A271141-54DE-84DF-6445-3CCA966F487A}"/>
+              </a:ext>
+            </a:extLst>
+          </p:cNvPr>
+          <p:cNvPicPr>
+            <a:picLocks noChangeAspect="1"/>
+          </p:cNvPicPr>
+          <p:nvPr/>
+        </p:nvPicPr>
+        <p:blipFill>
+          <a:blip r:embed="rId2"/>
+          <a:stretch>
+            <a:fillRect/>
+          </a:stretch>
+        </p:blipFill>
+        <p:spPr>
+          <a:xfrm>
+            <a:off x="5934075" y="3337916"/>
+            <a:ext cx="6257924" cy="3520083"/>
+          </a:xfrm>
+          <a:prstGeom prst="rect">
+            <a:avLst/>
+          </a:prstGeom>
+        </p:spPr>
+      </p:pic>
     </p:spTree>
     <p:extLst>
       <p:ext uri="{BB962C8B-B14F-4D97-AF65-F5344CB8AC3E}">
@@ -3966,71 +4207,6 @@
           <p:cNvPr id="4" name="テキスト ボックス 3">
             <a:extLst>
               <a:ext uri="{FF2B5EF4-FFF2-40B4-BE49-F238E27FC236}">
-                <a16:creationId xmlns:a16="http://schemas.microsoft.com/office/drawing/2014/main" id="{1F286948-9E6E-A637-A1C6-EEF496644A5E}"/>
-              </a:ext>
-            </a:extLst>
-          </p:cNvPr>
-          <p:cNvSpPr txBox="1"/>
-          <p:nvPr/>
-        </p:nvSpPr>
-        <p:spPr>
-          <a:xfrm>
-            <a:off x="466724" y="514350"/>
-            <a:ext cx="3667125" cy="707886"/>
-          </a:xfrm>
-          <a:prstGeom prst="rect">
-            <a:avLst/>
-          </a:prstGeom>
-          <a:noFill/>
-        </p:spPr>
-        <p:txBody>
-          <a:bodyPr wrap="square" rtlCol="0">
-            <a:spAutoFit/>
-          </a:bodyPr>
-          <a:lstStyle/>
-          <a:p>
-            <a:r>
-              <a:rPr kumimoji="1" lang="ja-JP" altLang="en-US" sz="4000" dirty="0"/>
-              <a:t>ゲームの流れ</a:t>
-            </a:r>
-          </a:p>
-        </p:txBody>
-      </p:sp>
-    </p:spTree>
-    <p:extLst>
-      <p:ext uri="{BB962C8B-B14F-4D97-AF65-F5344CB8AC3E}">
-        <p14:creationId xmlns:p14="http://schemas.microsoft.com/office/powerpoint/2010/main" val="199027094"/>
-      </p:ext>
-    </p:extLst>
-  </p:cSld>
-  <p:clrMapOvr>
-    <a:masterClrMapping/>
-  </p:clrMapOvr>
-</p:sld>
-</file>
-
-<file path=ppt/slides/slide5.xml><?xml version="1.0" encoding="utf-8"?>
-<p:sld xmlns:a="http://schemas.openxmlformats.org/drawingml/2006/main" xmlns:r="http://schemas.openxmlformats.org/officeDocument/2006/relationships" xmlns:p="http://schemas.openxmlformats.org/presentationml/2006/main">
-  <p:cSld>
-    <p:spTree>
-      <p:nvGrpSpPr>
-        <p:cNvPr id="1" name=""/>
-        <p:cNvGrpSpPr/>
-        <p:nvPr/>
-      </p:nvGrpSpPr>
-      <p:grpSpPr>
-        <a:xfrm>
-          <a:off x="0" y="0"/>
-          <a:ext cx="0" cy="0"/>
-          <a:chOff x="0" y="0"/>
-          <a:chExt cx="0" cy="0"/>
-        </a:xfrm>
-      </p:grpSpPr>
-      <p:sp>
-        <p:nvSpPr>
-          <p:cNvPr id="4" name="テキスト ボックス 3">
-            <a:extLst>
-              <a:ext uri="{FF2B5EF4-FFF2-40B4-BE49-F238E27FC236}">
                 <a16:creationId xmlns:a16="http://schemas.microsoft.com/office/drawing/2014/main" id="{7A9EEDD8-5C9A-3BD1-AE5E-1B58FC870539}"/>
               </a:ext>
             </a:extLst>
@@ -4191,8 +4367,8 @@
         </p:nvSpPr>
         <p:spPr>
           <a:xfrm>
-            <a:off x="1297907" y="2683945"/>
-            <a:ext cx="2492990" cy="369332"/>
+            <a:off x="913186" y="2730262"/>
+            <a:ext cx="3262432" cy="461665"/>
           </a:xfrm>
           <a:prstGeom prst="rect">
             <a:avLst/>
@@ -4206,7 +4382,7 @@
           <a:lstStyle/>
           <a:p>
             <a:r>
-              <a:rPr kumimoji="1" lang="ja-JP" altLang="en-US" dirty="0"/>
+              <a:rPr kumimoji="1" lang="ja-JP" altLang="en-US" sz="2400" dirty="0"/>
               <a:t>攻撃でゲージを貯める</a:t>
             </a:r>
           </a:p>
@@ -4226,8 +4402,8 @@
         </p:nvSpPr>
         <p:spPr>
           <a:xfrm>
-            <a:off x="7054551" y="2468536"/>
-            <a:ext cx="3416320" cy="369332"/>
+            <a:off x="6821031" y="2777287"/>
+            <a:ext cx="4493538" cy="461665"/>
           </a:xfrm>
           <a:prstGeom prst="rect">
             <a:avLst/>
@@ -4241,7 +4417,7 @@
           <a:lstStyle/>
           <a:p>
             <a:r>
-              <a:rPr kumimoji="1" lang="ja-JP" altLang="en-US" dirty="0"/>
+              <a:rPr kumimoji="1" lang="ja-JP" altLang="en-US" sz="2400" dirty="0"/>
               <a:t>ゲージを消費して必殺技を発動</a:t>
             </a:r>
           </a:p>
@@ -4353,8 +4529,8 @@
         </p:nvSpPr>
         <p:spPr>
           <a:xfrm>
-            <a:off x="3541454" y="1728363"/>
-            <a:ext cx="5109091" cy="461665"/>
+            <a:off x="2916052" y="1782051"/>
+            <a:ext cx="5929828" cy="523220"/>
           </a:xfrm>
           <a:prstGeom prst="rect">
             <a:avLst/>
@@ -4368,10 +4544,10 @@
           <a:lstStyle/>
           <a:p>
             <a:r>
-              <a:rPr lang="ja-JP" altLang="en-US" sz="2400" dirty="0"/>
+              <a:rPr lang="ja-JP" altLang="en-US" sz="2800" dirty="0"/>
               <a:t>必殺技で敵を一掃するのが爽快！！</a:t>
             </a:r>
-            <a:endParaRPr kumimoji="1" lang="ja-JP" altLang="en-US" sz="2400" dirty="0"/>
+            <a:endParaRPr kumimoji="1" lang="ja-JP" altLang="en-US" sz="2800" dirty="0"/>
           </a:p>
         </p:txBody>
       </p:sp>
@@ -4388,7 +4564,7 @@
 </p:sld>
 </file>
 
-<file path=ppt/slides/slide6.xml><?xml version="1.0" encoding="utf-8"?>
+<file path=ppt/slides/slide5.xml><?xml version="1.0" encoding="utf-8"?>
 <p:sld xmlns:a="http://schemas.openxmlformats.org/drawingml/2006/main" xmlns:r="http://schemas.openxmlformats.org/officeDocument/2006/relationships" xmlns:p="http://schemas.openxmlformats.org/presentationml/2006/main">
   <p:cSld>
     <p:spTree>
@@ -4460,8 +4636,8 @@
         </p:nvSpPr>
         <p:spPr>
           <a:xfrm>
-            <a:off x="2050887" y="1988023"/>
-            <a:ext cx="7571303" cy="461665"/>
+            <a:off x="1694795" y="2024548"/>
+            <a:ext cx="8802410" cy="523220"/>
           </a:xfrm>
           <a:prstGeom prst="rect">
             <a:avLst/>
@@ -4475,10 +4651,10 @@
           <a:lstStyle/>
           <a:p>
             <a:r>
-              <a:rPr lang="ja-JP" altLang="en-US" sz="2400" dirty="0"/>
+              <a:rPr lang="ja-JP" altLang="en-US" sz="2800" dirty="0"/>
               <a:t>ゲージがたくさん貯まるため、より必殺技を回せる！</a:t>
             </a:r>
-            <a:endParaRPr kumimoji="1" lang="ja-JP" altLang="en-US" sz="2400" dirty="0"/>
+            <a:endParaRPr kumimoji="1" lang="ja-JP" altLang="en-US" sz="2800" dirty="0"/>
           </a:p>
         </p:txBody>
       </p:sp>
@@ -4602,8 +4778,8 @@
         </p:nvSpPr>
         <p:spPr>
           <a:xfrm>
-            <a:off x="1909936" y="3150512"/>
-            <a:ext cx="1569660" cy="369332"/>
+            <a:off x="1722353" y="3080651"/>
+            <a:ext cx="2031325" cy="461665"/>
           </a:xfrm>
           <a:prstGeom prst="rect">
             <a:avLst/>
@@ -4617,10 +4793,10 @@
           <a:lstStyle/>
           <a:p>
             <a:r>
-              <a:rPr lang="ja-JP" altLang="en-US" dirty="0"/>
+              <a:rPr lang="ja-JP" altLang="en-US" sz="2400" dirty="0"/>
               <a:t>ジャスト回避</a:t>
             </a:r>
-            <a:endParaRPr kumimoji="1" lang="ja-JP" altLang="en-US" dirty="0"/>
+            <a:endParaRPr kumimoji="1" lang="ja-JP" altLang="en-US" sz="2400" dirty="0"/>
           </a:p>
         </p:txBody>
       </p:sp>
@@ -4638,8 +4814,8 @@
         </p:nvSpPr>
         <p:spPr>
           <a:xfrm>
-            <a:off x="9008092" y="3199565"/>
-            <a:ext cx="646331" cy="369332"/>
+            <a:off x="8931148" y="3080650"/>
+            <a:ext cx="800219" cy="461665"/>
           </a:xfrm>
           <a:prstGeom prst="rect">
             <a:avLst/>
@@ -4653,9 +4829,10 @@
           <a:lstStyle/>
           <a:p>
             <a:r>
-              <a:rPr kumimoji="1" lang="ja-JP" altLang="en-US" dirty="0"/>
+              <a:rPr kumimoji="1" lang="ja-JP" altLang="en-US" sz="2400" dirty="0"/>
               <a:t>反撃</a:t>
             </a:r>
+            <a:endParaRPr kumimoji="1" lang="ja-JP" altLang="en-US" dirty="0"/>
           </a:p>
         </p:txBody>
       </p:sp>
@@ -4673,8 +4850,8 @@
         </p:nvSpPr>
         <p:spPr>
           <a:xfrm>
-            <a:off x="5167125" y="4298641"/>
-            <a:ext cx="1338828" cy="369332"/>
+            <a:off x="5031312" y="4261696"/>
+            <a:ext cx="1723549" cy="461665"/>
           </a:xfrm>
           <a:prstGeom prst="rect">
             <a:avLst/>
@@ -4688,7 +4865,7 @@
           <a:lstStyle/>
           <a:p>
             <a:r>
-              <a:rPr kumimoji="1" lang="ja-JP" altLang="en-US" dirty="0"/>
+              <a:rPr kumimoji="1" lang="ja-JP" altLang="en-US" sz="2400" dirty="0"/>
               <a:t>攻撃ボタン</a:t>
             </a:r>
           </a:p>
@@ -4707,10 +4884,341 @@
 </p:sld>
 </file>
 
+<file path=ppt/slides/slide6.xml><?xml version="1.0" encoding="utf-8"?>
+<p:sld xmlns:a="http://schemas.openxmlformats.org/drawingml/2006/main" xmlns:r="http://schemas.openxmlformats.org/officeDocument/2006/relationships" xmlns:p="http://schemas.openxmlformats.org/presentationml/2006/main">
+  <p:cSld>
+    <p:spTree>
+      <p:nvGrpSpPr>
+        <p:cNvPr id="1" name="">
+          <a:extLst>
+            <a:ext uri="{FF2B5EF4-FFF2-40B4-BE49-F238E27FC236}">
+              <a16:creationId xmlns:a16="http://schemas.microsoft.com/office/drawing/2014/main" id="{596DEE05-8A6C-4861-2747-2142F961C655}"/>
+            </a:ext>
+          </a:extLst>
+        </p:cNvPr>
+        <p:cNvGrpSpPr/>
+        <p:nvPr/>
+      </p:nvGrpSpPr>
+      <p:grpSpPr>
+        <a:xfrm>
+          <a:off x="0" y="0"/>
+          <a:ext cx="0" cy="0"/>
+          <a:chOff x="0" y="0"/>
+          <a:chExt cx="0" cy="0"/>
+        </a:xfrm>
+      </p:grpSpPr>
+      <p:sp>
+        <p:nvSpPr>
+          <p:cNvPr id="4" name="テキスト ボックス 3">
+            <a:extLst>
+              <a:ext uri="{FF2B5EF4-FFF2-40B4-BE49-F238E27FC236}">
+                <a16:creationId xmlns:a16="http://schemas.microsoft.com/office/drawing/2014/main" id="{2BA79A1A-AFD2-DA9C-C775-407817226590}"/>
+              </a:ext>
+            </a:extLst>
+          </p:cNvPr>
+          <p:cNvSpPr txBox="1"/>
+          <p:nvPr/>
+        </p:nvSpPr>
+        <p:spPr>
+          <a:xfrm>
+            <a:off x="708601" y="526063"/>
+            <a:ext cx="10846090" cy="830997"/>
+          </a:xfrm>
+          <a:prstGeom prst="rect">
+            <a:avLst/>
+          </a:prstGeom>
+          <a:noFill/>
+        </p:spPr>
+        <p:txBody>
+          <a:bodyPr wrap="square" rtlCol="0">
+            <a:spAutoFit/>
+          </a:bodyPr>
+          <a:lstStyle/>
+          <a:p>
+            <a:r>
+              <a:rPr kumimoji="1" lang="ja-JP" altLang="en-US" sz="4800" dirty="0"/>
+              <a:t>やりたいこと③：パリィ反撃</a:t>
+            </a:r>
+          </a:p>
+        </p:txBody>
+      </p:sp>
+      <p:sp>
+        <p:nvSpPr>
+          <p:cNvPr id="3" name="テキスト ボックス 2">
+            <a:extLst>
+              <a:ext uri="{FF2B5EF4-FFF2-40B4-BE49-F238E27FC236}">
+                <a16:creationId xmlns:a16="http://schemas.microsoft.com/office/drawing/2014/main" id="{C60B2F25-F7B9-8070-76CA-A8DDB5278CC8}"/>
+              </a:ext>
+            </a:extLst>
+          </p:cNvPr>
+          <p:cNvSpPr txBox="1"/>
+          <p:nvPr/>
+        </p:nvSpPr>
+        <p:spPr>
+          <a:xfrm>
+            <a:off x="2772013" y="2014395"/>
+            <a:ext cx="6647974" cy="523220"/>
+          </a:xfrm>
+          <a:prstGeom prst="rect">
+            <a:avLst/>
+          </a:prstGeom>
+          <a:noFill/>
+        </p:spPr>
+        <p:txBody>
+          <a:bodyPr wrap="none" rtlCol="0">
+            <a:spAutoFit/>
+          </a:bodyPr>
+          <a:lstStyle/>
+          <a:p>
+            <a:r>
+              <a:rPr lang="ja-JP" altLang="en-US" sz="2800" dirty="0"/>
+              <a:t>回避反撃よりさらにゲージが溜まる！！</a:t>
+            </a:r>
+            <a:endParaRPr lang="en-US" altLang="ja-JP" sz="2800" dirty="0"/>
+          </a:p>
+        </p:txBody>
+      </p:sp>
+      <p:sp>
+        <p:nvSpPr>
+          <p:cNvPr id="15" name="矢印: 右 14">
+            <a:extLst>
+              <a:ext uri="{FF2B5EF4-FFF2-40B4-BE49-F238E27FC236}">
+                <a16:creationId xmlns:a16="http://schemas.microsoft.com/office/drawing/2014/main" id="{27B8EE2C-7FC4-2FD9-7855-1525373441BE}"/>
+              </a:ext>
+            </a:extLst>
+          </p:cNvPr>
+          <p:cNvSpPr/>
+          <p:nvPr/>
+        </p:nvSpPr>
+        <p:spPr>
+          <a:xfrm>
+            <a:off x="5064303" y="4632688"/>
+            <a:ext cx="1866397" cy="461665"/>
+          </a:xfrm>
+          <a:prstGeom prst="rightArrow">
+            <a:avLst/>
+          </a:prstGeom>
+        </p:spPr>
+        <p:style>
+          <a:lnRef idx="2">
+            <a:schemeClr val="accent1">
+              <a:shade val="15000"/>
+            </a:schemeClr>
+          </a:lnRef>
+          <a:fillRef idx="1">
+            <a:schemeClr val="accent1"/>
+          </a:fillRef>
+          <a:effectRef idx="0">
+            <a:schemeClr val="accent1"/>
+          </a:effectRef>
+          <a:fontRef idx="minor">
+            <a:schemeClr val="lt1"/>
+          </a:fontRef>
+        </p:style>
+        <p:txBody>
+          <a:bodyPr rtlCol="0" anchor="ctr"/>
+          <a:lstStyle/>
+          <a:p>
+            <a:pPr algn="ctr"/>
+            <a:endParaRPr kumimoji="1" lang="ja-JP" altLang="en-US"/>
+          </a:p>
+        </p:txBody>
+      </p:sp>
+      <p:sp>
+        <p:nvSpPr>
+          <p:cNvPr id="16" name="テキスト ボックス 15">
+            <a:extLst>
+              <a:ext uri="{FF2B5EF4-FFF2-40B4-BE49-F238E27FC236}">
+                <a16:creationId xmlns:a16="http://schemas.microsoft.com/office/drawing/2014/main" id="{F45615E2-059B-BF47-5751-3593B7B82FE3}"/>
+              </a:ext>
+            </a:extLst>
+          </p:cNvPr>
+          <p:cNvSpPr txBox="1"/>
+          <p:nvPr/>
+        </p:nvSpPr>
+        <p:spPr>
+          <a:xfrm>
+            <a:off x="1664387" y="3189981"/>
+            <a:ext cx="2339102" cy="461665"/>
+          </a:xfrm>
+          <a:prstGeom prst="rect">
+            <a:avLst/>
+          </a:prstGeom>
+          <a:noFill/>
+        </p:spPr>
+        <p:txBody>
+          <a:bodyPr wrap="none" rtlCol="0">
+            <a:spAutoFit/>
+          </a:bodyPr>
+          <a:lstStyle/>
+          <a:p>
+            <a:r>
+              <a:rPr kumimoji="1" lang="ja-JP" altLang="en-US" sz="2400" dirty="0"/>
+              <a:t>ジャストパリィ</a:t>
+            </a:r>
+          </a:p>
+        </p:txBody>
+      </p:sp>
+      <p:sp>
+        <p:nvSpPr>
+          <p:cNvPr id="17" name="テキスト ボックス 16">
+            <a:extLst>
+              <a:ext uri="{FF2B5EF4-FFF2-40B4-BE49-F238E27FC236}">
+                <a16:creationId xmlns:a16="http://schemas.microsoft.com/office/drawing/2014/main" id="{7D5A4443-7700-2510-2790-DF5B49B6A2F6}"/>
+              </a:ext>
+            </a:extLst>
+          </p:cNvPr>
+          <p:cNvSpPr txBox="1"/>
+          <p:nvPr/>
+        </p:nvSpPr>
+        <p:spPr>
+          <a:xfrm>
+            <a:off x="8958322" y="3178064"/>
+            <a:ext cx="800219" cy="461665"/>
+          </a:xfrm>
+          <a:prstGeom prst="rect">
+            <a:avLst/>
+          </a:prstGeom>
+          <a:noFill/>
+        </p:spPr>
+        <p:txBody>
+          <a:bodyPr wrap="none" rtlCol="0">
+            <a:spAutoFit/>
+          </a:bodyPr>
+          <a:lstStyle/>
+          <a:p>
+            <a:r>
+              <a:rPr kumimoji="1" lang="ja-JP" altLang="en-US" sz="2400" dirty="0"/>
+              <a:t>反撃</a:t>
+            </a:r>
+            <a:endParaRPr kumimoji="1" lang="ja-JP" altLang="en-US" dirty="0"/>
+          </a:p>
+        </p:txBody>
+      </p:sp>
+      <p:sp>
+        <p:nvSpPr>
+          <p:cNvPr id="18" name="テキスト ボックス 17">
+            <a:extLst>
+              <a:ext uri="{FF2B5EF4-FFF2-40B4-BE49-F238E27FC236}">
+                <a16:creationId xmlns:a16="http://schemas.microsoft.com/office/drawing/2014/main" id="{1D1BAA42-BFA5-2813-73B5-5B6B555D530E}"/>
+              </a:ext>
+            </a:extLst>
+          </p:cNvPr>
+          <p:cNvSpPr txBox="1"/>
+          <p:nvPr/>
+        </p:nvSpPr>
+        <p:spPr>
+          <a:xfrm>
+            <a:off x="5268651" y="4390974"/>
+            <a:ext cx="1338828" cy="369332"/>
+          </a:xfrm>
+          <a:prstGeom prst="rect">
+            <a:avLst/>
+          </a:prstGeom>
+          <a:noFill/>
+        </p:spPr>
+        <p:txBody>
+          <a:bodyPr wrap="none" rtlCol="0">
+            <a:spAutoFit/>
+          </a:bodyPr>
+          <a:lstStyle/>
+          <a:p>
+            <a:r>
+              <a:rPr kumimoji="1" lang="ja-JP" altLang="en-US" dirty="0"/>
+              <a:t>攻撃ボタン</a:t>
+            </a:r>
+          </a:p>
+        </p:txBody>
+      </p:sp>
+      <p:pic>
+        <p:nvPicPr>
+          <p:cNvPr id="8" name="図 7">
+            <a:extLst>
+              <a:ext uri="{FF2B5EF4-FFF2-40B4-BE49-F238E27FC236}">
+                <a16:creationId xmlns:a16="http://schemas.microsoft.com/office/drawing/2014/main" id="{ABEDF4D2-6D2E-598D-49A3-8A68349E5BB6}"/>
+              </a:ext>
+            </a:extLst>
+          </p:cNvPr>
+          <p:cNvPicPr>
+            <a:picLocks noChangeAspect="1"/>
+          </p:cNvPicPr>
+          <p:nvPr/>
+        </p:nvPicPr>
+        <p:blipFill>
+          <a:blip r:embed="rId2">
+            <a:extLst>
+              <a:ext uri="{28A0092B-C50C-407E-A947-70E740481C1C}">
+                <a14:useLocalDpi xmlns:a14="http://schemas.microsoft.com/office/drawing/2010/main" val="0"/>
+              </a:ext>
+            </a:extLst>
+          </a:blip>
+          <a:stretch>
+            <a:fillRect/>
+          </a:stretch>
+        </p:blipFill>
+        <p:spPr>
+          <a:xfrm>
+            <a:off x="708601" y="3668019"/>
+            <a:ext cx="4250675" cy="2391005"/>
+          </a:xfrm>
+          <a:prstGeom prst="rect">
+            <a:avLst/>
+          </a:prstGeom>
+        </p:spPr>
+      </p:pic>
+      <p:pic>
+        <p:nvPicPr>
+          <p:cNvPr id="11" name="図 10">
+            <a:extLst>
+              <a:ext uri="{FF2B5EF4-FFF2-40B4-BE49-F238E27FC236}">
+                <a16:creationId xmlns:a16="http://schemas.microsoft.com/office/drawing/2014/main" id="{206BC64C-E11C-5B61-BA36-F28419B65A48}"/>
+              </a:ext>
+            </a:extLst>
+          </p:cNvPr>
+          <p:cNvPicPr>
+            <a:picLocks noChangeAspect="1"/>
+          </p:cNvPicPr>
+          <p:nvPr/>
+        </p:nvPicPr>
+        <p:blipFill>
+          <a:blip r:embed="rId3">
+            <a:extLst>
+              <a:ext uri="{28A0092B-C50C-407E-A947-70E740481C1C}">
+                <a14:useLocalDpi xmlns:a14="http://schemas.microsoft.com/office/drawing/2010/main" val="0"/>
+              </a:ext>
+            </a:extLst>
+          </a:blip>
+          <a:stretch>
+            <a:fillRect/>
+          </a:stretch>
+        </p:blipFill>
+        <p:spPr>
+          <a:xfrm>
+            <a:off x="7035727" y="3612177"/>
+            <a:ext cx="4389582" cy="2469140"/>
+          </a:xfrm>
+          <a:prstGeom prst="rect">
+            <a:avLst/>
+          </a:prstGeom>
+        </p:spPr>
+      </p:pic>
+    </p:spTree>
+    <p:extLst>
+      <p:ext uri="{BB962C8B-B14F-4D97-AF65-F5344CB8AC3E}">
+        <p14:creationId xmlns:p14="http://schemas.microsoft.com/office/powerpoint/2010/main" val="440422394"/>
+      </p:ext>
+    </p:extLst>
+  </p:cSld>
+  <p:clrMapOvr>
+    <a:masterClrMapping/>
+  </p:clrMapOvr>
+</p:sld>
+</file>
+
 <file path=ppt/theme/theme1.xml><?xml version="1.0" encoding="utf-8"?>
-<a:theme xmlns:a="http://schemas.openxmlformats.org/drawingml/2006/main" name="Office テーマ">
+<a:theme xmlns:a="http://schemas.openxmlformats.org/drawingml/2006/main" name="Office Theme">
   <a:themeElements>
-    <a:clrScheme name="Office">
+    <a:clrScheme name="Office テーマ">
       <a:dk1>
         <a:sysClr val="windowText" lastClr="000000"/>
       </a:dk1>
@@ -4742,15 +5250,15 @@
         <a:srgbClr val="4EA72E"/>
       </a:accent6>
       <a:hlink>
-        <a:srgbClr val="467886"/>
+        <a:srgbClr val="538D9D"/>
       </a:hlink>
       <a:folHlink>
-        <a:srgbClr val="96607D"/>
+        <a:srgbClr val="A5738E"/>
       </a:folHlink>
     </a:clrScheme>
-    <a:fontScheme name="Office">
+    <a:fontScheme name="Office テーマ">
       <a:majorFont>
-        <a:latin typeface="游ゴシック Light" panose="02110004020202020204"/>
+        <a:latin typeface="Aptos Display" panose="02110004020202020204"/>
         <a:ea typeface=""/>
         <a:cs typeface=""/>
         <a:font script="Jpan" typeface="游ゴシック Light"/>
@@ -4802,7 +5310,7 @@
         <a:font script="Tfng" typeface="Ebrima"/>
       </a:majorFont>
       <a:minorFont>
-        <a:latin typeface="游ゴシック" panose="02110004020202020204"/>
+        <a:latin typeface="Aptos" panose="02110004020202020204"/>
         <a:ea typeface=""/>
         <a:cs typeface=""/>
         <a:font script="Jpan" typeface="游ゴシック"/>
@@ -4854,7 +5362,7 @@
         <a:font script="Tfng" typeface="Ebrima"/>
       </a:minorFont>
     </a:fontScheme>
-    <a:fmtScheme name="Office">
+    <a:fmtScheme name="Office テーマ">
       <a:fillStyleLst>
         <a:solidFill>
           <a:schemeClr val="phClr"/>
@@ -5016,7 +5524,7 @@
   <a:extraClrSchemeLst/>
   <a:extLst>
     <a:ext uri="{05A4C25C-085E-4340-85A3-A5531E510DB2}">
-      <thm15:themeFamily xmlns:thm15="http://schemas.microsoft.com/office/thememl/2012/main" name="Office Theme" id="{2E142A2C-CD16-42D6-873A-C26D2A0506FA}" vid="{1BDDFF52-6CD6-40A5-AB3C-68EB2F1E4D0A}"/>
+      <thm15:themeFamily xmlns:thm15="http://schemas.microsoft.com/office/thememl/2012/main" name="Office Theme" id="{2E142A2C-CD16-42D6-873A-C26D2A0506FA}" vid="{3A418E6B-C5F0-4B95-8D77-61E3EF3B5DF5}"/>
     </a:ext>
   </a:extLst>
 </a:theme>

--- a/夏ゲーム企画.pptx
+++ b/夏ゲーム企画.pptx
@@ -11,6 +11,7 @@
     <p:sldId id="256" r:id="rId5"/>
     <p:sldId id="260" r:id="rId6"/>
     <p:sldId id="262" r:id="rId7"/>
+    <p:sldId id="263" r:id="rId8"/>
   </p:sldIdLst>
   <p:sldSz cx="12192000" cy="6858000"/>
   <p:notesSz cx="6858000" cy="9144000"/>
@@ -248,7 +249,7 @@
           <a:p>
             <a:fld id="{295F8ADE-B108-46AD-965F-F7327D8A4733}" type="datetimeFigureOut">
               <a:rPr kumimoji="1" lang="ja-JP" altLang="en-US" smtClean="0"/>
-              <a:t>2026/5/12</a:t>
+              <a:t>2026/5/15</a:t>
             </a:fld>
             <a:endParaRPr kumimoji="1" lang="ja-JP" altLang="en-US"/>
           </a:p>
@@ -450,7 +451,7 @@
           <a:p>
             <a:fld id="{295F8ADE-B108-46AD-965F-F7327D8A4733}" type="datetimeFigureOut">
               <a:rPr kumimoji="1" lang="ja-JP" altLang="en-US" smtClean="0"/>
-              <a:t>2026/5/12</a:t>
+              <a:t>2026/5/15</a:t>
             </a:fld>
             <a:endParaRPr kumimoji="1" lang="ja-JP" altLang="en-US"/>
           </a:p>
@@ -662,7 +663,7 @@
           <a:p>
             <a:fld id="{295F8ADE-B108-46AD-965F-F7327D8A4733}" type="datetimeFigureOut">
               <a:rPr kumimoji="1" lang="ja-JP" altLang="en-US" smtClean="0"/>
-              <a:t>2026/5/12</a:t>
+              <a:t>2026/5/15</a:t>
             </a:fld>
             <a:endParaRPr kumimoji="1" lang="ja-JP" altLang="en-US"/>
           </a:p>
@@ -864,7 +865,7 @@
           <a:p>
             <a:fld id="{295F8ADE-B108-46AD-965F-F7327D8A4733}" type="datetimeFigureOut">
               <a:rPr kumimoji="1" lang="ja-JP" altLang="en-US" smtClean="0"/>
-              <a:t>2026/5/12</a:t>
+              <a:t>2026/5/15</a:t>
             </a:fld>
             <a:endParaRPr kumimoji="1" lang="ja-JP" altLang="en-US"/>
           </a:p>
@@ -1110,7 +1111,7 @@
           <a:p>
             <a:fld id="{295F8ADE-B108-46AD-965F-F7327D8A4733}" type="datetimeFigureOut">
               <a:rPr kumimoji="1" lang="ja-JP" altLang="en-US" smtClean="0"/>
-              <a:t>2026/5/12</a:t>
+              <a:t>2026/5/15</a:t>
             </a:fld>
             <a:endParaRPr kumimoji="1" lang="ja-JP" altLang="en-US"/>
           </a:p>
@@ -1406,7 +1407,7 @@
           <a:p>
             <a:fld id="{295F8ADE-B108-46AD-965F-F7327D8A4733}" type="datetimeFigureOut">
               <a:rPr kumimoji="1" lang="ja-JP" altLang="en-US" smtClean="0"/>
-              <a:t>2026/5/12</a:t>
+              <a:t>2026/5/15</a:t>
             </a:fld>
             <a:endParaRPr kumimoji="1" lang="ja-JP" altLang="en-US"/>
           </a:p>
@@ -1837,7 +1838,7 @@
           <a:p>
             <a:fld id="{295F8ADE-B108-46AD-965F-F7327D8A4733}" type="datetimeFigureOut">
               <a:rPr kumimoji="1" lang="ja-JP" altLang="en-US" smtClean="0"/>
-              <a:t>2026/5/12</a:t>
+              <a:t>2026/5/15</a:t>
             </a:fld>
             <a:endParaRPr kumimoji="1" lang="ja-JP" altLang="en-US"/>
           </a:p>
@@ -1955,7 +1956,7 @@
           <a:p>
             <a:fld id="{295F8ADE-B108-46AD-965F-F7327D8A4733}" type="datetimeFigureOut">
               <a:rPr kumimoji="1" lang="ja-JP" altLang="en-US" smtClean="0"/>
-              <a:t>2026/5/12</a:t>
+              <a:t>2026/5/15</a:t>
             </a:fld>
             <a:endParaRPr kumimoji="1" lang="ja-JP" altLang="en-US"/>
           </a:p>
@@ -2050,7 +2051,7 @@
           <a:p>
             <a:fld id="{295F8ADE-B108-46AD-965F-F7327D8A4733}" type="datetimeFigureOut">
               <a:rPr kumimoji="1" lang="ja-JP" altLang="en-US" smtClean="0"/>
-              <a:t>2026/5/12</a:t>
+              <a:t>2026/5/15</a:t>
             </a:fld>
             <a:endParaRPr kumimoji="1" lang="ja-JP" altLang="en-US"/>
           </a:p>
@@ -2359,7 +2360,7 @@
           <a:p>
             <a:fld id="{295F8ADE-B108-46AD-965F-F7327D8A4733}" type="datetimeFigureOut">
               <a:rPr kumimoji="1" lang="ja-JP" altLang="en-US" smtClean="0"/>
-              <a:t>2026/5/12</a:t>
+              <a:t>2026/5/15</a:t>
             </a:fld>
             <a:endParaRPr kumimoji="1" lang="ja-JP" altLang="en-US"/>
           </a:p>
@@ -2616,7 +2617,7 @@
           <a:p>
             <a:fld id="{295F8ADE-B108-46AD-965F-F7327D8A4733}" type="datetimeFigureOut">
               <a:rPr kumimoji="1" lang="ja-JP" altLang="en-US" smtClean="0"/>
-              <a:t>2026/5/12</a:t>
+              <a:t>2026/5/15</a:t>
             </a:fld>
             <a:endParaRPr kumimoji="1" lang="ja-JP" altLang="en-US"/>
           </a:p>
@@ -2861,7 +2862,7 @@
           <a:p>
             <a:fld id="{295F8ADE-B108-46AD-965F-F7327D8A4733}" type="datetimeFigureOut">
               <a:rPr kumimoji="1" lang="ja-JP" altLang="en-US" smtClean="0"/>
-              <a:t>2026/5/12</a:t>
+              <a:t>2026/5/15</a:t>
             </a:fld>
             <a:endParaRPr kumimoji="1" lang="ja-JP" altLang="en-US"/>
           </a:p>
@@ -3928,7 +3929,7 @@
         </p:nvSpPr>
         <p:spPr>
           <a:xfrm>
-            <a:off x="4721263" y="1466850"/>
+            <a:off x="4721264" y="1962150"/>
             <a:ext cx="2749471" cy="707886"/>
           </a:xfrm>
           <a:prstGeom prst="rect">
@@ -3964,8 +3965,8 @@
         </p:nvSpPr>
         <p:spPr>
           <a:xfrm>
-            <a:off x="3579926" y="2967335"/>
-            <a:ext cx="5032147" cy="923330"/>
+            <a:off x="2772013" y="3429000"/>
+            <a:ext cx="6647974" cy="1200329"/>
           </a:xfrm>
           <a:prstGeom prst="rect">
             <a:avLst/>
@@ -3979,18 +3980,18 @@
           <a:lstStyle/>
           <a:p>
             <a:r>
-              <a:rPr kumimoji="1" lang="ja-JP" altLang="en-US" sz="5400" dirty="0"/>
+              <a:rPr kumimoji="1" lang="ja-JP" altLang="en-US" sz="7200" dirty="0"/>
               <a:t>シンプル</a:t>
             </a:r>
             <a:r>
-              <a:rPr kumimoji="1" lang="en-US" altLang="ja-JP" sz="5400" dirty="0"/>
+              <a:rPr kumimoji="1" lang="en-US" altLang="ja-JP" sz="7200" dirty="0"/>
               <a:t>×</a:t>
             </a:r>
             <a:r>
-              <a:rPr lang="ja-JP" altLang="en-US" sz="5400" dirty="0"/>
+              <a:rPr lang="ja-JP" altLang="en-US" sz="7200" dirty="0"/>
               <a:t>爽快</a:t>
             </a:r>
-            <a:endParaRPr lang="en-US" altLang="ja-JP" sz="5400" dirty="0"/>
+            <a:endParaRPr lang="en-US" altLang="ja-JP" sz="7200" dirty="0"/>
           </a:p>
         </p:txBody>
       </p:sp>
@@ -5206,6 +5207,137 @@
     <p:extLst>
       <p:ext uri="{BB962C8B-B14F-4D97-AF65-F5344CB8AC3E}">
         <p14:creationId xmlns:p14="http://schemas.microsoft.com/office/powerpoint/2010/main" val="440422394"/>
+      </p:ext>
+    </p:extLst>
+  </p:cSld>
+  <p:clrMapOvr>
+    <a:masterClrMapping/>
+  </p:clrMapOvr>
+</p:sld>
+</file>
+
+<file path=ppt/slides/slide7.xml><?xml version="1.0" encoding="utf-8"?>
+<p:sld xmlns:a="http://schemas.openxmlformats.org/drawingml/2006/main" xmlns:r="http://schemas.openxmlformats.org/officeDocument/2006/relationships" xmlns:p="http://schemas.openxmlformats.org/presentationml/2006/main">
+  <p:cSld>
+    <p:spTree>
+      <p:nvGrpSpPr>
+        <p:cNvPr id="1" name=""/>
+        <p:cNvGrpSpPr/>
+        <p:nvPr/>
+      </p:nvGrpSpPr>
+      <p:grpSpPr>
+        <a:xfrm>
+          <a:off x="0" y="0"/>
+          <a:ext cx="0" cy="0"/>
+          <a:chOff x="0" y="0"/>
+          <a:chExt cx="0" cy="0"/>
+        </a:xfrm>
+      </p:grpSpPr>
+      <p:sp>
+        <p:nvSpPr>
+          <p:cNvPr id="2" name="タイトル 1">
+            <a:extLst>
+              <a:ext uri="{FF2B5EF4-FFF2-40B4-BE49-F238E27FC236}">
+                <a16:creationId xmlns:a16="http://schemas.microsoft.com/office/drawing/2014/main" id="{7AB00F15-74D9-59F4-5993-A659E9E13CA5}"/>
+              </a:ext>
+            </a:extLst>
+          </p:cNvPr>
+          <p:cNvSpPr>
+            <a:spLocks noGrp="1"/>
+          </p:cNvSpPr>
+          <p:nvPr>
+            <p:ph type="title"/>
+          </p:nvPr>
+        </p:nvSpPr>
+        <p:spPr/>
+        <p:txBody>
+          <a:bodyPr/>
+          <a:lstStyle/>
+          <a:p>
+            <a:r>
+              <a:rPr kumimoji="1" lang="ja-JP" altLang="en-US" b="1" dirty="0"/>
+              <a:t>実装内容</a:t>
+            </a:r>
+          </a:p>
+        </p:txBody>
+      </p:sp>
+      <p:sp>
+        <p:nvSpPr>
+          <p:cNvPr id="4" name="テキスト ボックス 3">
+            <a:extLst>
+              <a:ext uri="{FF2B5EF4-FFF2-40B4-BE49-F238E27FC236}">
+                <a16:creationId xmlns:a16="http://schemas.microsoft.com/office/drawing/2014/main" id="{79A27C51-F567-5F94-95C8-E4F22394DAC6}"/>
+              </a:ext>
+            </a:extLst>
+          </p:cNvPr>
+          <p:cNvSpPr txBox="1"/>
+          <p:nvPr/>
+        </p:nvSpPr>
+        <p:spPr>
+          <a:xfrm>
+            <a:off x="838200" y="1690688"/>
+            <a:ext cx="3736920" cy="1384995"/>
+          </a:xfrm>
+          <a:prstGeom prst="rect">
+            <a:avLst/>
+          </a:prstGeom>
+          <a:noFill/>
+        </p:spPr>
+        <p:txBody>
+          <a:bodyPr wrap="none" rtlCol="0">
+            <a:spAutoFit/>
+          </a:bodyPr>
+          <a:lstStyle/>
+          <a:p>
+            <a:r>
+              <a:rPr kumimoji="1" lang="ja-JP" altLang="en-US" sz="2800" dirty="0"/>
+              <a:t>雑魚敵</a:t>
+            </a:r>
+            <a:r>
+              <a:rPr kumimoji="1" lang="en-US" altLang="ja-JP" sz="2800" dirty="0"/>
+              <a:t>:2~4</a:t>
+            </a:r>
+            <a:r>
+              <a:rPr kumimoji="1" lang="ja-JP" altLang="en-US" sz="2800" dirty="0"/>
+              <a:t>種類</a:t>
+            </a:r>
+            <a:endParaRPr kumimoji="1" lang="en-US" altLang="ja-JP" sz="2800" dirty="0"/>
+          </a:p>
+          <a:p>
+            <a:r>
+              <a:rPr kumimoji="1" lang="ja-JP" altLang="en-US" sz="2800" dirty="0"/>
+              <a:t>ボス</a:t>
+            </a:r>
+            <a:r>
+              <a:rPr kumimoji="1" lang="en-US" altLang="ja-JP" sz="2800" dirty="0"/>
+              <a:t>:1~2</a:t>
+            </a:r>
+            <a:r>
+              <a:rPr kumimoji="1" lang="ja-JP" altLang="en-US" sz="2800" dirty="0"/>
+              <a:t>種類</a:t>
+            </a:r>
+            <a:endParaRPr kumimoji="1" lang="en-US" altLang="ja-JP" sz="2800" dirty="0"/>
+          </a:p>
+          <a:p>
+            <a:r>
+              <a:rPr kumimoji="1" lang="ja-JP" altLang="en-US" sz="2800" dirty="0"/>
+              <a:t>ステージ</a:t>
+            </a:r>
+            <a:r>
+              <a:rPr kumimoji="1" lang="en-US" altLang="ja-JP" sz="2800" dirty="0"/>
+              <a:t>:1~2</a:t>
+            </a:r>
+            <a:r>
+              <a:rPr kumimoji="1" lang="ja-JP" altLang="en-US" sz="2800" dirty="0"/>
+              <a:t>ステージ</a:t>
+            </a:r>
+          </a:p>
+        </p:txBody>
+      </p:sp>
+    </p:spTree>
+    <p:extLst>
+      <p:ext uri="{BB962C8B-B14F-4D97-AF65-F5344CB8AC3E}">
+        <p14:creationId xmlns:p14="http://schemas.microsoft.com/office/powerpoint/2010/main" val="3238359804"/>
       </p:ext>
     </p:extLst>
   </p:cSld>
